--- a/2-seances/S02-premier-contact/a-projeter/seance-2-projection.pptx
+++ b/2-seances/S02-premier-contact/a-projeter/seance-2-projection.pptx
@@ -32,9 +32,10 @@
     <p:sldId id="280" r:id="rId26"/>
     <p:sldId id="281" r:id="rId27"/>
     <p:sldId id="282" r:id="rId28"/>
+    <p:sldId id="283" r:id="rId29"/>
   </p:sldIdLst>
   <p:notesMasterIdLst>
-    <p:notesMasterId r:id="rId29"/>
+    <p:notesMasterId r:id="rId30"/>
   </p:notesMasterIdLst>
   <p:sldSz cx="12192000" cy="6858000"/>
   <p:notesSz cx="6858000" cy="12192000"/>
@@ -704,7 +705,7 @@
           <a:p>
             <a:r>
               <a:rPr lang="en-US" dirty="0"/>
-              <a:t>PENDANT LA PAUSE : allumer tous les postes, ouvrir Thonny, vérifier que GEEKS/mon_xo/jeu.py s'ouvre. À 13 h 05 on commence, on n'attend pas les retardataires.</a:t>
+              <a:t>PENDANT LA PAUSE : allumer tous les postes, ouvrir Thonny, vérifier que GEEKS/mon_xo/jeu.py s'ouvre. À 13 h on commence, on n'attend pas les retardataires.</a:t>
             </a:r>
             <a:endParaRPr lang="en-US" dirty="0"/>
           </a:p>
@@ -792,7 +793,7 @@
           <a:p>
             <a:r>
               <a:rPr lang="en-US" dirty="0"/>
-              <a:t>Tout ce qui précède pouvait être raccourci. Ce bloc, non. 45 minutes.</a:t>
+              <a:t>Tout ce qui précède pouvait être raccourci. Ce bloc, non. 50 minutes, en deux moitiés : je montre 8 min, ils font 12 min.</a:t>
             </a:r>
             <a:endParaRPr lang="en-US" dirty="0"/>
           </a:p>
@@ -1056,7 +1057,7 @@
           <a:p>
             <a:r>
               <a:rPr lang="en-US" dirty="0"/>
-              <a:t>Trois phrases et on avance. On ouvre GEEKS/mon_xo/jeu.py sur l'écran projeté et on appuie sur F5 devant eux.</a:t>
+              <a:t>JE CODE, VOUS PRÉDISEZ : je tape caractère par caractère en verbalisant, puis AVANT d'appuyer sur F5 je demande « qu'est-ce qui va s'afficher ? À trois. » Après : « Vous venez de voir un ordinateur OBÉIR. C'est tout le métier. »</a:t>
             </a:r>
             <a:endParaRPr lang="en-US" dirty="0"/>
           </a:p>
@@ -1144,7 +1145,7 @@
           <a:p>
             <a:r>
               <a:rPr lang="en-US" dirty="0"/>
-              <a:t>LE MOMENT LE PLUS IMPORTANT DE LA SÉANCE. Lentement, sans dramatiser. « Est-ce que l'ordinateur est cassé ? Non. Est-ce que je suis puni ? Non. » Puis je corrige devant eux, je relance, ça marche. Et : « aujourd'hui, celui qui voit du rouge lève le pouce : il a trouvé quelque chose. »</a:t>
+              <a:t>Demander AVANT de lancer : « dans quel ordre ça va s'afficher ? » Puis F5.</a:t>
             </a:r>
             <a:endParaRPr lang="en-US" dirty="0"/>
           </a:p>
@@ -1232,7 +1233,7 @@
           <a:p>
             <a:r>
               <a:rPr lang="en-US" dirty="0"/>
-              <a:t>Court exprès. Je circule, je ne m'assois pas, je ne touche jamais le clavier d'un élève. À 13 h 25 tout le monde lâche le clavier.</a:t>
+              <a:t>LE MOMENT LE PLUS IMPORTANT DE LA SÉANCE. Lentement, sans dramatiser. « Est-ce que l'ordinateur est cassé ? Non. Est-ce que je suis puni ? Non. » Puis je corrige devant eux, je relance, ça marche. Et : « aujourd'hui, celui qui voit du rouge lève le pouce : il a trouvé quelque chose. »</a:t>
             </a:r>
             <a:endParaRPr lang="en-US" dirty="0"/>
           </a:p>
@@ -1320,7 +1321,7 @@
           <a:p>
             <a:r>
               <a:rPr lang="en-US" dirty="0"/>
-              <a:t>Tout le monde lâche le clavier. Écrans face à nous, mains sur la table. 8 minutes.</a:t>
+              <a:t>12 minutes. Je circule, je ne m'assois pas, je ne touche JAMAIS le clavier d'un élève. Le panneau d'arrêt est écrit dans leur fichier, au milieu. À 13 h 27 tout le monde doit avoir vu son écran d'accueil avec son prénom.</a:t>
             </a:r>
             <a:endParaRPr lang="en-US" dirty="0"/>
           </a:p>
@@ -1408,7 +1409,7 @@
           <a:p>
             <a:r>
               <a:rPr lang="en-US" dirty="0"/>
-              <a:t>C'EST LA QUESTION DU JOUR. On la pose AVANT de lancer, et on laisse la classe se tromper : c'est comme ça qu'ils comprennent. Puis on lance : il affiche Damien.</a:t>
+              <a:t>Tout le monde lâche le clavier. Écrans face à nous, mains sur la table. 8 minutes.</a:t>
             </a:r>
             <a:endParaRPr lang="en-US" dirty="0"/>
           </a:p>
@@ -1496,7 +1497,7 @@
           <a:p>
             <a:r>
               <a:rPr lang="en-US" dirty="0"/>
-              <a:t>10 à 12 minutes. Sur les deux dernières minutes, annoncer la séance : « samedi dernier on n'a pas eu le temps d'allumer les machines. Aujourd'hui on répare ça : à 13 h 05 tout le monde est devant un clavier. Et à 14 h, votre jeu vous demandera votre nom. »</a:t>
+              <a:t>10 à 12 minutes. Sur les deux dernières minutes, annoncer la séance : « samedi dernier on n'a pas eu le temps d'allumer les machines. Aujourd'hui on répare ça : à 13 h tout le monde est devant un clavier. Et à 14 h, votre jeu vous demandera votre nom. »</a:t>
             </a:r>
             <a:endParaRPr lang="en-US" dirty="0"/>
           </a:p>
@@ -1584,7 +1585,7 @@
           <a:p>
             <a:r>
               <a:rPr lang="en-US" dirty="0"/>
-              <a:t>Une minute. C'est la confusion n°1 de toute l'année : on y revient à chaque fois que quelqu'un a un NameError.</a:t>
+              <a:t>C'EST LA QUESTION DU JOUR. On la pose AVANT de lancer, et on laisse la classe se tromper : c'est comme ça qu'ils comprennent. Puis on lance : il affiche Damien.</a:t>
             </a:r>
             <a:endParaRPr lang="en-US" dirty="0"/>
           </a:p>
@@ -1672,7 +1673,7 @@
           <a:p>
             <a:r>
               <a:rPr lang="en-US" dirty="0"/>
-              <a:t>On lance, et ON TAPE LE PRÉNOM D'UN ÉLÈVE DE LA CLASSE. Effet garanti. « Le programme s'est arrêté et il m'attend. C'est ça, input. »</a:t>
+              <a:t>Une minute. C'est la confusion n°1 de toute l'année : on y revient à chaque fois que quelqu'un a un NameError.</a:t>
             </a:r>
             <a:endParaRPr lang="en-US" dirty="0"/>
           </a:p>
@@ -1760,7 +1761,7 @@
           <a:p>
             <a:r>
               <a:rPr lang="en-US" dirty="0"/>
-              <a:t>Montrer l'oubli de l'espace une fois, en vrai. Ils rient, ils retiennent. Et on s'arrête là : on les envoie faire.</a:t>
+              <a:t>On lance, et ON TAPE LE PRÉNOM D'UN ÉLÈVE DE LA CLASSE. Effet garanti. « Le programme s'est arrêté et il m'attend. C'est ça, input. »</a:t>
             </a:r>
             <a:endParaRPr lang="en-US" dirty="0"/>
           </a:p>
@@ -1848,7 +1849,7 @@
           <a:p>
             <a:r>
               <a:rPr lang="en-US" dirty="0"/>
-              <a:t>Je circule, je ne m'assois pas, je ne touche jamais le clavier. Devant une erreur : je lis le message AVEC l'élève et je demande « qu'est-ce qu'il te dit ? ». Le défi en plus : demander aussi l'âge du joueur.</a:t>
+              <a:t>Montrer l'oubli de l'espace une fois, en vrai. Ils rient, ils retiennent. Et on s'arrête là : on les envoie faire.</a:t>
             </a:r>
             <a:endParaRPr lang="en-US" dirty="0"/>
           </a:p>
@@ -1936,7 +1937,7 @@
           <a:p>
             <a:r>
               <a:rPr lang="en-US" dirty="0"/>
-              <a:t>Diapo à laisser affichée pendant tout l'atelier : elle répond à la plupart des mains levées.</a:t>
+              <a:t>Je circule, je ne m'assois pas, je ne touche jamais le clavier. Devant une erreur : je lis le message AVEC l'élève et je demande « qu'est-ce qu'il te dit ? ». Le défi en plus : demander aussi l'âge du joueur.</a:t>
             </a:r>
             <a:endParaRPr lang="en-US" dirty="0"/>
           </a:p>
@@ -2024,7 +2025,7 @@
           <a:p>
             <a:r>
               <a:rPr lang="en-US" dirty="0"/>
-              <a:t>Tous ensemble, au signal. Vérifier d'un coup d'œil que l'étoile a disparu partout. Puis ouvrir GEEKS/xo_officiel devant eux.</a:t>
+              <a:t>Diapo à laisser affichée pendant tout l'atelier : elle répond à la plupart des mains levées.</a:t>
             </a:r>
             <a:endParaRPr lang="en-US" dirty="0"/>
           </a:p>
@@ -2112,7 +2113,7 @@
           <a:p>
             <a:r>
               <a:rPr lang="en-US" dirty="0"/>
-              <a:t>4 minutes de Mur de Mission, 4 minutes de question à la classe. On note le soir même dans l'onglet Journal du classeur.</a:t>
+              <a:t>Tous ensemble, au signal. Vérifier d'un coup d'œil que l'étoile a disparu partout. Puis ouvrir GEEKS/xo_officiel devant eux.</a:t>
             </a:r>
             <a:endParaRPr lang="en-US" dirty="0"/>
           </a:p>
@@ -2200,7 +2201,7 @@
           <a:p>
             <a:r>
               <a:rPr lang="en-US" dirty="0"/>
-              <a:t>Dernière phrase de la séance. On laisse la diapo affichée pendant la sortie.</a:t>
+              <a:t>4 minutes de Mur de Mission, 4 minutes de question à la classe. On note le soir même dans l'onglet Journal du classeur.</a:t>
             </a:r>
             <a:endParaRPr lang="en-US" dirty="0"/>
           </a:p>
@@ -2224,6 +2225,94 @@
             <a:fld id="{F7021451-1387-4CA6-816F-3879F97B5CBC}" type="slidenum">
               <a:rPr lang="en-US"/>
               <a:t>27</a:t>
+            </a:fld>
+            <a:endParaRPr lang="en-US"/>
+          </a:p>
+        </p:txBody>
+      </p:sp>
+    </p:spTree>
+    <p:extLst>
+      <p:ext uri="{BB962C8B-B14F-4D97-AF65-F5344CB8AC3E}">
+        <p14:creationId xmlns:p14="http://schemas.microsoft.com/office/powerpoint/2010/main" val="1024086991"/>
+      </p:ext>
+    </p:extLst>
+  </p:cSld>
+  <p:clrMapOvr>
+    <a:masterClrMapping/>
+  </p:clrMapOvr>
+</p:notes>
+</file>
+
+<file path=ppt/notesSlides/notesSlide28.xml><?xml version="1.0" encoding="utf-8"?>
+<p:notes xmlns:a="http://schemas.openxmlformats.org/drawingml/2006/main" xmlns:r="http://schemas.openxmlformats.org/officeDocument/2006/relationships" xmlns:p="http://schemas.openxmlformats.org/presentationml/2006/main">
+  <p:cSld>
+    <p:spTree>
+      <p:nvGrpSpPr>
+        <p:cNvPr id="1" name=""/>
+        <p:cNvGrpSpPr/>
+        <p:nvPr/>
+      </p:nvGrpSpPr>
+      <p:grpSpPr>
+        <a:xfrm>
+          <a:off x="0" y="0"/>
+          <a:ext cx="0" cy="0"/>
+          <a:chOff x="0" y="0"/>
+          <a:chExt cx="0" cy="0"/>
+        </a:xfrm>
+      </p:grpSpPr>
+      <p:sp>
+        <p:nvSpPr>
+          <p:cNvPr id="2" name="Slide Image Placeholder 1"/>
+          <p:cNvSpPr>
+            <a:spLocks noGrp="1" noRot="1" noChangeAspect="1"/>
+          </p:cNvSpPr>
+          <p:nvPr>
+            <p:ph type="sldImg"/>
+          </p:nvPr>
+        </p:nvSpPr>
+        <p:spPr/>
+      </p:sp>
+      <p:sp>
+        <p:nvSpPr>
+          <p:cNvPr id="3" name="Notes Placeholder 2"/>
+          <p:cNvSpPr>
+            <a:spLocks noGrp="1"/>
+          </p:cNvSpPr>
+          <p:nvPr>
+            <p:ph type="body" idx="1"/>
+          </p:nvPr>
+        </p:nvSpPr>
+        <p:spPr/>
+        <p:txBody>
+          <a:bodyPr/>
+          <a:lstStyle/>
+          <a:p>
+            <a:r>
+              <a:rPr lang="en-US" dirty="0"/>
+              <a:t>Dernière phrase de la séance. On laisse la diapo affichée pendant la sortie.</a:t>
+            </a:r>
+            <a:endParaRPr lang="en-US" dirty="0"/>
+          </a:p>
+        </p:txBody>
+      </p:sp>
+      <p:sp>
+        <p:nvSpPr>
+          <p:cNvPr id="4" name="Slide Number Placeholder 3"/>
+          <p:cNvSpPr>
+            <a:spLocks noGrp="1"/>
+          </p:cNvSpPr>
+          <p:nvPr>
+            <p:ph type="sldNum" sz="quarter" idx="10"/>
+          </p:nvPr>
+        </p:nvSpPr>
+        <p:spPr/>
+        <p:txBody>
+          <a:bodyPr/>
+          <a:lstStyle/>
+          <a:p>
+            <a:fld id="{F7021451-1387-4CA6-816F-3879F97B5CBC}" type="slidenum">
+              <a:rPr lang="en-US"/>
+              <a:t>28</a:t>
             </a:fld>
             <a:endParaRPr lang="en-US"/>
           </a:p>
@@ -3909,7 +3998,7 @@
                 <a:ea typeface="Courier New" pitchFamily="34" charset="-122"/>
                 <a:cs typeface="Courier New" pitchFamily="34" charset="-120"/>
               </a:rPr>
-              <a:t>12 h 53</a:t>
+              <a:t>12 h 48</a:t>
             </a:r>
             <a:endParaRPr lang="en-US" sz="1100" dirty="0"/>
           </a:p>
@@ -4823,7 +4912,7 @@
                 <a:ea typeface="Courier New" pitchFamily="34" charset="-122"/>
                 <a:cs typeface="Courier New" pitchFamily="34" charset="-120"/>
               </a:rPr>
-              <a:t>12 h 55 - 13 h 05</a:t>
+              <a:t>12 h 50 - 13 h</a:t>
             </a:r>
             <a:endParaRPr lang="en-US" sz="1100" dirty="0"/>
           </a:p>
@@ -5156,7 +5245,7 @@
                 <a:ea typeface="Calibri" pitchFamily="34" charset="-122"/>
                 <a:cs typeface="Calibri" pitchFamily="34" charset="-120"/>
               </a:rPr>
-              <a:t>10 minutes. Levez-vous, sortez, bougez.   ·   Retour à 13 h 05</a:t>
+              <a:t>10 minutes. Levez-vous, sortez, bougez.   ·   Retour à 13 h</a:t>
             </a:r>
             <a:endParaRPr lang="en-US" sz="2000" dirty="0"/>
           </a:p>
@@ -5227,7 +5316,7 @@
                 <a:ea typeface="Courier New" pitchFamily="34" charset="-122"/>
                 <a:cs typeface="Courier New" pitchFamily="34" charset="-120"/>
               </a:rPr>
-              <a:t>13 h 05</a:t>
+              <a:t>13 h</a:t>
             </a:r>
             <a:endParaRPr lang="en-US" sz="1100" dirty="0"/>
           </a:p>
@@ -5831,7 +5920,7 @@
                 <a:ea typeface="Courier New" pitchFamily="34" charset="-122"/>
                 <a:cs typeface="Courier New" pitchFamily="34" charset="-120"/>
               </a:rPr>
-              <a:t>13 h 05</a:t>
+              <a:t>13 h</a:t>
             </a:r>
             <a:endParaRPr lang="en-US" sz="1100" dirty="0"/>
           </a:p>
@@ -6706,7 +6795,7 @@
                 <a:ea typeface="Courier New" pitchFamily="34" charset="-122"/>
                 <a:cs typeface="Courier New" pitchFamily="34" charset="-120"/>
               </a:rPr>
-              <a:t>13 h 08</a:t>
+              <a:t>13 h 04</a:t>
             </a:r>
             <a:endParaRPr lang="en-US" sz="1100" dirty="0"/>
           </a:p>
@@ -7633,7 +7722,7 @@
                 <a:ea typeface="Courier New" pitchFamily="34" charset="-122"/>
                 <a:cs typeface="Courier New" pitchFamily="34" charset="-120"/>
               </a:rPr>
-              <a:t>13 h 12</a:t>
+              <a:t>13 h 07</a:t>
             </a:r>
             <a:endParaRPr lang="en-US" sz="1100" dirty="0"/>
           </a:p>
@@ -7888,7 +7977,7 @@
                 <a:ea typeface="Calibri" pitchFamily="34" charset="-122"/>
                 <a:cs typeface="Calibri" pitchFamily="34" charset="-120"/>
               </a:rPr>
-              <a:t>SUR VOTRE ÉCRAN</a:t>
+              <a:t>LA PREMIÈRE COMMANDE</a:t>
             </a:r>
             <a:endParaRPr lang="en-US" sz="1300" dirty="0"/>
           </a:p>
@@ -7930,7 +8019,7 @@
                 <a:ea typeface="Calibri" pitchFamily="34" charset="-122"/>
                 <a:cs typeface="Calibri" pitchFamily="34" charset="-120"/>
               </a:rPr>
-              <a:t>Ce programme est déjà écrit. Il marche.</a:t>
+              <a:t>print, ça veut dire AFFICHE.</a:t>
             </a:r>
             <a:endParaRPr lang="en-US" sz="4000" dirty="0"/>
           </a:p>
@@ -7944,12 +8033,12 @@
         </p:nvSpPr>
         <p:spPr>
           <a:xfrm>
-            <a:off x="640080" y="2194560"/>
-            <a:ext cx="10881360" cy="1600200"/>
-          </a:xfrm>
-          <a:prstGeom prst="roundRect">
-            <a:avLst>
-              <a:gd name="adj" fmla="val 4571"/>
+            <a:off x="640080" y="2103120"/>
+            <a:ext cx="10881360" cy="1051560"/>
+          </a:xfrm>
+          <a:prstGeom prst="roundRect">
+            <a:avLst>
+              <a:gd name="adj" fmla="val 6957"/>
             </a:avLst>
           </a:prstGeom>
           <a:solidFill>
@@ -7966,8 +8055,8 @@
         </p:nvSpPr>
         <p:spPr>
           <a:xfrm>
-            <a:off x="960120" y="2423160"/>
-            <a:ext cx="10241280" cy="1143000"/>
+            <a:off x="960120" y="2331720"/>
+            <a:ext cx="10241280" cy="594360"/>
           </a:xfrm>
           <a:prstGeom prst="rect">
             <a:avLst/>
@@ -7981,12 +8070,12 @@
           <a:p>
             <a:pPr indent="0" marL="0">
               <a:lnSpc>
-                <a:spcPts val="2600"/>
+                <a:spcPts val="3400"/>
               </a:lnSpc>
               <a:buNone/>
             </a:pPr>
             <a:r>
-              <a:rPr lang="en-US" sz="1700" dirty="0">
+              <a:rPr lang="en-US" sz="3200" dirty="0">
                 <a:solidFill>
                   <a:srgbClr val="4FC3F7"/>
                 </a:solidFill>
@@ -7994,101 +8083,90 @@
                 <a:ea typeface="Courier New" pitchFamily="34" charset="-122"/>
                 <a:cs typeface="Courier New" pitchFamily="34" charset="-120"/>
               </a:rPr>
-              <a:t>print("===================================")</a:t>
-            </a:r>
-            <a:endParaRPr lang="en-US" sz="1700" dirty="0"/>
-          </a:p>
+              <a:t>print("Bonjour")</a:t>
+            </a:r>
+            <a:endParaRPr lang="en-US" sz="3200" dirty="0"/>
+          </a:p>
+        </p:txBody>
+      </p:sp>
+      <p:sp>
+        <p:nvSpPr>
+          <p:cNvPr id="16" name="Shape 14"/>
+          <p:cNvSpPr/>
+          <p:nvPr/>
+        </p:nvSpPr>
+        <p:spPr>
+          <a:xfrm>
+            <a:off x="640080" y="3474720"/>
+            <a:ext cx="3444240" cy="1737360"/>
+          </a:xfrm>
+          <a:prstGeom prst="roundRect">
+            <a:avLst>
+              <a:gd name="adj" fmla="val 4211"/>
+            </a:avLst>
+          </a:prstGeom>
+          <a:solidFill>
+            <a:srgbClr val="FFFFFF"/>
+          </a:solidFill>
+          <a:ln/>
+          <a:effectLst>
+            <a:outerShdw sx="100000" sy="100000" kx="0" ky="0" algn="bl" rotWithShape="0" blurRad="127000" dist="25400" dir="5400000">
+              <a:srgbClr val="20204A">
+                <a:alpha val="12000"/>
+              </a:srgbClr>
+            </a:outerShdw>
+          </a:effectLst>
+        </p:spPr>
+      </p:sp>
+      <p:sp>
+        <p:nvSpPr>
+          <p:cNvPr id="17" name="Text 15"/>
+          <p:cNvSpPr txBox="1"/>
+          <p:nvPr/>
+        </p:nvSpPr>
+        <p:spPr>
+          <a:xfrm>
+            <a:off x="868680" y="3730752"/>
+            <a:ext cx="2987040" cy="457200"/>
+          </a:xfrm>
+          <a:prstGeom prst="rect">
+            <a:avLst/>
+          </a:prstGeom>
+          <a:noFill/>
+          <a:ln/>
+        </p:spPr>
+        <p:txBody>
+          <a:bodyPr wrap="square" lIns="0" tIns="0" rIns="0" bIns="0" rtlCol="0" anchor="t"/>
+          <a:lstStyle/>
           <a:p>
             <a:pPr indent="0" marL="0">
-              <a:lnSpc>
-                <a:spcPts val="2600"/>
-              </a:lnSpc>
-              <a:buNone/>
-            </a:pPr>
-            <a:r>
-              <a:rPr lang="en-US" sz="1700" dirty="0">
-                <a:solidFill>
-                  <a:srgbClr val="4FC3F7"/>
-                </a:solidFill>
-                <a:latin typeface="Courier New" pitchFamily="34" charset="0"/>
-                <a:ea typeface="Courier New" pitchFamily="34" charset="-122"/>
-                <a:cs typeface="Courier New" pitchFamily="34" charset="-120"/>
-              </a:rPr>
-              <a:t>print("       BIENVENUE DANS LE JEU XO")</a:t>
-            </a:r>
-            <a:endParaRPr lang="en-US" sz="1700" dirty="0"/>
-          </a:p>
-          <a:p>
-            <a:pPr indent="0" marL="0">
-              <a:lnSpc>
-                <a:spcPts val="2600"/>
-              </a:lnSpc>
-              <a:buNone/>
-            </a:pPr>
-            <a:r>
-              <a:rPr lang="en-US" sz="1700" dirty="0">
-                <a:solidFill>
-                  <a:srgbClr val="4FC3F7"/>
-                </a:solidFill>
-                <a:latin typeface="Courier New" pitchFamily="34" charset="0"/>
-                <a:ea typeface="Courier New" pitchFamily="34" charset="-122"/>
-                <a:cs typeface="Courier New" pitchFamily="34" charset="-120"/>
-              </a:rPr>
-              <a:t>print("===================================")</a:t>
-            </a:r>
-            <a:endParaRPr lang="en-US" sz="1700" dirty="0"/>
-          </a:p>
-        </p:txBody>
-      </p:sp>
-      <p:sp>
-        <p:nvSpPr>
-          <p:cNvPr id="16" name="Text 14"/>
-          <p:cNvSpPr txBox="1"/>
-          <p:nvPr/>
-        </p:nvSpPr>
-        <p:spPr>
-          <a:xfrm>
-            <a:off x="640080" y="4023360"/>
-            <a:ext cx="10881360" cy="548640"/>
-          </a:xfrm>
-          <a:prstGeom prst="rect">
-            <a:avLst/>
-          </a:prstGeom>
-          <a:noFill/>
-          <a:ln/>
-        </p:spPr>
-        <p:txBody>
-          <a:bodyPr wrap="square" lIns="0" tIns="0" rIns="0" bIns="0" rtlCol="0" anchor="t"/>
-          <a:lstStyle/>
-          <a:p>
-            <a:pPr indent="0" marL="0">
-              <a:buNone/>
-            </a:pPr>
-            <a:r>
-              <a:rPr lang="en-US" sz="2000" dirty="0">
-                <a:solidFill>
-                  <a:srgbClr val="14142B"/>
+              <a:buNone/>
+            </a:pPr>
+            <a:r>
+              <a:rPr lang="en-US" sz="2400" b="1" dirty="0">
+                <a:solidFill>
+                  <a:srgbClr val="6B2D8F"/>
                 </a:solidFill>
                 <a:latin typeface="Calibri" pitchFamily="34" charset="0"/>
                 <a:ea typeface="Calibri" pitchFamily="34" charset="-122"/>
                 <a:cs typeface="Calibri" pitchFamily="34" charset="-120"/>
               </a:rPr>
-              <a:t>Chaque ligne print affiche ce qu'il y a entre les guillemets. Voilà : vous savez le lire.</a:t>
-            </a:r>
-            <a:endParaRPr lang="en-US" sz="2000" dirty="0"/>
-          </a:p>
-        </p:txBody>
-      </p:sp>
-      <p:sp>
-        <p:nvSpPr>
-          <p:cNvPr id="17" name="Text 15"/>
-          <p:cNvSpPr txBox="1"/>
-          <p:nvPr/>
-        </p:nvSpPr>
-        <p:spPr>
-          <a:xfrm>
-            <a:off x="640080" y="5440680"/>
-            <a:ext cx="10881360" cy="640080"/>
+              <a:t>print</a:t>
+            </a:r>
+            <a:endParaRPr lang="en-US" sz="2400" dirty="0"/>
+          </a:p>
+        </p:txBody>
+      </p:sp>
+      <p:sp>
+        <p:nvSpPr>
+          <p:cNvPr id="18" name="Text 16"/>
+          <p:cNvSpPr txBox="1"/>
+          <p:nvPr/>
+        </p:nvSpPr>
+        <p:spPr>
+          <a:xfrm>
+            <a:off x="868680" y="4261104"/>
+            <a:ext cx="2987040" cy="777240"/>
           </a:xfrm>
           <a:prstGeom prst="rect">
             <a:avLst/>
@@ -8101,20 +8179,272 @@
           <a:lstStyle/>
           <a:p>
             <a:pPr indent="0" marL="0">
-              <a:buNone/>
-            </a:pPr>
-            <a:r>
-              <a:rPr lang="en-US" sz="2100" b="1" dirty="0">
-                <a:solidFill>
-                  <a:srgbClr val="6B2D8F"/>
+              <a:lnSpc>
+                <a:spcPts val="2000"/>
+              </a:lnSpc>
+              <a:buNone/>
+            </a:pPr>
+            <a:r>
+              <a:rPr lang="en-US" sz="1400" dirty="0">
+                <a:solidFill>
+                  <a:srgbClr val="5A5A72"/>
                 </a:solidFill>
                 <a:latin typeface="Calibri" pitchFamily="34" charset="0"/>
                 <a:ea typeface="Calibri" pitchFamily="34" charset="-122"/>
                 <a:cs typeface="Calibri" pitchFamily="34" charset="-120"/>
               </a:rPr>
-              <a:t>On ne l'apprend pas aujourd'hui. On s'en sert — et on passe à la vraie leçon du jour.</a:t>
-            </a:r>
-            <a:endParaRPr lang="en-US" sz="2100" dirty="0"/>
+              <a:t>AFFICHE. Toujours en minuscules.</a:t>
+            </a:r>
+            <a:endParaRPr lang="en-US" sz="1400" dirty="0"/>
+          </a:p>
+          <a:p>
+            <a:pPr indent="0" marL="0">
+              <a:lnSpc>
+                <a:spcPts val="2000"/>
+              </a:lnSpc>
+              <a:buNone/>
+            </a:pPr>
+            <a:endParaRPr lang="en-US" sz="1400" dirty="0"/>
+          </a:p>
+          <a:p>
+            <a:pPr indent="0" marL="0">
+              <a:lnSpc>
+                <a:spcPts val="2000"/>
+              </a:lnSpc>
+              <a:buNone/>
+            </a:pPr>
+            <a:r>
+              <a:rPr lang="en-US" sz="1400" dirty="0">
+                <a:solidFill>
+                  <a:srgbClr val="5A5A72"/>
+                </a:solidFill>
+                <a:latin typeface="Calibri" pitchFamily="34" charset="0"/>
+                <a:ea typeface="Calibri" pitchFamily="34" charset="-122"/>
+                <a:cs typeface="Calibri" pitchFamily="34" charset="-120"/>
+              </a:rPr>
+              <a:t>Ça n'imprime RIEN sur du papier.</a:t>
+            </a:r>
+            <a:endParaRPr lang="en-US" sz="1400" dirty="0"/>
+          </a:p>
+        </p:txBody>
+      </p:sp>
+      <p:sp>
+        <p:nvSpPr>
+          <p:cNvPr id="19" name="Shape 17"/>
+          <p:cNvSpPr/>
+          <p:nvPr/>
+        </p:nvSpPr>
+        <p:spPr>
+          <a:xfrm>
+            <a:off x="4358640" y="3474720"/>
+            <a:ext cx="3444240" cy="1737360"/>
+          </a:xfrm>
+          <a:prstGeom prst="roundRect">
+            <a:avLst>
+              <a:gd name="adj" fmla="val 4211"/>
+            </a:avLst>
+          </a:prstGeom>
+          <a:solidFill>
+            <a:srgbClr val="FFFFFF"/>
+          </a:solidFill>
+          <a:ln/>
+          <a:effectLst>
+            <a:outerShdw sx="100000" sy="100000" kx="0" ky="0" algn="bl" rotWithShape="0" blurRad="127000" dist="25400" dir="5400000">
+              <a:srgbClr val="20204A">
+                <a:alpha val="12000"/>
+              </a:srgbClr>
+            </a:outerShdw>
+          </a:effectLst>
+        </p:spPr>
+      </p:sp>
+      <p:sp>
+        <p:nvSpPr>
+          <p:cNvPr id="20" name="Text 18"/>
+          <p:cNvSpPr txBox="1"/>
+          <p:nvPr/>
+        </p:nvSpPr>
+        <p:spPr>
+          <a:xfrm>
+            <a:off x="4587240" y="3730752"/>
+            <a:ext cx="2987040" cy="457200"/>
+          </a:xfrm>
+          <a:prstGeom prst="rect">
+            <a:avLst/>
+          </a:prstGeom>
+          <a:noFill/>
+          <a:ln/>
+        </p:spPr>
+        <p:txBody>
+          <a:bodyPr wrap="square" lIns="0" tIns="0" rIns="0" bIns="0" rtlCol="0" anchor="t"/>
+          <a:lstStyle/>
+          <a:p>
+            <a:pPr indent="0" marL="0">
+              <a:buNone/>
+            </a:pPr>
+            <a:r>
+              <a:rPr lang="en-US" sz="2400" b="1" dirty="0">
+                <a:solidFill>
+                  <a:srgbClr val="13678F"/>
+                </a:solidFill>
+                <a:latin typeface="Calibri" pitchFamily="34" charset="0"/>
+                <a:ea typeface="Calibri" pitchFamily="34" charset="-122"/>
+                <a:cs typeface="Calibri" pitchFamily="34" charset="-120"/>
+              </a:rPr>
+              <a:t>( )</a:t>
+            </a:r>
+            <a:endParaRPr lang="en-US" sz="2400" dirty="0"/>
+          </a:p>
+        </p:txBody>
+      </p:sp>
+      <p:sp>
+        <p:nvSpPr>
+          <p:cNvPr id="21" name="Text 19"/>
+          <p:cNvSpPr txBox="1"/>
+          <p:nvPr/>
+        </p:nvSpPr>
+        <p:spPr>
+          <a:xfrm>
+            <a:off x="4587240" y="4261104"/>
+            <a:ext cx="2987040" cy="777240"/>
+          </a:xfrm>
+          <a:prstGeom prst="rect">
+            <a:avLst/>
+          </a:prstGeom>
+          <a:noFill/>
+          <a:ln/>
+        </p:spPr>
+        <p:txBody>
+          <a:bodyPr wrap="square" lIns="0" tIns="0" rIns="0" bIns="0" rtlCol="0" anchor="t"/>
+          <a:lstStyle/>
+          <a:p>
+            <a:pPr indent="0" marL="0">
+              <a:lnSpc>
+                <a:spcPts val="2000"/>
+              </a:lnSpc>
+              <a:buNone/>
+            </a:pPr>
+            <a:r>
+              <a:rPr lang="en-US" sz="1400" dirty="0">
+                <a:solidFill>
+                  <a:srgbClr val="5A5A72"/>
+                </a:solidFill>
+                <a:latin typeface="Calibri" pitchFamily="34" charset="0"/>
+                <a:ea typeface="Calibri" pitchFamily="34" charset="-122"/>
+                <a:cs typeface="Calibri" pitchFamily="34" charset="-120"/>
+              </a:rPr>
+              <a:t>Une parenthèse qu'on ouvre se referme TOUJOURS.</a:t>
+            </a:r>
+            <a:endParaRPr lang="en-US" sz="1400" dirty="0"/>
+          </a:p>
+        </p:txBody>
+      </p:sp>
+      <p:sp>
+        <p:nvSpPr>
+          <p:cNvPr id="22" name="Shape 20"/>
+          <p:cNvSpPr/>
+          <p:nvPr/>
+        </p:nvSpPr>
+        <p:spPr>
+          <a:xfrm>
+            <a:off x="8077200" y="3474720"/>
+            <a:ext cx="3444240" cy="1737360"/>
+          </a:xfrm>
+          <a:prstGeom prst="roundRect">
+            <a:avLst>
+              <a:gd name="adj" fmla="val 4211"/>
+            </a:avLst>
+          </a:prstGeom>
+          <a:solidFill>
+            <a:srgbClr val="FFFFFF"/>
+          </a:solidFill>
+          <a:ln/>
+          <a:effectLst>
+            <a:outerShdw sx="100000" sy="100000" kx="0" ky="0" algn="bl" rotWithShape="0" blurRad="127000" dist="25400" dir="5400000">
+              <a:srgbClr val="20204A">
+                <a:alpha val="12000"/>
+              </a:srgbClr>
+            </a:outerShdw>
+          </a:effectLst>
+        </p:spPr>
+      </p:sp>
+      <p:sp>
+        <p:nvSpPr>
+          <p:cNvPr id="23" name="Text 21"/>
+          <p:cNvSpPr txBox="1"/>
+          <p:nvPr/>
+        </p:nvSpPr>
+        <p:spPr>
+          <a:xfrm>
+            <a:off x="8305800" y="3730752"/>
+            <a:ext cx="2987040" cy="457200"/>
+          </a:xfrm>
+          <a:prstGeom prst="rect">
+            <a:avLst/>
+          </a:prstGeom>
+          <a:noFill/>
+          <a:ln/>
+        </p:spPr>
+        <p:txBody>
+          <a:bodyPr wrap="square" lIns="0" tIns="0" rIns="0" bIns="0" rtlCol="0" anchor="t"/>
+          <a:lstStyle/>
+          <a:p>
+            <a:pPr indent="0" marL="0">
+              <a:buNone/>
+            </a:pPr>
+            <a:r>
+              <a:rPr lang="en-US" sz="2400" b="1" dirty="0">
+                <a:solidFill>
+                  <a:srgbClr val="A65D00"/>
+                </a:solidFill>
+                <a:latin typeface="Calibri" pitchFamily="34" charset="0"/>
+                <a:ea typeface="Calibri" pitchFamily="34" charset="-122"/>
+                <a:cs typeface="Calibri" pitchFamily="34" charset="-120"/>
+              </a:rPr>
+              <a:t>" "</a:t>
+            </a:r>
+            <a:endParaRPr lang="en-US" sz="2400" dirty="0"/>
+          </a:p>
+        </p:txBody>
+      </p:sp>
+      <p:sp>
+        <p:nvSpPr>
+          <p:cNvPr id="24" name="Text 22"/>
+          <p:cNvSpPr txBox="1"/>
+          <p:nvPr/>
+        </p:nvSpPr>
+        <p:spPr>
+          <a:xfrm>
+            <a:off x="8305800" y="4261104"/>
+            <a:ext cx="2987040" cy="777240"/>
+          </a:xfrm>
+          <a:prstGeom prst="rect">
+            <a:avLst/>
+          </a:prstGeom>
+          <a:noFill/>
+          <a:ln/>
+        </p:spPr>
+        <p:txBody>
+          <a:bodyPr wrap="square" lIns="0" tIns="0" rIns="0" bIns="0" rtlCol="0" anchor="t"/>
+          <a:lstStyle/>
+          <a:p>
+            <a:pPr indent="0" marL="0">
+              <a:lnSpc>
+                <a:spcPts val="2000"/>
+              </a:lnSpc>
+              <a:buNone/>
+            </a:pPr>
+            <a:r>
+              <a:rPr lang="en-US" sz="1400" dirty="0">
+                <a:solidFill>
+                  <a:srgbClr val="5A5A72"/>
+                </a:solidFill>
+                <a:latin typeface="Calibri" pitchFamily="34" charset="0"/>
+                <a:ea typeface="Calibri" pitchFamily="34" charset="-122"/>
+                <a:cs typeface="Calibri" pitchFamily="34" charset="-120"/>
+              </a:rPr>
+              <a:t>Par deux, comme des chaussures. Elles ne s'affichent pas : elles disent « ceci est du texte ».</a:t>
+            </a:r>
+            <a:endParaRPr lang="en-US" sz="1400" dirty="0"/>
           </a:p>
         </p:txBody>
       </p:sp>
@@ -8129,6 +8459,891 @@
 <file path=ppt/slides/slide16.xml><?xml version="1.0" encoding="utf-8"?>
 <p:sld xmlns:a="http://schemas.openxmlformats.org/drawingml/2006/main" xmlns:r="http://schemas.openxmlformats.org/officeDocument/2006/relationships" xmlns:p="http://schemas.openxmlformats.org/presentationml/2006/main">
   <p:cSld name="Slide 16">
+    <p:bg>
+      <p:bgPr>
+        <a:solidFill>
+          <a:srgbClr val="F7F7FB"/>
+        </a:solidFill>
+      </p:bgPr>
+    </p:bg>
+    <p:spTree>
+      <p:nvGrpSpPr>
+        <p:cNvPr id="1" name=""/>
+        <p:cNvGrpSpPr/>
+        <p:nvPr/>
+      </p:nvGrpSpPr>
+      <p:grpSpPr>
+        <a:xfrm>
+          <a:off x="0" y="0"/>
+          <a:ext cx="0" cy="0"/>
+          <a:chOff x="0" y="0"/>
+          <a:chExt cx="0" cy="0"/>
+        </a:xfrm>
+      </p:grpSpPr>
+      <p:sp>
+        <p:nvSpPr>
+          <p:cNvPr id="2" name="Text 0"/>
+          <p:cNvSpPr txBox="1"/>
+          <p:nvPr/>
+        </p:nvSpPr>
+        <p:spPr>
+          <a:xfrm>
+            <a:off x="9509760" y="6181344"/>
+            <a:ext cx="2011680" cy="310896"/>
+          </a:xfrm>
+          <a:prstGeom prst="rect">
+            <a:avLst/>
+          </a:prstGeom>
+          <a:noFill/>
+          <a:ln/>
+        </p:spPr>
+        <p:txBody>
+          <a:bodyPr wrap="square" lIns="0" tIns="0" rIns="0" bIns="0" rtlCol="0" anchor="ctr"/>
+          <a:lstStyle/>
+          <a:p>
+            <a:pPr algn="r" indent="0" marL="0">
+              <a:buNone/>
+            </a:pPr>
+            <a:r>
+              <a:rPr lang="en-US" sz="1100" dirty="0">
+                <a:solidFill>
+                  <a:srgbClr val="5A5A72"/>
+                </a:solidFill>
+                <a:latin typeface="Courier New" pitchFamily="34" charset="0"/>
+                <a:ea typeface="Courier New" pitchFamily="34" charset="-122"/>
+                <a:cs typeface="Courier New" pitchFamily="34" charset="-120"/>
+              </a:rPr>
+              <a:t>13 h 10</a:t>
+            </a:r>
+            <a:endParaRPr lang="en-US" sz="1100" dirty="0"/>
+          </a:p>
+        </p:txBody>
+      </p:sp>
+      <p:sp>
+        <p:nvSpPr>
+          <p:cNvPr id="3" name="Shape 1"/>
+          <p:cNvSpPr/>
+          <p:nvPr/>
+        </p:nvSpPr>
+        <p:spPr>
+          <a:xfrm>
+            <a:off x="11558016" y="6217920"/>
+            <a:ext cx="68580" cy="68580"/>
+          </a:xfrm>
+          <a:prstGeom prst="roundRect">
+            <a:avLst>
+              <a:gd name="adj" fmla="val 26667"/>
+            </a:avLst>
+          </a:prstGeom>
+          <a:solidFill>
+            <a:srgbClr val="6B2D8F">
+              <a:alpha val="30000"/>
+            </a:srgbClr>
+          </a:solidFill>
+          <a:ln/>
+        </p:spPr>
+      </p:sp>
+      <p:sp>
+        <p:nvSpPr>
+          <p:cNvPr id="4" name="Shape 2"/>
+          <p:cNvSpPr/>
+          <p:nvPr/>
+        </p:nvSpPr>
+        <p:spPr>
+          <a:xfrm>
+            <a:off x="11650599" y="6217920"/>
+            <a:ext cx="68580" cy="68580"/>
+          </a:xfrm>
+          <a:prstGeom prst="roundRect">
+            <a:avLst>
+              <a:gd name="adj" fmla="val 26667"/>
+            </a:avLst>
+          </a:prstGeom>
+          <a:solidFill>
+            <a:srgbClr val="6B2D8F">
+              <a:alpha val="30000"/>
+            </a:srgbClr>
+          </a:solidFill>
+          <a:ln/>
+        </p:spPr>
+      </p:sp>
+      <p:sp>
+        <p:nvSpPr>
+          <p:cNvPr id="5" name="Shape 3"/>
+          <p:cNvSpPr/>
+          <p:nvPr/>
+        </p:nvSpPr>
+        <p:spPr>
+          <a:xfrm>
+            <a:off x="11743182" y="6217920"/>
+            <a:ext cx="68580" cy="68580"/>
+          </a:xfrm>
+          <a:prstGeom prst="roundRect">
+            <a:avLst>
+              <a:gd name="adj" fmla="val 26667"/>
+            </a:avLst>
+          </a:prstGeom>
+          <a:solidFill>
+            <a:srgbClr val="6B2D8F">
+              <a:alpha val="30000"/>
+            </a:srgbClr>
+          </a:solidFill>
+          <a:ln/>
+        </p:spPr>
+      </p:sp>
+      <p:sp>
+        <p:nvSpPr>
+          <p:cNvPr id="6" name="Shape 4"/>
+          <p:cNvSpPr/>
+          <p:nvPr/>
+        </p:nvSpPr>
+        <p:spPr>
+          <a:xfrm>
+            <a:off x="11558016" y="6310503"/>
+            <a:ext cx="68580" cy="68580"/>
+          </a:xfrm>
+          <a:prstGeom prst="roundRect">
+            <a:avLst>
+              <a:gd name="adj" fmla="val 26667"/>
+            </a:avLst>
+          </a:prstGeom>
+          <a:solidFill>
+            <a:srgbClr val="6B2D8F">
+              <a:alpha val="30000"/>
+            </a:srgbClr>
+          </a:solidFill>
+          <a:ln/>
+        </p:spPr>
+      </p:sp>
+      <p:sp>
+        <p:nvSpPr>
+          <p:cNvPr id="7" name="Shape 5"/>
+          <p:cNvSpPr/>
+          <p:nvPr/>
+        </p:nvSpPr>
+        <p:spPr>
+          <a:xfrm>
+            <a:off x="11650599" y="6310503"/>
+            <a:ext cx="68580" cy="68580"/>
+          </a:xfrm>
+          <a:prstGeom prst="roundRect">
+            <a:avLst>
+              <a:gd name="adj" fmla="val 26667"/>
+            </a:avLst>
+          </a:prstGeom>
+          <a:solidFill>
+            <a:srgbClr val="6B2D8F">
+              <a:alpha val="30000"/>
+            </a:srgbClr>
+          </a:solidFill>
+          <a:ln/>
+        </p:spPr>
+      </p:sp>
+      <p:sp>
+        <p:nvSpPr>
+          <p:cNvPr id="8" name="Shape 6"/>
+          <p:cNvSpPr/>
+          <p:nvPr/>
+        </p:nvSpPr>
+        <p:spPr>
+          <a:xfrm>
+            <a:off x="11743182" y="6310503"/>
+            <a:ext cx="68580" cy="68580"/>
+          </a:xfrm>
+          <a:prstGeom prst="roundRect">
+            <a:avLst>
+              <a:gd name="adj" fmla="val 26667"/>
+            </a:avLst>
+          </a:prstGeom>
+          <a:solidFill>
+            <a:srgbClr val="6B2D8F">
+              <a:alpha val="30000"/>
+            </a:srgbClr>
+          </a:solidFill>
+          <a:ln/>
+        </p:spPr>
+      </p:sp>
+      <p:sp>
+        <p:nvSpPr>
+          <p:cNvPr id="9" name="Shape 7"/>
+          <p:cNvSpPr/>
+          <p:nvPr/>
+        </p:nvSpPr>
+        <p:spPr>
+          <a:xfrm>
+            <a:off x="11558016" y="6403086"/>
+            <a:ext cx="68580" cy="68580"/>
+          </a:xfrm>
+          <a:prstGeom prst="roundRect">
+            <a:avLst>
+              <a:gd name="adj" fmla="val 26667"/>
+            </a:avLst>
+          </a:prstGeom>
+          <a:solidFill>
+            <a:srgbClr val="6B2D8F">
+              <a:alpha val="30000"/>
+            </a:srgbClr>
+          </a:solidFill>
+          <a:ln/>
+        </p:spPr>
+      </p:sp>
+      <p:sp>
+        <p:nvSpPr>
+          <p:cNvPr id="10" name="Shape 8"/>
+          <p:cNvSpPr/>
+          <p:nvPr/>
+        </p:nvSpPr>
+        <p:spPr>
+          <a:xfrm>
+            <a:off x="11650599" y="6403086"/>
+            <a:ext cx="68580" cy="68580"/>
+          </a:xfrm>
+          <a:prstGeom prst="roundRect">
+            <a:avLst>
+              <a:gd name="adj" fmla="val 26667"/>
+            </a:avLst>
+          </a:prstGeom>
+          <a:solidFill>
+            <a:srgbClr val="6B2D8F">
+              <a:alpha val="30000"/>
+            </a:srgbClr>
+          </a:solidFill>
+          <a:ln/>
+        </p:spPr>
+      </p:sp>
+      <p:sp>
+        <p:nvSpPr>
+          <p:cNvPr id="11" name="Shape 9"/>
+          <p:cNvSpPr/>
+          <p:nvPr/>
+        </p:nvSpPr>
+        <p:spPr>
+          <a:xfrm>
+            <a:off x="11743182" y="6403086"/>
+            <a:ext cx="68580" cy="68580"/>
+          </a:xfrm>
+          <a:prstGeom prst="roundRect">
+            <a:avLst>
+              <a:gd name="adj" fmla="val 26667"/>
+            </a:avLst>
+          </a:prstGeom>
+          <a:solidFill>
+            <a:srgbClr val="6B2D8F">
+              <a:alpha val="30000"/>
+            </a:srgbClr>
+          </a:solidFill>
+          <a:ln/>
+        </p:spPr>
+      </p:sp>
+      <p:sp>
+        <p:nvSpPr>
+          <p:cNvPr id="12" name="Text 10"/>
+          <p:cNvSpPr txBox="1"/>
+          <p:nvPr/>
+        </p:nvSpPr>
+        <p:spPr>
+          <a:xfrm>
+            <a:off x="640080" y="457200"/>
+            <a:ext cx="10881360" cy="310896"/>
+          </a:xfrm>
+          <a:prstGeom prst="rect">
+            <a:avLst/>
+          </a:prstGeom>
+          <a:noFill/>
+          <a:ln/>
+        </p:spPr>
+        <p:txBody>
+          <a:bodyPr wrap="square" lIns="0" tIns="0" rIns="0" bIns="0" rtlCol="0" anchor="ctr"/>
+          <a:lstStyle/>
+          <a:p>
+            <a:pPr indent="0" marL="0">
+              <a:buNone/>
+            </a:pPr>
+            <a:r>
+              <a:rPr lang="en-US" sz="1300" b="1" spc="300" kern="0" dirty="0">
+                <a:solidFill>
+                  <a:srgbClr val="6B2D8F"/>
+                </a:solidFill>
+                <a:latin typeface="Calibri" pitchFamily="34" charset="0"/>
+                <a:ea typeface="Calibri" pitchFamily="34" charset="-122"/>
+                <a:cs typeface="Calibri" pitchFamily="34" charset="-120"/>
+              </a:rPr>
+              <a:t>COMMENT IL LIT VOTRE PROGRAMME</a:t>
+            </a:r>
+            <a:endParaRPr lang="en-US" sz="1300" dirty="0"/>
+          </a:p>
+        </p:txBody>
+      </p:sp>
+      <p:sp>
+        <p:nvSpPr>
+          <p:cNvPr id="13" name="Text 11"/>
+          <p:cNvSpPr txBox="1"/>
+          <p:nvPr/>
+        </p:nvSpPr>
+        <p:spPr>
+          <a:xfrm>
+            <a:off x="640080" y="868680"/>
+            <a:ext cx="10881360" cy="914400"/>
+          </a:xfrm>
+          <a:prstGeom prst="rect">
+            <a:avLst/>
+          </a:prstGeom>
+          <a:noFill/>
+          <a:ln/>
+        </p:spPr>
+        <p:txBody>
+          <a:bodyPr wrap="square" lIns="0" tIns="0" rIns="0" bIns="0" rtlCol="0" anchor="t"/>
+          <a:lstStyle/>
+          <a:p>
+            <a:pPr indent="0" marL="0">
+              <a:lnSpc>
+                <a:spcPts val="4400"/>
+              </a:lnSpc>
+              <a:buNone/>
+            </a:pPr>
+            <a:r>
+              <a:rPr lang="en-US" sz="4000" b="1" dirty="0">
+                <a:solidFill>
+                  <a:srgbClr val="14142B"/>
+                </a:solidFill>
+                <a:latin typeface="Calibri" pitchFamily="34" charset="0"/>
+                <a:ea typeface="Calibri" pitchFamily="34" charset="-122"/>
+                <a:cs typeface="Calibri" pitchFamily="34" charset="-120"/>
+              </a:rPr>
+              <a:t>De haut en bas. Ligne par ligne. Toujours.</a:t>
+            </a:r>
+            <a:endParaRPr lang="en-US" sz="4000" dirty="0"/>
+          </a:p>
+        </p:txBody>
+      </p:sp>
+      <p:sp>
+        <p:nvSpPr>
+          <p:cNvPr id="14" name="Shape 12"/>
+          <p:cNvSpPr/>
+          <p:nvPr/>
+        </p:nvSpPr>
+        <p:spPr>
+          <a:xfrm>
+            <a:off x="640080" y="2286000"/>
+            <a:ext cx="5120640" cy="640080"/>
+          </a:xfrm>
+          <a:prstGeom prst="roundRect">
+            <a:avLst>
+              <a:gd name="adj" fmla="val 11429"/>
+            </a:avLst>
+          </a:prstGeom>
+          <a:solidFill>
+            <a:srgbClr val="FFFFFF"/>
+          </a:solidFill>
+          <a:ln w="19050">
+            <a:solidFill>
+              <a:srgbClr val="DDDDE8"/>
+            </a:solidFill>
+            <a:prstDash val="solid"/>
+          </a:ln>
+          <a:effectLst>
+            <a:outerShdw sx="100000" sy="100000" kx="0" ky="0" algn="bl" rotWithShape="0" blurRad="127000" dist="25400" dir="5400000">
+              <a:srgbClr val="20204A">
+                <a:alpha val="12000"/>
+              </a:srgbClr>
+            </a:outerShdw>
+          </a:effectLst>
+        </p:spPr>
+      </p:sp>
+      <p:sp>
+        <p:nvSpPr>
+          <p:cNvPr id="15" name="Text 13"/>
+          <p:cNvSpPr txBox="1"/>
+          <p:nvPr/>
+        </p:nvSpPr>
+        <p:spPr>
+          <a:xfrm>
+            <a:off x="914400" y="2423160"/>
+            <a:ext cx="4572000" cy="411480"/>
+          </a:xfrm>
+          <a:prstGeom prst="rect">
+            <a:avLst/>
+          </a:prstGeom>
+          <a:noFill/>
+          <a:ln/>
+        </p:spPr>
+        <p:txBody>
+          <a:bodyPr wrap="square" lIns="0" tIns="0" rIns="0" bIns="0" rtlCol="0" anchor="t"/>
+          <a:lstStyle/>
+          <a:p>
+            <a:pPr indent="0" marL="0">
+              <a:buNone/>
+            </a:pPr>
+            <a:r>
+              <a:rPr lang="en-US" sz="2000" dirty="0">
+                <a:solidFill>
+                  <a:srgbClr val="14142B"/>
+                </a:solidFill>
+                <a:latin typeface="Courier New" pitchFamily="34" charset="0"/>
+                <a:ea typeface="Courier New" pitchFamily="34" charset="-122"/>
+                <a:cs typeface="Courier New" pitchFamily="34" charset="-120"/>
+              </a:rPr>
+              <a:t>print("Un")</a:t>
+            </a:r>
+            <a:endParaRPr lang="en-US" sz="2000" dirty="0"/>
+          </a:p>
+        </p:txBody>
+      </p:sp>
+      <p:sp>
+        <p:nvSpPr>
+          <p:cNvPr id="16" name="Shape 14"/>
+          <p:cNvSpPr/>
+          <p:nvPr/>
+        </p:nvSpPr>
+        <p:spPr>
+          <a:xfrm>
+            <a:off x="6035040" y="2359152"/>
+            <a:ext cx="457200" cy="457200"/>
+          </a:xfrm>
+          <a:prstGeom prst="ellipse">
+            <a:avLst/>
+          </a:prstGeom>
+          <a:solidFill>
+            <a:srgbClr val="6B2D8F"/>
+          </a:solidFill>
+          <a:ln/>
+        </p:spPr>
+      </p:sp>
+      <p:sp>
+        <p:nvSpPr>
+          <p:cNvPr id="17" name="Text 15"/>
+          <p:cNvSpPr txBox="1"/>
+          <p:nvPr/>
+        </p:nvSpPr>
+        <p:spPr>
+          <a:xfrm>
+            <a:off x="6035040" y="2359152"/>
+            <a:ext cx="457200" cy="457200"/>
+          </a:xfrm>
+          <a:prstGeom prst="rect">
+            <a:avLst/>
+          </a:prstGeom>
+          <a:noFill/>
+          <a:ln/>
+        </p:spPr>
+        <p:txBody>
+          <a:bodyPr wrap="square" lIns="0" tIns="0" rIns="0" bIns="0" rtlCol="0" anchor="ctr"/>
+          <a:lstStyle/>
+          <a:p>
+            <a:pPr algn="ctr" indent="0" marL="0">
+              <a:buNone/>
+            </a:pPr>
+            <a:r>
+              <a:rPr lang="en-US" sz="1600" b="1" dirty="0">
+                <a:solidFill>
+                  <a:srgbClr val="FFFFFF"/>
+                </a:solidFill>
+                <a:latin typeface="Calibri" pitchFamily="34" charset="0"/>
+                <a:ea typeface="Calibri" pitchFamily="34" charset="-122"/>
+                <a:cs typeface="Calibri" pitchFamily="34" charset="-120"/>
+              </a:rPr>
+              <a:t>1</a:t>
+            </a:r>
+            <a:endParaRPr lang="en-US" sz="1600" dirty="0"/>
+          </a:p>
+        </p:txBody>
+      </p:sp>
+      <p:sp>
+        <p:nvSpPr>
+          <p:cNvPr id="18" name="Shape 16"/>
+          <p:cNvSpPr/>
+          <p:nvPr/>
+        </p:nvSpPr>
+        <p:spPr>
+          <a:xfrm>
+            <a:off x="640080" y="3063240"/>
+            <a:ext cx="5120640" cy="640080"/>
+          </a:xfrm>
+          <a:prstGeom prst="roundRect">
+            <a:avLst>
+              <a:gd name="adj" fmla="val 11429"/>
+            </a:avLst>
+          </a:prstGeom>
+          <a:solidFill>
+            <a:srgbClr val="FFFFFF"/>
+          </a:solidFill>
+          <a:ln w="19050">
+            <a:solidFill>
+              <a:srgbClr val="DDDDE8"/>
+            </a:solidFill>
+            <a:prstDash val="solid"/>
+          </a:ln>
+          <a:effectLst>
+            <a:outerShdw sx="100000" sy="100000" kx="0" ky="0" algn="bl" rotWithShape="0" blurRad="127000" dist="25400" dir="5400000">
+              <a:srgbClr val="20204A">
+                <a:alpha val="12000"/>
+              </a:srgbClr>
+            </a:outerShdw>
+          </a:effectLst>
+        </p:spPr>
+      </p:sp>
+      <p:sp>
+        <p:nvSpPr>
+          <p:cNvPr id="19" name="Text 17"/>
+          <p:cNvSpPr txBox="1"/>
+          <p:nvPr/>
+        </p:nvSpPr>
+        <p:spPr>
+          <a:xfrm>
+            <a:off x="914400" y="3200400"/>
+            <a:ext cx="4572000" cy="411480"/>
+          </a:xfrm>
+          <a:prstGeom prst="rect">
+            <a:avLst/>
+          </a:prstGeom>
+          <a:noFill/>
+          <a:ln/>
+        </p:spPr>
+        <p:txBody>
+          <a:bodyPr wrap="square" lIns="0" tIns="0" rIns="0" bIns="0" rtlCol="0" anchor="t"/>
+          <a:lstStyle/>
+          <a:p>
+            <a:pPr indent="0" marL="0">
+              <a:buNone/>
+            </a:pPr>
+            <a:r>
+              <a:rPr lang="en-US" sz="2000" dirty="0">
+                <a:solidFill>
+                  <a:srgbClr val="14142B"/>
+                </a:solidFill>
+                <a:latin typeface="Courier New" pitchFamily="34" charset="0"/>
+                <a:ea typeface="Courier New" pitchFamily="34" charset="-122"/>
+                <a:cs typeface="Courier New" pitchFamily="34" charset="-120"/>
+              </a:rPr>
+              <a:t>print("Deux")</a:t>
+            </a:r>
+            <a:endParaRPr lang="en-US" sz="2000" dirty="0"/>
+          </a:p>
+        </p:txBody>
+      </p:sp>
+      <p:sp>
+        <p:nvSpPr>
+          <p:cNvPr id="20" name="Shape 18"/>
+          <p:cNvSpPr/>
+          <p:nvPr/>
+        </p:nvSpPr>
+        <p:spPr>
+          <a:xfrm>
+            <a:off x="6035040" y="3136392"/>
+            <a:ext cx="457200" cy="457200"/>
+          </a:xfrm>
+          <a:prstGeom prst="ellipse">
+            <a:avLst/>
+          </a:prstGeom>
+          <a:solidFill>
+            <a:srgbClr val="6B2D8F"/>
+          </a:solidFill>
+          <a:ln/>
+        </p:spPr>
+      </p:sp>
+      <p:sp>
+        <p:nvSpPr>
+          <p:cNvPr id="21" name="Text 19"/>
+          <p:cNvSpPr txBox="1"/>
+          <p:nvPr/>
+        </p:nvSpPr>
+        <p:spPr>
+          <a:xfrm>
+            <a:off x="6035040" y="3136392"/>
+            <a:ext cx="457200" cy="457200"/>
+          </a:xfrm>
+          <a:prstGeom prst="rect">
+            <a:avLst/>
+          </a:prstGeom>
+          <a:noFill/>
+          <a:ln/>
+        </p:spPr>
+        <p:txBody>
+          <a:bodyPr wrap="square" lIns="0" tIns="0" rIns="0" bIns="0" rtlCol="0" anchor="ctr"/>
+          <a:lstStyle/>
+          <a:p>
+            <a:pPr algn="ctr" indent="0" marL="0">
+              <a:buNone/>
+            </a:pPr>
+            <a:r>
+              <a:rPr lang="en-US" sz="1600" b="1" dirty="0">
+                <a:solidFill>
+                  <a:srgbClr val="FFFFFF"/>
+                </a:solidFill>
+                <a:latin typeface="Calibri" pitchFamily="34" charset="0"/>
+                <a:ea typeface="Calibri" pitchFamily="34" charset="-122"/>
+                <a:cs typeface="Calibri" pitchFamily="34" charset="-120"/>
+              </a:rPr>
+              <a:t>2</a:t>
+            </a:r>
+            <a:endParaRPr lang="en-US" sz="1600" dirty="0"/>
+          </a:p>
+        </p:txBody>
+      </p:sp>
+      <p:sp>
+        <p:nvSpPr>
+          <p:cNvPr id="22" name="Shape 20"/>
+          <p:cNvSpPr/>
+          <p:nvPr/>
+        </p:nvSpPr>
+        <p:spPr>
+          <a:xfrm>
+            <a:off x="640080" y="3840480"/>
+            <a:ext cx="5120640" cy="640080"/>
+          </a:xfrm>
+          <a:prstGeom prst="roundRect">
+            <a:avLst>
+              <a:gd name="adj" fmla="val 11429"/>
+            </a:avLst>
+          </a:prstGeom>
+          <a:solidFill>
+            <a:srgbClr val="FFFFFF"/>
+          </a:solidFill>
+          <a:ln w="19050">
+            <a:solidFill>
+              <a:srgbClr val="DDDDE8"/>
+            </a:solidFill>
+            <a:prstDash val="solid"/>
+          </a:ln>
+          <a:effectLst>
+            <a:outerShdw sx="100000" sy="100000" kx="0" ky="0" algn="bl" rotWithShape="0" blurRad="127000" dist="25400" dir="5400000">
+              <a:srgbClr val="20204A">
+                <a:alpha val="12000"/>
+              </a:srgbClr>
+            </a:outerShdw>
+          </a:effectLst>
+        </p:spPr>
+      </p:sp>
+      <p:sp>
+        <p:nvSpPr>
+          <p:cNvPr id="23" name="Text 21"/>
+          <p:cNvSpPr txBox="1"/>
+          <p:nvPr/>
+        </p:nvSpPr>
+        <p:spPr>
+          <a:xfrm>
+            <a:off x="914400" y="3977640"/>
+            <a:ext cx="4572000" cy="411480"/>
+          </a:xfrm>
+          <a:prstGeom prst="rect">
+            <a:avLst/>
+          </a:prstGeom>
+          <a:noFill/>
+          <a:ln/>
+        </p:spPr>
+        <p:txBody>
+          <a:bodyPr wrap="square" lIns="0" tIns="0" rIns="0" bIns="0" rtlCol="0" anchor="t"/>
+          <a:lstStyle/>
+          <a:p>
+            <a:pPr indent="0" marL="0">
+              <a:buNone/>
+            </a:pPr>
+            <a:r>
+              <a:rPr lang="en-US" sz="2000" dirty="0">
+                <a:solidFill>
+                  <a:srgbClr val="14142B"/>
+                </a:solidFill>
+                <a:latin typeface="Courier New" pitchFamily="34" charset="0"/>
+                <a:ea typeface="Courier New" pitchFamily="34" charset="-122"/>
+                <a:cs typeface="Courier New" pitchFamily="34" charset="-120"/>
+              </a:rPr>
+              <a:t>print("Trois")</a:t>
+            </a:r>
+            <a:endParaRPr lang="en-US" sz="2000" dirty="0"/>
+          </a:p>
+        </p:txBody>
+      </p:sp>
+      <p:sp>
+        <p:nvSpPr>
+          <p:cNvPr id="24" name="Shape 22"/>
+          <p:cNvSpPr/>
+          <p:nvPr/>
+        </p:nvSpPr>
+        <p:spPr>
+          <a:xfrm>
+            <a:off x="6035040" y="3913632"/>
+            <a:ext cx="457200" cy="457200"/>
+          </a:xfrm>
+          <a:prstGeom prst="ellipse">
+            <a:avLst/>
+          </a:prstGeom>
+          <a:solidFill>
+            <a:srgbClr val="6B2D8F"/>
+          </a:solidFill>
+          <a:ln/>
+        </p:spPr>
+      </p:sp>
+      <p:sp>
+        <p:nvSpPr>
+          <p:cNvPr id="25" name="Text 23"/>
+          <p:cNvSpPr txBox="1"/>
+          <p:nvPr/>
+        </p:nvSpPr>
+        <p:spPr>
+          <a:xfrm>
+            <a:off x="6035040" y="3913632"/>
+            <a:ext cx="457200" cy="457200"/>
+          </a:xfrm>
+          <a:prstGeom prst="rect">
+            <a:avLst/>
+          </a:prstGeom>
+          <a:noFill/>
+          <a:ln/>
+        </p:spPr>
+        <p:txBody>
+          <a:bodyPr wrap="square" lIns="0" tIns="0" rIns="0" bIns="0" rtlCol="0" anchor="ctr"/>
+          <a:lstStyle/>
+          <a:p>
+            <a:pPr algn="ctr" indent="0" marL="0">
+              <a:buNone/>
+            </a:pPr>
+            <a:r>
+              <a:rPr lang="en-US" sz="1600" b="1" dirty="0">
+                <a:solidFill>
+                  <a:srgbClr val="FFFFFF"/>
+                </a:solidFill>
+                <a:latin typeface="Calibri" pitchFamily="34" charset="0"/>
+                <a:ea typeface="Calibri" pitchFamily="34" charset="-122"/>
+                <a:cs typeface="Calibri" pitchFamily="34" charset="-120"/>
+              </a:rPr>
+              <a:t>3</a:t>
+            </a:r>
+            <a:endParaRPr lang="en-US" sz="1600" dirty="0"/>
+          </a:p>
+        </p:txBody>
+      </p:sp>
+      <p:sp>
+        <p:nvSpPr>
+          <p:cNvPr id="26" name="Text 24"/>
+          <p:cNvSpPr txBox="1"/>
+          <p:nvPr/>
+        </p:nvSpPr>
+        <p:spPr>
+          <a:xfrm>
+            <a:off x="6949440" y="2377440"/>
+            <a:ext cx="4572000" cy="2011680"/>
+          </a:xfrm>
+          <a:prstGeom prst="rect">
+            <a:avLst/>
+          </a:prstGeom>
+          <a:noFill/>
+          <a:ln/>
+        </p:spPr>
+        <p:txBody>
+          <a:bodyPr wrap="square" lIns="0" tIns="0" rIns="0" bIns="0" rtlCol="0" anchor="t"/>
+          <a:lstStyle/>
+          <a:p>
+            <a:pPr indent="0" marL="0">
+              <a:lnSpc>
+                <a:spcPts val="3800"/>
+              </a:lnSpc>
+              <a:buNone/>
+            </a:pPr>
+            <a:r>
+              <a:rPr lang="en-US" sz="2400" b="1" dirty="0">
+                <a:solidFill>
+                  <a:srgbClr val="14142B"/>
+                </a:solidFill>
+                <a:latin typeface="Calibri" pitchFamily="34" charset="0"/>
+                <a:ea typeface="Calibri" pitchFamily="34" charset="-122"/>
+                <a:cs typeface="Calibri" pitchFamily="34" charset="-120"/>
+              </a:rPr>
+              <a:t>Il ne devine pas.</a:t>
+            </a:r>
+            <a:endParaRPr lang="en-US" sz="2400" dirty="0"/>
+          </a:p>
+          <a:p>
+            <a:pPr indent="0" marL="0">
+              <a:lnSpc>
+                <a:spcPts val="3800"/>
+              </a:lnSpc>
+              <a:buNone/>
+            </a:pPr>
+            <a:r>
+              <a:rPr lang="en-US" sz="2400" b="1" dirty="0">
+                <a:solidFill>
+                  <a:srgbClr val="14142B"/>
+                </a:solidFill>
+                <a:latin typeface="Calibri" pitchFamily="34" charset="0"/>
+                <a:ea typeface="Calibri" pitchFamily="34" charset="-122"/>
+                <a:cs typeface="Calibri" pitchFamily="34" charset="-120"/>
+              </a:rPr>
+              <a:t>Il ne saute pas de ligne.</a:t>
+            </a:r>
+            <a:endParaRPr lang="en-US" sz="2400" dirty="0"/>
+          </a:p>
+          <a:p>
+            <a:pPr indent="0" marL="0">
+              <a:lnSpc>
+                <a:spcPts val="3800"/>
+              </a:lnSpc>
+              <a:buNone/>
+            </a:pPr>
+            <a:r>
+              <a:rPr lang="en-US" sz="2400" b="1" dirty="0">
+                <a:solidFill>
+                  <a:srgbClr val="14142B"/>
+                </a:solidFill>
+                <a:latin typeface="Calibri" pitchFamily="34" charset="0"/>
+                <a:ea typeface="Calibri" pitchFamily="34" charset="-122"/>
+                <a:cs typeface="Calibri" pitchFamily="34" charset="-120"/>
+              </a:rPr>
+              <a:t>Il ne revient pas en arrière.</a:t>
+            </a:r>
+            <a:endParaRPr lang="en-US" sz="2400" dirty="0"/>
+          </a:p>
+        </p:txBody>
+      </p:sp>
+      <p:sp>
+        <p:nvSpPr>
+          <p:cNvPr id="27" name="Text 25"/>
+          <p:cNvSpPr txBox="1"/>
+          <p:nvPr/>
+        </p:nvSpPr>
+        <p:spPr>
+          <a:xfrm>
+            <a:off x="6949440" y="4480560"/>
+            <a:ext cx="4572000" cy="914400"/>
+          </a:xfrm>
+          <a:prstGeom prst="rect">
+            <a:avLst/>
+          </a:prstGeom>
+          <a:noFill/>
+          <a:ln/>
+        </p:spPr>
+        <p:txBody>
+          <a:bodyPr wrap="square" lIns="0" tIns="0" rIns="0" bIns="0" rtlCol="0" anchor="t"/>
+          <a:lstStyle/>
+          <a:p>
+            <a:pPr indent="0" marL="0">
+              <a:buNone/>
+            </a:pPr>
+            <a:r>
+              <a:rPr lang="en-US" sz="1600" i="1" dirty="0">
+                <a:solidFill>
+                  <a:srgbClr val="5A5A72"/>
+                </a:solidFill>
+                <a:latin typeface="Calibri" pitchFamily="34" charset="0"/>
+                <a:ea typeface="Calibri" pitchFamily="34" charset="-122"/>
+                <a:cs typeface="Calibri" pitchFamily="34" charset="-120"/>
+              </a:rPr>
+              <a:t>Si ça s'affiche dans le désordre, ce n'est pas lui : c'est l'ordre de vos lignes.</a:t>
+            </a:r>
+            <a:endParaRPr lang="en-US" sz="1600" dirty="0"/>
+          </a:p>
+        </p:txBody>
+      </p:sp>
+    </p:spTree>
+  </p:cSld>
+  <p:clrMapOvr>
+    <a:masterClrMapping/>
+  </p:clrMapOvr>
+</p:sld>
+</file>
+
+<file path=ppt/slides/slide17.xml><?xml version="1.0" encoding="utf-8"?>
+<p:sld xmlns:a="http://schemas.openxmlformats.org/drawingml/2006/main" xmlns:r="http://schemas.openxmlformats.org/officeDocument/2006/relationships" xmlns:p="http://schemas.openxmlformats.org/presentationml/2006/main">
+  <p:cSld name="Slide 17">
     <p:bg>
       <p:bgPr>
         <a:solidFill>
@@ -8183,7 +9398,7 @@
                 <a:ea typeface="Courier New" pitchFamily="34" charset="-122"/>
                 <a:cs typeface="Courier New" pitchFamily="34" charset="-120"/>
               </a:rPr>
-              <a:t>13 h 14</a:t>
+              <a:t>13 h 12</a:t>
             </a:r>
             <a:endParaRPr lang="en-US" sz="1100" dirty="0"/>
           </a:p>
@@ -8635,9 +9850,9 @@
 </p:sld>
 </file>
 
-<file path=ppt/slides/slide17.xml><?xml version="1.0" encoding="utf-8"?>
+<file path=ppt/slides/slide18.xml><?xml version="1.0" encoding="utf-8"?>
 <p:sld xmlns:a="http://schemas.openxmlformats.org/drawingml/2006/main" xmlns:r="http://schemas.openxmlformats.org/officeDocument/2006/relationships" xmlns:p="http://schemas.openxmlformats.org/presentationml/2006/main">
-  <p:cSld name="Slide 17">
+  <p:cSld name="Slide 18">
     <p:bg>
       <p:bgPr>
         <a:solidFill>
@@ -8692,7 +9907,7 @@
                 <a:ea typeface="Courier New" pitchFamily="34" charset="-122"/>
                 <a:cs typeface="Courier New" pitchFamily="34" charset="-120"/>
               </a:rPr>
-              <a:t>13 h 17</a:t>
+              <a:t>13 h 15</a:t>
             </a:r>
             <a:endParaRPr lang="en-US" sz="1100" dirty="0"/>
           </a:p>
@@ -8989,7 +10204,7 @@
                 <a:ea typeface="Calibri" pitchFamily="34" charset="-122"/>
                 <a:cs typeface="Calibri" pitchFamily="34" charset="-120"/>
               </a:rPr>
-              <a:t>Étape 1 : mettez votre prénom.</a:t>
+              <a:t>Partie 1 : votre écran d'accueil.</a:t>
             </a:r>
             <a:endParaRPr lang="en-US" sz="4000" dirty="0"/>
           </a:p>
@@ -9003,28 +10218,221 @@
         </p:nvSpPr>
         <p:spPr>
           <a:xfrm>
-            <a:off x="640080" y="2286000"/>
-            <a:ext cx="457200" cy="457200"/>
+            <a:off x="640080" y="2148840"/>
+            <a:ext cx="5669280" cy="2651760"/>
+          </a:xfrm>
+          <a:prstGeom prst="roundRect">
+            <a:avLst>
+              <a:gd name="adj" fmla="val 2759"/>
+            </a:avLst>
+          </a:prstGeom>
+          <a:solidFill>
+            <a:srgbClr val="12122A"/>
+          </a:solidFill>
+          <a:ln/>
+        </p:spPr>
+      </p:sp>
+      <p:sp>
+        <p:nvSpPr>
+          <p:cNvPr id="15" name="Text 13"/>
+          <p:cNvSpPr txBox="1"/>
+          <p:nvPr/>
+        </p:nvSpPr>
+        <p:spPr>
+          <a:xfrm>
+            <a:off x="960120" y="2377440"/>
+            <a:ext cx="5120640" cy="2194560"/>
+          </a:xfrm>
+          <a:prstGeom prst="rect">
+            <a:avLst/>
+          </a:prstGeom>
+          <a:noFill/>
+          <a:ln/>
+        </p:spPr>
+        <p:txBody>
+          <a:bodyPr wrap="square" lIns="0" tIns="0" rIns="0" bIns="0" rtlCol="0" anchor="t"/>
+          <a:lstStyle/>
+          <a:p>
+            <a:pPr indent="0" marL="0">
+              <a:lnSpc>
+                <a:spcPts val="1900"/>
+              </a:lnSpc>
+              <a:buNone/>
+            </a:pPr>
+            <a:r>
+              <a:rPr lang="en-US" sz="1300" dirty="0">
+                <a:solidFill>
+                  <a:srgbClr val="4FC3F7"/>
+                </a:solidFill>
+                <a:latin typeface="Courier New" pitchFamily="34" charset="0"/>
+                <a:ea typeface="Courier New" pitchFamily="34" charset="-122"/>
+                <a:cs typeface="Courier New" pitchFamily="34" charset="-120"/>
+              </a:rPr>
+              <a:t>===================================</a:t>
+            </a:r>
+            <a:endParaRPr lang="en-US" sz="1300" dirty="0"/>
+          </a:p>
+          <a:p>
+            <a:pPr indent="0" marL="0">
+              <a:lnSpc>
+                <a:spcPts val="1900"/>
+              </a:lnSpc>
+              <a:buNone/>
+            </a:pPr>
+            <a:r>
+              <a:rPr lang="en-US" sz="1300" dirty="0">
+                <a:solidFill>
+                  <a:srgbClr val="4FC3F7"/>
+                </a:solidFill>
+                <a:latin typeface="Courier New" pitchFamily="34" charset="0"/>
+                <a:ea typeface="Courier New" pitchFamily="34" charset="-122"/>
+                <a:cs typeface="Courier New" pitchFamily="34" charset="-120"/>
+              </a:rPr>
+              <a:t>       BIENVENUE DANS LE JEU XO</a:t>
+            </a:r>
+            <a:endParaRPr lang="en-US" sz="1300" dirty="0"/>
+          </a:p>
+          <a:p>
+            <a:pPr indent="0" marL="0">
+              <a:lnSpc>
+                <a:spcPts val="1900"/>
+              </a:lnSpc>
+              <a:buNone/>
+            </a:pPr>
+            <a:r>
+              <a:rPr lang="en-US" sz="1300" dirty="0">
+                <a:solidFill>
+                  <a:srgbClr val="4FC3F7"/>
+                </a:solidFill>
+                <a:latin typeface="Courier New" pitchFamily="34" charset="0"/>
+                <a:ea typeface="Courier New" pitchFamily="34" charset="-122"/>
+                <a:cs typeface="Courier New" pitchFamily="34" charset="-120"/>
+              </a:rPr>
+              <a:t>===================================</a:t>
+            </a:r>
+            <a:endParaRPr lang="en-US" sz="1300" dirty="0"/>
+          </a:p>
+          <a:p>
+            <a:pPr indent="0" marL="0">
+              <a:lnSpc>
+                <a:spcPts val="1900"/>
+              </a:lnSpc>
+              <a:buNone/>
+            </a:pPr>
+            <a:r>
+              <a:rPr lang="en-US" sz="1300" dirty="0">
+                <a:solidFill>
+                  <a:srgbClr val="4FC3F7"/>
+                </a:solidFill>
+                <a:latin typeface="Courier New" pitchFamily="34" charset="0"/>
+                <a:ea typeface="Courier New" pitchFamily="34" charset="-122"/>
+                <a:cs typeface="Courier New" pitchFamily="34" charset="-120"/>
+              </a:rPr>
+              <a:t>Cree par : TON PRENOM</a:t>
+            </a:r>
+            <a:endParaRPr lang="en-US" sz="1300" dirty="0"/>
+          </a:p>
+          <a:p>
+            <a:pPr indent="0" marL="0">
+              <a:lnSpc>
+                <a:spcPts val="1900"/>
+              </a:lnSpc>
+              <a:buNone/>
+            </a:pPr>
+            <a:endParaRPr lang="en-US" sz="1300" dirty="0"/>
+          </a:p>
+          <a:p>
+            <a:pPr indent="0" marL="0">
+              <a:lnSpc>
+                <a:spcPts val="1900"/>
+              </a:lnSpc>
+              <a:buNone/>
+            </a:pPr>
+            <a:r>
+              <a:rPr lang="en-US" sz="1300" dirty="0">
+                <a:solidFill>
+                  <a:srgbClr val="4FC3F7"/>
+                </a:solidFill>
+                <a:latin typeface="Courier New" pitchFamily="34" charset="0"/>
+                <a:ea typeface="Courier New" pitchFamily="34" charset="-122"/>
+                <a:cs typeface="Courier New" pitchFamily="34" charset="-120"/>
+              </a:rPr>
+              <a:t> . | . | .</a:t>
+            </a:r>
+            <a:endParaRPr lang="en-US" sz="1300" dirty="0"/>
+          </a:p>
+          <a:p>
+            <a:pPr indent="0" marL="0">
+              <a:lnSpc>
+                <a:spcPts val="1900"/>
+              </a:lnSpc>
+              <a:buNone/>
+            </a:pPr>
+            <a:r>
+              <a:rPr lang="en-US" sz="1300" dirty="0">
+                <a:solidFill>
+                  <a:srgbClr val="4FC3F7"/>
+                </a:solidFill>
+                <a:latin typeface="Courier New" pitchFamily="34" charset="0"/>
+                <a:ea typeface="Courier New" pitchFamily="34" charset="-122"/>
+                <a:cs typeface="Courier New" pitchFamily="34" charset="-120"/>
+              </a:rPr>
+              <a:t>---+---+---</a:t>
+            </a:r>
+            <a:endParaRPr lang="en-US" sz="1300" dirty="0"/>
+          </a:p>
+          <a:p>
+            <a:pPr indent="0" marL="0">
+              <a:lnSpc>
+                <a:spcPts val="1900"/>
+              </a:lnSpc>
+              <a:buNone/>
+            </a:pPr>
+            <a:r>
+              <a:rPr lang="en-US" sz="1300" dirty="0">
+                <a:solidFill>
+                  <a:srgbClr val="4FC3F7"/>
+                </a:solidFill>
+                <a:latin typeface="Courier New" pitchFamily="34" charset="0"/>
+                <a:ea typeface="Courier New" pitchFamily="34" charset="-122"/>
+                <a:cs typeface="Courier New" pitchFamily="34" charset="-120"/>
+              </a:rPr>
+              <a:t> . | . | .</a:t>
+            </a:r>
+            <a:endParaRPr lang="en-US" sz="1300" dirty="0"/>
+          </a:p>
+        </p:txBody>
+      </p:sp>
+      <p:sp>
+        <p:nvSpPr>
+          <p:cNvPr id="16" name="Shape 14"/>
+          <p:cNvSpPr/>
+          <p:nvPr/>
+        </p:nvSpPr>
+        <p:spPr>
+          <a:xfrm>
+            <a:off x="6583680" y="2194560"/>
+            <a:ext cx="402336" cy="402336"/>
           </a:xfrm>
           <a:prstGeom prst="ellipse">
             <a:avLst/>
           </a:prstGeom>
           <a:solidFill>
-            <a:srgbClr val="6B2D8F"/>
-          </a:solidFill>
-          <a:ln/>
-        </p:spPr>
-      </p:sp>
-      <p:sp>
-        <p:nvSpPr>
-          <p:cNvPr id="15" name="Text 13"/>
-          <p:cNvSpPr txBox="1"/>
-          <p:nvPr/>
-        </p:nvSpPr>
-        <p:spPr>
-          <a:xfrm>
-            <a:off x="640080" y="2286000"/>
-            <a:ext cx="457200" cy="457200"/>
+            <a:srgbClr val="0C5C29"/>
+          </a:solidFill>
+          <a:ln/>
+        </p:spPr>
+      </p:sp>
+      <p:sp>
+        <p:nvSpPr>
+          <p:cNvPr id="17" name="Text 15"/>
+          <p:cNvSpPr txBox="1"/>
+          <p:nvPr/>
+        </p:nvSpPr>
+        <p:spPr>
+          <a:xfrm>
+            <a:off x="6583680" y="2194560"/>
+            <a:ext cx="402336" cy="402336"/>
           </a:xfrm>
           <a:prstGeom prst="rect">
             <a:avLst/>
@@ -9040,7 +10448,7 @@
               <a:buNone/>
             </a:pPr>
             <a:r>
-              <a:rPr lang="en-US" sz="1600" b="1" dirty="0">
+              <a:rPr lang="en-US" sz="1400" b="1" dirty="0">
                 <a:solidFill>
                   <a:srgbClr val="FFFFFF"/>
                 </a:solidFill>
@@ -9050,20 +10458,20 @@
               </a:rPr>
               <a:t>1</a:t>
             </a:r>
-            <a:endParaRPr lang="en-US" sz="1600" dirty="0"/>
-          </a:p>
-        </p:txBody>
-      </p:sp>
-      <p:sp>
-        <p:nvSpPr>
-          <p:cNvPr id="16" name="Text 14"/>
-          <p:cNvSpPr txBox="1"/>
-          <p:nvPr/>
-        </p:nvSpPr>
-        <p:spPr>
-          <a:xfrm>
-            <a:off x="1325880" y="2340864"/>
-            <a:ext cx="7315200" cy="457200"/>
+            <a:endParaRPr lang="en-US" sz="1400" dirty="0"/>
+          </a:p>
+        </p:txBody>
+      </p:sp>
+      <p:sp>
+        <p:nvSpPr>
+          <p:cNvPr id="18" name="Text 16"/>
+          <p:cNvSpPr txBox="1"/>
+          <p:nvPr/>
+        </p:nvSpPr>
+        <p:spPr>
+          <a:xfrm>
+            <a:off x="7132320" y="2240280"/>
+            <a:ext cx="4389120" cy="457200"/>
           </a:xfrm>
           <a:prstGeom prst="rect">
             <a:avLst/>
@@ -9079,7 +10487,7 @@
               <a:buNone/>
             </a:pPr>
             <a:r>
-              <a:rPr lang="en-US" sz="1800" dirty="0">
+              <a:rPr lang="en-US" sz="1500" dirty="0">
                 <a:solidFill>
                   <a:srgbClr val="14142B"/>
                 </a:solidFill>
@@ -9089,40 +10497,40 @@
               </a:rPr>
               <a:t>Ouvre GEEKS → mon_xo → jeu.py</a:t>
             </a:r>
-            <a:endParaRPr lang="en-US" sz="1800" dirty="0"/>
-          </a:p>
-        </p:txBody>
-      </p:sp>
-      <p:sp>
-        <p:nvSpPr>
-          <p:cNvPr id="17" name="Shape 15"/>
-          <p:cNvSpPr/>
-          <p:nvPr/>
-        </p:nvSpPr>
-        <p:spPr>
-          <a:xfrm>
-            <a:off x="640080" y="2971800"/>
-            <a:ext cx="457200" cy="457200"/>
+            <a:endParaRPr lang="en-US" sz="1500" dirty="0"/>
+          </a:p>
+        </p:txBody>
+      </p:sp>
+      <p:sp>
+        <p:nvSpPr>
+          <p:cNvPr id="19" name="Shape 17"/>
+          <p:cNvSpPr/>
+          <p:nvPr/>
+        </p:nvSpPr>
+        <p:spPr>
+          <a:xfrm>
+            <a:off x="6583680" y="2743200"/>
+            <a:ext cx="402336" cy="402336"/>
           </a:xfrm>
           <a:prstGeom prst="ellipse">
             <a:avLst/>
           </a:prstGeom>
           <a:solidFill>
-            <a:srgbClr val="6B2D8F"/>
-          </a:solidFill>
-          <a:ln/>
-        </p:spPr>
-      </p:sp>
-      <p:sp>
-        <p:nvSpPr>
-          <p:cNvPr id="18" name="Text 16"/>
-          <p:cNvSpPr txBox="1"/>
-          <p:nvPr/>
-        </p:nvSpPr>
-        <p:spPr>
-          <a:xfrm>
-            <a:off x="640080" y="2971800"/>
-            <a:ext cx="457200" cy="457200"/>
+            <a:srgbClr val="0C5C29"/>
+          </a:solidFill>
+          <a:ln/>
+        </p:spPr>
+      </p:sp>
+      <p:sp>
+        <p:nvSpPr>
+          <p:cNvPr id="20" name="Text 18"/>
+          <p:cNvSpPr txBox="1"/>
+          <p:nvPr/>
+        </p:nvSpPr>
+        <p:spPr>
+          <a:xfrm>
+            <a:off x="6583680" y="2743200"/>
+            <a:ext cx="402336" cy="402336"/>
           </a:xfrm>
           <a:prstGeom prst="rect">
             <a:avLst/>
@@ -9138,7 +10546,7 @@
               <a:buNone/>
             </a:pPr>
             <a:r>
-              <a:rPr lang="en-US" sz="1600" b="1" dirty="0">
+              <a:rPr lang="en-US" sz="1400" b="1" dirty="0">
                 <a:solidFill>
                   <a:srgbClr val="FFFFFF"/>
                 </a:solidFill>
@@ -9148,20 +10556,20 @@
               </a:rPr>
               <a:t>2</a:t>
             </a:r>
-            <a:endParaRPr lang="en-US" sz="1600" dirty="0"/>
-          </a:p>
-        </p:txBody>
-      </p:sp>
-      <p:sp>
-        <p:nvSpPr>
-          <p:cNvPr id="19" name="Text 17"/>
-          <p:cNvSpPr txBox="1"/>
-          <p:nvPr/>
-        </p:nvSpPr>
-        <p:spPr>
-          <a:xfrm>
-            <a:off x="1325880" y="3026664"/>
-            <a:ext cx="7315200" cy="457200"/>
+            <a:endParaRPr lang="en-US" sz="1400" dirty="0"/>
+          </a:p>
+        </p:txBody>
+      </p:sp>
+      <p:sp>
+        <p:nvSpPr>
+          <p:cNvPr id="21" name="Text 19"/>
+          <p:cNvSpPr txBox="1"/>
+          <p:nvPr/>
+        </p:nvSpPr>
+        <p:spPr>
+          <a:xfrm>
+            <a:off x="7132320" y="2788920"/>
+            <a:ext cx="4389120" cy="457200"/>
           </a:xfrm>
           <a:prstGeom prst="rect">
             <a:avLst/>
@@ -9177,7 +10585,7 @@
               <a:buNone/>
             </a:pPr>
             <a:r>
-              <a:rPr lang="en-US" sz="1800" dirty="0">
+              <a:rPr lang="en-US" sz="1500" dirty="0">
                 <a:solidFill>
                   <a:srgbClr val="14142B"/>
                 </a:solidFill>
@@ -9185,42 +10593,42 @@
                 <a:ea typeface="Calibri" pitchFamily="34" charset="-122"/>
                 <a:cs typeface="Calibri" pitchFamily="34" charset="-120"/>
               </a:rPr>
-              <a:t>Appuie sur F5 TOUT DE SUITE : il marche déjà</a:t>
-            </a:r>
-            <a:endParaRPr lang="en-US" sz="1800" dirty="0"/>
-          </a:p>
-        </p:txBody>
-      </p:sp>
-      <p:sp>
-        <p:nvSpPr>
-          <p:cNvPr id="20" name="Shape 18"/>
-          <p:cNvSpPr/>
-          <p:nvPr/>
-        </p:nvSpPr>
-        <p:spPr>
-          <a:xfrm>
-            <a:off x="640080" y="3657600"/>
-            <a:ext cx="457200" cy="457200"/>
+              <a:t>Appuie sur F5 : il marche déjà</a:t>
+            </a:r>
+            <a:endParaRPr lang="en-US" sz="1500" dirty="0"/>
+          </a:p>
+        </p:txBody>
+      </p:sp>
+      <p:sp>
+        <p:nvSpPr>
+          <p:cNvPr id="22" name="Shape 20"/>
+          <p:cNvSpPr/>
+          <p:nvPr/>
+        </p:nvSpPr>
+        <p:spPr>
+          <a:xfrm>
+            <a:off x="6583680" y="3291840"/>
+            <a:ext cx="402336" cy="402336"/>
           </a:xfrm>
           <a:prstGeom prst="ellipse">
             <a:avLst/>
           </a:prstGeom>
           <a:solidFill>
-            <a:srgbClr val="6B2D8F"/>
-          </a:solidFill>
-          <a:ln/>
-        </p:spPr>
-      </p:sp>
-      <p:sp>
-        <p:nvSpPr>
-          <p:cNvPr id="21" name="Text 19"/>
-          <p:cNvSpPr txBox="1"/>
-          <p:nvPr/>
-        </p:nvSpPr>
-        <p:spPr>
-          <a:xfrm>
-            <a:off x="640080" y="3657600"/>
-            <a:ext cx="457200" cy="457200"/>
+            <a:srgbClr val="0C5C29"/>
+          </a:solidFill>
+          <a:ln/>
+        </p:spPr>
+      </p:sp>
+      <p:sp>
+        <p:nvSpPr>
+          <p:cNvPr id="23" name="Text 21"/>
+          <p:cNvSpPr txBox="1"/>
+          <p:nvPr/>
+        </p:nvSpPr>
+        <p:spPr>
+          <a:xfrm>
+            <a:off x="6583680" y="3291840"/>
+            <a:ext cx="402336" cy="402336"/>
           </a:xfrm>
           <a:prstGeom prst="rect">
             <a:avLst/>
@@ -9236,7 +10644,7 @@
               <a:buNone/>
             </a:pPr>
             <a:r>
-              <a:rPr lang="en-US" sz="1600" b="1" dirty="0">
+              <a:rPr lang="en-US" sz="1400" b="1" dirty="0">
                 <a:solidFill>
                   <a:srgbClr val="FFFFFF"/>
                 </a:solidFill>
@@ -9246,20 +10654,20 @@
               </a:rPr>
               <a:t>3</a:t>
             </a:r>
-            <a:endParaRPr lang="en-US" sz="1600" dirty="0"/>
-          </a:p>
-        </p:txBody>
-      </p:sp>
-      <p:sp>
-        <p:nvSpPr>
-          <p:cNvPr id="22" name="Text 20"/>
-          <p:cNvSpPr txBox="1"/>
-          <p:nvPr/>
-        </p:nvSpPr>
-        <p:spPr>
-          <a:xfrm>
-            <a:off x="1325880" y="3712464"/>
-            <a:ext cx="7315200" cy="457200"/>
+            <a:endParaRPr lang="en-US" sz="1400" dirty="0"/>
+          </a:p>
+        </p:txBody>
+      </p:sp>
+      <p:sp>
+        <p:nvSpPr>
+          <p:cNvPr id="24" name="Text 22"/>
+          <p:cNvSpPr txBox="1"/>
+          <p:nvPr/>
+        </p:nvSpPr>
+        <p:spPr>
+          <a:xfrm>
+            <a:off x="7132320" y="3337560"/>
+            <a:ext cx="4389120" cy="457200"/>
           </a:xfrm>
           <a:prstGeom prst="rect">
             <a:avLst/>
@@ -9275,7 +10683,7 @@
               <a:buNone/>
             </a:pPr>
             <a:r>
-              <a:rPr lang="en-US" sz="1800" dirty="0">
+              <a:rPr lang="en-US" sz="1500" dirty="0">
                 <a:solidFill>
                   <a:srgbClr val="14142B"/>
                 </a:solidFill>
@@ -9283,42 +10691,42 @@
                 <a:ea typeface="Calibri" pitchFamily="34" charset="-122"/>
                 <a:cs typeface="Calibri" pitchFamily="34" charset="-120"/>
               </a:rPr>
-              <a:t>Étape 1 : remplace ____ par ton prénom</a:t>
-            </a:r>
-            <a:endParaRPr lang="en-US" sz="1800" dirty="0"/>
-          </a:p>
-        </p:txBody>
-      </p:sp>
-      <p:sp>
-        <p:nvSpPr>
-          <p:cNvPr id="23" name="Shape 21"/>
-          <p:cNvSpPr/>
-          <p:nvPr/>
-        </p:nvSpPr>
-        <p:spPr>
-          <a:xfrm>
-            <a:off x="640080" y="4343400"/>
-            <a:ext cx="457200" cy="457200"/>
+              <a:t>Étapes 1 à 5 : remplace chaque ____</a:t>
+            </a:r>
+            <a:endParaRPr lang="en-US" sz="1500" dirty="0"/>
+          </a:p>
+        </p:txBody>
+      </p:sp>
+      <p:sp>
+        <p:nvSpPr>
+          <p:cNvPr id="25" name="Shape 23"/>
+          <p:cNvSpPr/>
+          <p:nvPr/>
+        </p:nvSpPr>
+        <p:spPr>
+          <a:xfrm>
+            <a:off x="6583680" y="3840480"/>
+            <a:ext cx="402336" cy="402336"/>
           </a:xfrm>
           <a:prstGeom prst="ellipse">
             <a:avLst/>
           </a:prstGeom>
           <a:solidFill>
-            <a:srgbClr val="6B2D8F"/>
-          </a:solidFill>
-          <a:ln/>
-        </p:spPr>
-      </p:sp>
-      <p:sp>
-        <p:nvSpPr>
-          <p:cNvPr id="24" name="Text 22"/>
-          <p:cNvSpPr txBox="1"/>
-          <p:nvPr/>
-        </p:nvSpPr>
-        <p:spPr>
-          <a:xfrm>
-            <a:off x="640080" y="4343400"/>
-            <a:ext cx="457200" cy="457200"/>
+            <a:srgbClr val="0C5C29"/>
+          </a:solidFill>
+          <a:ln/>
+        </p:spPr>
+      </p:sp>
+      <p:sp>
+        <p:nvSpPr>
+          <p:cNvPr id="26" name="Text 24"/>
+          <p:cNvSpPr txBox="1"/>
+          <p:nvPr/>
+        </p:nvSpPr>
+        <p:spPr>
+          <a:xfrm>
+            <a:off x="6583680" y="3840480"/>
+            <a:ext cx="402336" cy="402336"/>
           </a:xfrm>
           <a:prstGeom prst="rect">
             <a:avLst/>
@@ -9334,7 +10742,7 @@
               <a:buNone/>
             </a:pPr>
             <a:r>
-              <a:rPr lang="en-US" sz="1600" b="1" dirty="0">
+              <a:rPr lang="en-US" sz="1400" b="1" dirty="0">
                 <a:solidFill>
                   <a:srgbClr val="FFFFFF"/>
                 </a:solidFill>
@@ -9344,20 +10752,20 @@
               </a:rPr>
               <a:t>4</a:t>
             </a:r>
-            <a:endParaRPr lang="en-US" sz="1600" dirty="0"/>
-          </a:p>
-        </p:txBody>
-      </p:sp>
-      <p:sp>
-        <p:nvSpPr>
-          <p:cNvPr id="25" name="Text 23"/>
-          <p:cNvSpPr txBox="1"/>
-          <p:nvPr/>
-        </p:nvSpPr>
-        <p:spPr>
-          <a:xfrm>
-            <a:off x="1325880" y="4398264"/>
-            <a:ext cx="7315200" cy="457200"/>
+            <a:endParaRPr lang="en-US" sz="1400" dirty="0"/>
+          </a:p>
+        </p:txBody>
+      </p:sp>
+      <p:sp>
+        <p:nvSpPr>
+          <p:cNvPr id="27" name="Text 25"/>
+          <p:cNvSpPr txBox="1"/>
+          <p:nvPr/>
+        </p:nvSpPr>
+        <p:spPr>
+          <a:xfrm>
+            <a:off x="7132320" y="3886200"/>
+            <a:ext cx="4389120" cy="457200"/>
           </a:xfrm>
           <a:prstGeom prst="rect">
             <a:avLst/>
@@ -9373,7 +10781,7 @@
               <a:buNone/>
             </a:pPr>
             <a:r>
-              <a:rPr lang="en-US" sz="1800" dirty="0">
+              <a:rPr lang="en-US" sz="1500" dirty="0">
                 <a:solidFill>
                   <a:srgbClr val="14142B"/>
                 </a:solidFill>
@@ -9381,46 +10789,144 @@
                 <a:ea typeface="Calibri" pitchFamily="34" charset="-122"/>
                 <a:cs typeface="Calibri" pitchFamily="34" charset="-120"/>
               </a:rPr>
-              <a:t>Relance (F5). Ton prénom s'affiche.</a:t>
-            </a:r>
-            <a:endParaRPr lang="en-US" sz="1800" dirty="0"/>
-          </a:p>
-        </p:txBody>
-      </p:sp>
-      <p:sp>
-        <p:nvSpPr>
-          <p:cNvPr id="26" name="Text 24"/>
-          <p:cNvSpPr txBox="1"/>
-          <p:nvPr/>
-        </p:nvSpPr>
-        <p:spPr>
-          <a:xfrm>
-            <a:off x="640080" y="5440680"/>
-            <a:ext cx="10881360" cy="640080"/>
-          </a:xfrm>
-          <a:prstGeom prst="rect">
-            <a:avLst/>
-          </a:prstGeom>
-          <a:noFill/>
-          <a:ln/>
-        </p:spPr>
-        <p:txBody>
-          <a:bodyPr wrap="square" lIns="0" tIns="0" rIns="0" bIns="0" rtlCol="0" anchor="t"/>
-          <a:lstStyle/>
-          <a:p>
-            <a:pPr indent="0" marL="0">
-              <a:buNone/>
-            </a:pPr>
-            <a:r>
-              <a:rPr lang="en-US" sz="2100" b="1" dirty="0">
-                <a:solidFill>
-                  <a:srgbClr val="0C5C29"/>
+              <a:t>Relance (F5) après CHAQUE changement</a:t>
+            </a:r>
+            <a:endParaRPr lang="en-US" sz="1500" dirty="0"/>
+          </a:p>
+        </p:txBody>
+      </p:sp>
+      <p:sp>
+        <p:nvSpPr>
+          <p:cNvPr id="28" name="Shape 26"/>
+          <p:cNvSpPr/>
+          <p:nvPr/>
+        </p:nvSpPr>
+        <p:spPr>
+          <a:xfrm>
+            <a:off x="6583680" y="4389120"/>
+            <a:ext cx="402336" cy="402336"/>
+          </a:xfrm>
+          <a:prstGeom prst="ellipse">
+            <a:avLst/>
+          </a:prstGeom>
+          <a:solidFill>
+            <a:srgbClr val="0C5C29"/>
+          </a:solidFill>
+          <a:ln/>
+        </p:spPr>
+      </p:sp>
+      <p:sp>
+        <p:nvSpPr>
+          <p:cNvPr id="29" name="Text 27"/>
+          <p:cNvSpPr txBox="1"/>
+          <p:nvPr/>
+        </p:nvSpPr>
+        <p:spPr>
+          <a:xfrm>
+            <a:off x="6583680" y="4389120"/>
+            <a:ext cx="402336" cy="402336"/>
+          </a:xfrm>
+          <a:prstGeom prst="rect">
+            <a:avLst/>
+          </a:prstGeom>
+          <a:noFill/>
+          <a:ln/>
+        </p:spPr>
+        <p:txBody>
+          <a:bodyPr wrap="square" lIns="0" tIns="0" rIns="0" bIns="0" rtlCol="0" anchor="ctr"/>
+          <a:lstStyle/>
+          <a:p>
+            <a:pPr algn="ctr" indent="0" marL="0">
+              <a:buNone/>
+            </a:pPr>
+            <a:r>
+              <a:rPr lang="en-US" sz="1400" b="1" dirty="0">
+                <a:solidFill>
+                  <a:srgbClr val="FFFFFF"/>
                 </a:solidFill>
                 <a:latin typeface="Calibri" pitchFamily="34" charset="0"/>
                 <a:ea typeface="Calibri" pitchFamily="34" charset="-122"/>
                 <a:cs typeface="Calibri" pitchFamily="34" charset="-120"/>
               </a:rPr>
-              <a:t>8 minutes. Tout le monde doit avoir vu son prénom s'afficher.</a:t>
+              <a:t>5</a:t>
+            </a:r>
+            <a:endParaRPr lang="en-US" sz="1400" dirty="0"/>
+          </a:p>
+        </p:txBody>
+      </p:sp>
+      <p:sp>
+        <p:nvSpPr>
+          <p:cNvPr id="30" name="Text 28"/>
+          <p:cNvSpPr txBox="1"/>
+          <p:nvPr/>
+        </p:nvSpPr>
+        <p:spPr>
+          <a:xfrm>
+            <a:off x="7132320" y="4434840"/>
+            <a:ext cx="4389120" cy="457200"/>
+          </a:xfrm>
+          <a:prstGeom prst="rect">
+            <a:avLst/>
+          </a:prstGeom>
+          <a:noFill/>
+          <a:ln/>
+        </p:spPr>
+        <p:txBody>
+          <a:bodyPr wrap="square" lIns="0" tIns="0" rIns="0" bIns="0" rtlCol="0" anchor="t"/>
+          <a:lstStyle/>
+          <a:p>
+            <a:pPr indent="0" marL="0">
+              <a:buNone/>
+            </a:pPr>
+            <a:r>
+              <a:rPr lang="en-US" sz="1500" dirty="0">
+                <a:solidFill>
+                  <a:srgbClr val="14142B"/>
+                </a:solidFill>
+                <a:latin typeface="Calibri" pitchFamily="34" charset="0"/>
+                <a:ea typeface="Calibri" pitchFamily="34" charset="-122"/>
+                <a:cs typeface="Calibri" pitchFamily="34" charset="-120"/>
+              </a:rPr>
+              <a:t>Ça marche ? CARTE VERTE, et tu m'attends</a:t>
+            </a:r>
+            <a:endParaRPr lang="en-US" sz="1500" dirty="0"/>
+          </a:p>
+        </p:txBody>
+      </p:sp>
+      <p:sp>
+        <p:nvSpPr>
+          <p:cNvPr id="31" name="Text 29"/>
+          <p:cNvSpPr txBox="1"/>
+          <p:nvPr/>
+        </p:nvSpPr>
+        <p:spPr>
+          <a:xfrm>
+            <a:off x="640080" y="5440680"/>
+            <a:ext cx="10881360" cy="640080"/>
+          </a:xfrm>
+          <a:prstGeom prst="rect">
+            <a:avLst/>
+          </a:prstGeom>
+          <a:noFill/>
+          <a:ln/>
+        </p:spPr>
+        <p:txBody>
+          <a:bodyPr wrap="square" lIns="0" tIns="0" rIns="0" bIns="0" rtlCol="0" anchor="t"/>
+          <a:lstStyle/>
+          <a:p>
+            <a:pPr indent="0" marL="0">
+              <a:buNone/>
+            </a:pPr>
+            <a:r>
+              <a:rPr lang="en-US" sz="2100" b="1" dirty="0">
+                <a:solidFill>
+                  <a:srgbClr val="0C5C29"/>
+                </a:solidFill>
+                <a:latin typeface="Calibri" pitchFamily="34" charset="0"/>
+                <a:ea typeface="Calibri" pitchFamily="34" charset="-122"/>
+                <a:cs typeface="Calibri" pitchFamily="34" charset="-120"/>
+              </a:rPr>
+              <a:t>12 minutes. On ne fait PAS la partie 2 : on l'attend ensemble.</a:t>
             </a:r>
             <a:endParaRPr lang="en-US" sz="2100" dirty="0"/>
           </a:p>
@@ -9434,9 +10940,9 @@
 </p:sld>
 </file>
 
-<file path=ppt/slides/slide18.xml><?xml version="1.0" encoding="utf-8"?>
+<file path=ppt/slides/slide19.xml><?xml version="1.0" encoding="utf-8"?>
 <p:sld xmlns:a="http://schemas.openxmlformats.org/drawingml/2006/main" xmlns:r="http://schemas.openxmlformats.org/officeDocument/2006/relationships" xmlns:p="http://schemas.openxmlformats.org/presentationml/2006/main">
-  <p:cSld name="Slide 18">
+  <p:cSld name="Slide 19">
     <p:bg>
       <p:bgPr>
         <a:solidFill>
@@ -9491,7 +10997,7 @@
                 <a:ea typeface="Courier New" pitchFamily="34" charset="-122"/>
                 <a:cs typeface="Courier New" pitchFamily="34" charset="-120"/>
               </a:rPr>
-              <a:t>13 h 25</a:t>
+              <a:t>13 h 27</a:t>
             </a:r>
             <a:endParaRPr lang="en-US" sz="1100" dirty="0"/>
           </a:p>
@@ -10021,7 +11527,7 @@
                 <a:ea typeface="Calibri" pitchFamily="34" charset="-122"/>
                 <a:cs typeface="Calibri" pitchFamily="34" charset="-120"/>
               </a:rPr>
-              <a:t>LA LEÇON DU JOUR</a:t>
+              <a:t>LA DEUXIÈME LEÇON</a:t>
             </a:r>
             <a:endParaRPr lang="en-US" sz="4000" dirty="0"/>
           </a:p>
@@ -10063,687 +11569,6 @@
               <a:t>Une boîte, une étiquette — et une question au joueur.</a:t>
             </a:r>
             <a:endParaRPr lang="en-US" sz="1900" dirty="0"/>
-          </a:p>
-        </p:txBody>
-      </p:sp>
-    </p:spTree>
-  </p:cSld>
-  <p:clrMapOvr>
-    <a:masterClrMapping/>
-  </p:clrMapOvr>
-</p:sld>
-</file>
-
-<file path=ppt/slides/slide19.xml><?xml version="1.0" encoding="utf-8"?>
-<p:sld xmlns:a="http://schemas.openxmlformats.org/drawingml/2006/main" xmlns:r="http://schemas.openxmlformats.org/officeDocument/2006/relationships" xmlns:p="http://schemas.openxmlformats.org/presentationml/2006/main">
-  <p:cSld name="Slide 19">
-    <p:bg>
-      <p:bgPr>
-        <a:solidFill>
-          <a:srgbClr val="F7F7FB"/>
-        </a:solidFill>
-      </p:bgPr>
-    </p:bg>
-    <p:spTree>
-      <p:nvGrpSpPr>
-        <p:cNvPr id="1" name=""/>
-        <p:cNvGrpSpPr/>
-        <p:nvPr/>
-      </p:nvGrpSpPr>
-      <p:grpSpPr>
-        <a:xfrm>
-          <a:off x="0" y="0"/>
-          <a:ext cx="0" cy="0"/>
-          <a:chOff x="0" y="0"/>
-          <a:chExt cx="0" cy="0"/>
-        </a:xfrm>
-      </p:grpSpPr>
-      <p:sp>
-        <p:nvSpPr>
-          <p:cNvPr id="2" name="Text 0"/>
-          <p:cNvSpPr txBox="1"/>
-          <p:nvPr/>
-        </p:nvSpPr>
-        <p:spPr>
-          <a:xfrm>
-            <a:off x="9509760" y="6181344"/>
-            <a:ext cx="2011680" cy="310896"/>
-          </a:xfrm>
-          <a:prstGeom prst="rect">
-            <a:avLst/>
-          </a:prstGeom>
-          <a:noFill/>
-          <a:ln/>
-        </p:spPr>
-        <p:txBody>
-          <a:bodyPr wrap="square" lIns="0" tIns="0" rIns="0" bIns="0" rtlCol="0" anchor="ctr"/>
-          <a:lstStyle/>
-          <a:p>
-            <a:pPr algn="r" indent="0" marL="0">
-              <a:buNone/>
-            </a:pPr>
-            <a:r>
-              <a:rPr lang="en-US" sz="1100" dirty="0">
-                <a:solidFill>
-                  <a:srgbClr val="5A5A72"/>
-                </a:solidFill>
-                <a:latin typeface="Courier New" pitchFamily="34" charset="0"/>
-                <a:ea typeface="Courier New" pitchFamily="34" charset="-122"/>
-                <a:cs typeface="Courier New" pitchFamily="34" charset="-120"/>
-              </a:rPr>
-              <a:t>13 h 25</a:t>
-            </a:r>
-            <a:endParaRPr lang="en-US" sz="1100" dirty="0"/>
-          </a:p>
-        </p:txBody>
-      </p:sp>
-      <p:sp>
-        <p:nvSpPr>
-          <p:cNvPr id="3" name="Shape 1"/>
-          <p:cNvSpPr/>
-          <p:nvPr/>
-        </p:nvSpPr>
-        <p:spPr>
-          <a:xfrm>
-            <a:off x="11558016" y="6217920"/>
-            <a:ext cx="68580" cy="68580"/>
-          </a:xfrm>
-          <a:prstGeom prst="roundRect">
-            <a:avLst>
-              <a:gd name="adj" fmla="val 26667"/>
-            </a:avLst>
-          </a:prstGeom>
-          <a:solidFill>
-            <a:srgbClr val="6B2D8F">
-              <a:alpha val="30000"/>
-            </a:srgbClr>
-          </a:solidFill>
-          <a:ln/>
-        </p:spPr>
-      </p:sp>
-      <p:sp>
-        <p:nvSpPr>
-          <p:cNvPr id="4" name="Shape 2"/>
-          <p:cNvSpPr/>
-          <p:nvPr/>
-        </p:nvSpPr>
-        <p:spPr>
-          <a:xfrm>
-            <a:off x="11650599" y="6217920"/>
-            <a:ext cx="68580" cy="68580"/>
-          </a:xfrm>
-          <a:prstGeom prst="roundRect">
-            <a:avLst>
-              <a:gd name="adj" fmla="val 26667"/>
-            </a:avLst>
-          </a:prstGeom>
-          <a:solidFill>
-            <a:srgbClr val="6B2D8F">
-              <a:alpha val="30000"/>
-            </a:srgbClr>
-          </a:solidFill>
-          <a:ln/>
-        </p:spPr>
-      </p:sp>
-      <p:sp>
-        <p:nvSpPr>
-          <p:cNvPr id="5" name="Shape 3"/>
-          <p:cNvSpPr/>
-          <p:nvPr/>
-        </p:nvSpPr>
-        <p:spPr>
-          <a:xfrm>
-            <a:off x="11743182" y="6217920"/>
-            <a:ext cx="68580" cy="68580"/>
-          </a:xfrm>
-          <a:prstGeom prst="roundRect">
-            <a:avLst>
-              <a:gd name="adj" fmla="val 26667"/>
-            </a:avLst>
-          </a:prstGeom>
-          <a:solidFill>
-            <a:srgbClr val="6B2D8F">
-              <a:alpha val="30000"/>
-            </a:srgbClr>
-          </a:solidFill>
-          <a:ln/>
-        </p:spPr>
-      </p:sp>
-      <p:sp>
-        <p:nvSpPr>
-          <p:cNvPr id="6" name="Shape 4"/>
-          <p:cNvSpPr/>
-          <p:nvPr/>
-        </p:nvSpPr>
-        <p:spPr>
-          <a:xfrm>
-            <a:off x="11558016" y="6310503"/>
-            <a:ext cx="68580" cy="68580"/>
-          </a:xfrm>
-          <a:prstGeom prst="roundRect">
-            <a:avLst>
-              <a:gd name="adj" fmla="val 26667"/>
-            </a:avLst>
-          </a:prstGeom>
-          <a:solidFill>
-            <a:srgbClr val="6B2D8F">
-              <a:alpha val="30000"/>
-            </a:srgbClr>
-          </a:solidFill>
-          <a:ln/>
-        </p:spPr>
-      </p:sp>
-      <p:sp>
-        <p:nvSpPr>
-          <p:cNvPr id="7" name="Shape 5"/>
-          <p:cNvSpPr/>
-          <p:nvPr/>
-        </p:nvSpPr>
-        <p:spPr>
-          <a:xfrm>
-            <a:off x="11650599" y="6310503"/>
-            <a:ext cx="68580" cy="68580"/>
-          </a:xfrm>
-          <a:prstGeom prst="roundRect">
-            <a:avLst>
-              <a:gd name="adj" fmla="val 26667"/>
-            </a:avLst>
-          </a:prstGeom>
-          <a:solidFill>
-            <a:srgbClr val="6B2D8F">
-              <a:alpha val="30000"/>
-            </a:srgbClr>
-          </a:solidFill>
-          <a:ln/>
-        </p:spPr>
-      </p:sp>
-      <p:sp>
-        <p:nvSpPr>
-          <p:cNvPr id="8" name="Shape 6"/>
-          <p:cNvSpPr/>
-          <p:nvPr/>
-        </p:nvSpPr>
-        <p:spPr>
-          <a:xfrm>
-            <a:off x="11743182" y="6310503"/>
-            <a:ext cx="68580" cy="68580"/>
-          </a:xfrm>
-          <a:prstGeom prst="roundRect">
-            <a:avLst>
-              <a:gd name="adj" fmla="val 26667"/>
-            </a:avLst>
-          </a:prstGeom>
-          <a:solidFill>
-            <a:srgbClr val="6B2D8F">
-              <a:alpha val="30000"/>
-            </a:srgbClr>
-          </a:solidFill>
-          <a:ln/>
-        </p:spPr>
-      </p:sp>
-      <p:sp>
-        <p:nvSpPr>
-          <p:cNvPr id="9" name="Shape 7"/>
-          <p:cNvSpPr/>
-          <p:nvPr/>
-        </p:nvSpPr>
-        <p:spPr>
-          <a:xfrm>
-            <a:off x="11558016" y="6403086"/>
-            <a:ext cx="68580" cy="68580"/>
-          </a:xfrm>
-          <a:prstGeom prst="roundRect">
-            <a:avLst>
-              <a:gd name="adj" fmla="val 26667"/>
-            </a:avLst>
-          </a:prstGeom>
-          <a:solidFill>
-            <a:srgbClr val="6B2D8F">
-              <a:alpha val="30000"/>
-            </a:srgbClr>
-          </a:solidFill>
-          <a:ln/>
-        </p:spPr>
-      </p:sp>
-      <p:sp>
-        <p:nvSpPr>
-          <p:cNvPr id="10" name="Shape 8"/>
-          <p:cNvSpPr/>
-          <p:nvPr/>
-        </p:nvSpPr>
-        <p:spPr>
-          <a:xfrm>
-            <a:off x="11650599" y="6403086"/>
-            <a:ext cx="68580" cy="68580"/>
-          </a:xfrm>
-          <a:prstGeom prst="roundRect">
-            <a:avLst>
-              <a:gd name="adj" fmla="val 26667"/>
-            </a:avLst>
-          </a:prstGeom>
-          <a:solidFill>
-            <a:srgbClr val="6B2D8F">
-              <a:alpha val="30000"/>
-            </a:srgbClr>
-          </a:solidFill>
-          <a:ln/>
-        </p:spPr>
-      </p:sp>
-      <p:sp>
-        <p:nvSpPr>
-          <p:cNvPr id="11" name="Shape 9"/>
-          <p:cNvSpPr/>
-          <p:nvPr/>
-        </p:nvSpPr>
-        <p:spPr>
-          <a:xfrm>
-            <a:off x="11743182" y="6403086"/>
-            <a:ext cx="68580" cy="68580"/>
-          </a:xfrm>
-          <a:prstGeom prst="roundRect">
-            <a:avLst>
-              <a:gd name="adj" fmla="val 26667"/>
-            </a:avLst>
-          </a:prstGeom>
-          <a:solidFill>
-            <a:srgbClr val="6B2D8F">
-              <a:alpha val="30000"/>
-            </a:srgbClr>
-          </a:solidFill>
-          <a:ln/>
-        </p:spPr>
-      </p:sp>
-      <p:sp>
-        <p:nvSpPr>
-          <p:cNvPr id="12" name="Text 10"/>
-          <p:cNvSpPr txBox="1"/>
-          <p:nvPr/>
-        </p:nvSpPr>
-        <p:spPr>
-          <a:xfrm>
-            <a:off x="640080" y="457200"/>
-            <a:ext cx="10881360" cy="310896"/>
-          </a:xfrm>
-          <a:prstGeom prst="rect">
-            <a:avLst/>
-          </a:prstGeom>
-          <a:noFill/>
-          <a:ln/>
-        </p:spPr>
-        <p:txBody>
-          <a:bodyPr wrap="square" lIns="0" tIns="0" rIns="0" bIns="0" rtlCol="0" anchor="ctr"/>
-          <a:lstStyle/>
-          <a:p>
-            <a:pPr indent="0" marL="0">
-              <a:buNone/>
-            </a:pPr>
-            <a:r>
-              <a:rPr lang="en-US" sz="1300" b="1" spc="300" kern="0" dirty="0">
-                <a:solidFill>
-                  <a:srgbClr val="6B2D8F"/>
-                </a:solidFill>
-                <a:latin typeface="Calibri" pitchFamily="34" charset="0"/>
-                <a:ea typeface="Calibri" pitchFamily="34" charset="-122"/>
-                <a:cs typeface="Calibri" pitchFamily="34" charset="-120"/>
-              </a:rPr>
-              <a:t>LA VARIABLE</a:t>
-            </a:r>
-            <a:endParaRPr lang="en-US" sz="1300" dirty="0"/>
-          </a:p>
-        </p:txBody>
-      </p:sp>
-      <p:sp>
-        <p:nvSpPr>
-          <p:cNvPr id="13" name="Text 11"/>
-          <p:cNvSpPr txBox="1"/>
-          <p:nvPr/>
-        </p:nvSpPr>
-        <p:spPr>
-          <a:xfrm>
-            <a:off x="640080" y="868680"/>
-            <a:ext cx="10881360" cy="914400"/>
-          </a:xfrm>
-          <a:prstGeom prst="rect">
-            <a:avLst/>
-          </a:prstGeom>
-          <a:noFill/>
-          <a:ln/>
-        </p:spPr>
-        <p:txBody>
-          <a:bodyPr wrap="square" lIns="0" tIns="0" rIns="0" bIns="0" rtlCol="0" anchor="t"/>
-          <a:lstStyle/>
-          <a:p>
-            <a:pPr indent="0" marL="0">
-              <a:lnSpc>
-                <a:spcPts val="4400"/>
-              </a:lnSpc>
-              <a:buNone/>
-            </a:pPr>
-            <a:r>
-              <a:rPr lang="en-US" sz="4000" b="1" dirty="0">
-                <a:solidFill>
-                  <a:srgbClr val="14142B"/>
-                </a:solidFill>
-                <a:latin typeface="Calibri" pitchFamily="34" charset="0"/>
-                <a:ea typeface="Calibri" pitchFamily="34" charset="-122"/>
-                <a:cs typeface="Calibri" pitchFamily="34" charset="-120"/>
-              </a:rPr>
-              <a:t>Une boîte avec une étiquette.</a:t>
-            </a:r>
-            <a:endParaRPr lang="en-US" sz="4000" dirty="0"/>
-          </a:p>
-        </p:txBody>
-      </p:sp>
-      <p:sp>
-        <p:nvSpPr>
-          <p:cNvPr id="14" name="Shape 12"/>
-          <p:cNvSpPr/>
-          <p:nvPr/>
-        </p:nvSpPr>
-        <p:spPr>
-          <a:xfrm>
-            <a:off x="640080" y="2194560"/>
-            <a:ext cx="5120640" cy="2103120"/>
-          </a:xfrm>
-          <a:prstGeom prst="roundRect">
-            <a:avLst>
-              <a:gd name="adj" fmla="val 3478"/>
-            </a:avLst>
-          </a:prstGeom>
-          <a:solidFill>
-            <a:srgbClr val="FFF6D8"/>
-          </a:solidFill>
-          <a:ln w="19050">
-            <a:solidFill>
-              <a:srgbClr val="D79A00"/>
-            </a:solidFill>
-            <a:prstDash val="solid"/>
-          </a:ln>
-          <a:effectLst>
-            <a:outerShdw sx="100000" sy="100000" kx="0" ky="0" algn="bl" rotWithShape="0" blurRad="127000" dist="25400" dir="5400000">
-              <a:srgbClr val="20204A">
-                <a:alpha val="12000"/>
-              </a:srgbClr>
-            </a:outerShdw>
-          </a:effectLst>
-        </p:spPr>
-      </p:sp>
-      <p:sp>
-        <p:nvSpPr>
-          <p:cNvPr id="15" name="Text 13"/>
-          <p:cNvSpPr txBox="1"/>
-          <p:nvPr/>
-        </p:nvSpPr>
-        <p:spPr>
-          <a:xfrm>
-            <a:off x="1005840" y="2468880"/>
-            <a:ext cx="1097280" cy="914400"/>
-          </a:xfrm>
-          <a:prstGeom prst="rect">
-            <a:avLst/>
-          </a:prstGeom>
-          <a:noFill/>
-          <a:ln/>
-        </p:spPr>
-        <p:txBody>
-          <a:bodyPr wrap="square" lIns="0" tIns="0" rIns="0" bIns="0" rtlCol="0" anchor="t"/>
-          <a:lstStyle/>
-          <a:p>
-            <a:pPr indent="0" marL="0">
-              <a:buNone/>
-            </a:pPr>
-            <a:r>
-              <a:rPr lang="en-US" sz="4400" dirty="0">
-                <a:solidFill>
-                  <a:srgbClr val="000000"/>
-                </a:solidFill>
-                <a:latin typeface="Calibri" pitchFamily="34" charset="0"/>
-                <a:ea typeface="Calibri" pitchFamily="34" charset="-122"/>
-                <a:cs typeface="Calibri" pitchFamily="34" charset="-120"/>
-              </a:rPr>
-              <a:t>📦</a:t>
-            </a:r>
-            <a:endParaRPr lang="en-US" sz="4400" dirty="0"/>
-          </a:p>
-        </p:txBody>
-      </p:sp>
-      <p:sp>
-        <p:nvSpPr>
-          <p:cNvPr id="16" name="Text 14"/>
-          <p:cNvSpPr txBox="1"/>
-          <p:nvPr/>
-        </p:nvSpPr>
-        <p:spPr>
-          <a:xfrm>
-            <a:off x="2286000" y="2606040"/>
-            <a:ext cx="3108960" cy="548640"/>
-          </a:xfrm>
-          <a:prstGeom prst="rect">
-            <a:avLst/>
-          </a:prstGeom>
-          <a:noFill/>
-          <a:ln/>
-        </p:spPr>
-        <p:txBody>
-          <a:bodyPr wrap="square" lIns="0" tIns="0" rIns="0" bIns="0" rtlCol="0" anchor="t"/>
-          <a:lstStyle/>
-          <a:p>
-            <a:pPr indent="0" marL="0">
-              <a:buNone/>
-            </a:pPr>
-            <a:r>
-              <a:rPr lang="en-US" sz="3000" b="1" dirty="0">
-                <a:solidFill>
-                  <a:srgbClr val="A65D00"/>
-                </a:solidFill>
-                <a:latin typeface="Courier New" pitchFamily="34" charset="0"/>
-                <a:ea typeface="Courier New" pitchFamily="34" charset="-122"/>
-                <a:cs typeface="Courier New" pitchFamily="34" charset="-120"/>
-              </a:rPr>
-              <a:t>nom</a:t>
-            </a:r>
-            <a:endParaRPr lang="en-US" sz="3000" dirty="0"/>
-          </a:p>
-        </p:txBody>
-      </p:sp>
-      <p:sp>
-        <p:nvSpPr>
-          <p:cNvPr id="17" name="Text 15"/>
-          <p:cNvSpPr txBox="1"/>
-          <p:nvPr/>
-        </p:nvSpPr>
-        <p:spPr>
-          <a:xfrm>
-            <a:off x="2286000" y="3154680"/>
-            <a:ext cx="3108960" cy="457200"/>
-          </a:xfrm>
-          <a:prstGeom prst="rect">
-            <a:avLst/>
-          </a:prstGeom>
-          <a:noFill/>
-          <a:ln/>
-        </p:spPr>
-        <p:txBody>
-          <a:bodyPr wrap="square" lIns="0" tIns="0" rIns="0" bIns="0" rtlCol="0" anchor="t"/>
-          <a:lstStyle/>
-          <a:p>
-            <a:pPr indent="0" marL="0">
-              <a:buNone/>
-            </a:pPr>
-            <a:r>
-              <a:rPr lang="en-US" sz="1400" dirty="0">
-                <a:solidFill>
-                  <a:srgbClr val="5A5A72"/>
-                </a:solidFill>
-                <a:latin typeface="Calibri" pitchFamily="34" charset="0"/>
-                <a:ea typeface="Calibri" pitchFamily="34" charset="-122"/>
-                <a:cs typeface="Calibri" pitchFamily="34" charset="-120"/>
-              </a:rPr>
-              <a:t>l'étiquette collée sur la boîte</a:t>
-            </a:r>
-            <a:endParaRPr lang="en-US" sz="1400" dirty="0"/>
-          </a:p>
-        </p:txBody>
-      </p:sp>
-      <p:sp>
-        <p:nvSpPr>
-          <p:cNvPr id="18" name="Text 16"/>
-          <p:cNvSpPr txBox="1"/>
-          <p:nvPr/>
-        </p:nvSpPr>
-        <p:spPr>
-          <a:xfrm>
-            <a:off x="2286000" y="3611880"/>
-            <a:ext cx="3108960" cy="457200"/>
-          </a:xfrm>
-          <a:prstGeom prst="rect">
-            <a:avLst/>
-          </a:prstGeom>
-          <a:noFill/>
-          <a:ln/>
-        </p:spPr>
-        <p:txBody>
-          <a:bodyPr wrap="square" lIns="0" tIns="0" rIns="0" bIns="0" rtlCol="0" anchor="t"/>
-          <a:lstStyle/>
-          <a:p>
-            <a:pPr indent="0" marL="0">
-              <a:buNone/>
-            </a:pPr>
-            <a:r>
-              <a:rPr lang="en-US" sz="2000" b="1" dirty="0">
-                <a:solidFill>
-                  <a:srgbClr val="14142B"/>
-                </a:solidFill>
-                <a:latin typeface="Courier New" pitchFamily="34" charset="0"/>
-                <a:ea typeface="Courier New" pitchFamily="34" charset="-122"/>
-                <a:cs typeface="Courier New" pitchFamily="34" charset="-120"/>
-              </a:rPr>
-              <a:t>"Damien"</a:t>
-            </a:r>
-            <a:endParaRPr lang="en-US" sz="2000" dirty="0"/>
-          </a:p>
-        </p:txBody>
-      </p:sp>
-      <p:sp>
-        <p:nvSpPr>
-          <p:cNvPr id="19" name="Shape 17"/>
-          <p:cNvSpPr/>
-          <p:nvPr/>
-        </p:nvSpPr>
-        <p:spPr>
-          <a:xfrm>
-            <a:off x="6492240" y="2194560"/>
-            <a:ext cx="5029200" cy="2103120"/>
-          </a:xfrm>
-          <a:prstGeom prst="roundRect">
-            <a:avLst>
-              <a:gd name="adj" fmla="val 3478"/>
-            </a:avLst>
-          </a:prstGeom>
-          <a:solidFill>
-            <a:srgbClr val="12122A"/>
-          </a:solidFill>
-          <a:ln/>
-        </p:spPr>
-      </p:sp>
-      <p:sp>
-        <p:nvSpPr>
-          <p:cNvPr id="20" name="Text 18"/>
-          <p:cNvSpPr txBox="1"/>
-          <p:nvPr/>
-        </p:nvSpPr>
-        <p:spPr>
-          <a:xfrm>
-            <a:off x="6812280" y="2423160"/>
-            <a:ext cx="4389120" cy="1645920"/>
-          </a:xfrm>
-          <a:prstGeom prst="rect">
-            <a:avLst/>
-          </a:prstGeom>
-          <a:noFill/>
-          <a:ln/>
-        </p:spPr>
-        <p:txBody>
-          <a:bodyPr wrap="square" lIns="0" tIns="0" rIns="0" bIns="0" rtlCol="0" anchor="t"/>
-          <a:lstStyle/>
-          <a:p>
-            <a:pPr indent="0" marL="0">
-              <a:lnSpc>
-                <a:spcPts val="4000"/>
-              </a:lnSpc>
-              <a:buNone/>
-            </a:pPr>
-            <a:r>
-              <a:rPr lang="en-US" sz="2200" dirty="0">
-                <a:solidFill>
-                  <a:srgbClr val="4FC3F7"/>
-                </a:solidFill>
-                <a:latin typeface="Courier New" pitchFamily="34" charset="0"/>
-                <a:ea typeface="Courier New" pitchFamily="34" charset="-122"/>
-                <a:cs typeface="Courier New" pitchFamily="34" charset="-120"/>
-              </a:rPr>
-              <a:t>nom = "Damien"</a:t>
-            </a:r>
-            <a:endParaRPr lang="en-US" sz="2200" dirty="0"/>
-          </a:p>
-          <a:p>
-            <a:pPr indent="0" marL="0">
-              <a:lnSpc>
-                <a:spcPts val="4000"/>
-              </a:lnSpc>
-              <a:buNone/>
-            </a:pPr>
-            <a:r>
-              <a:rPr lang="en-US" sz="2200" dirty="0">
-                <a:solidFill>
-                  <a:srgbClr val="4FC3F7"/>
-                </a:solidFill>
-                <a:latin typeface="Courier New" pitchFamily="34" charset="0"/>
-                <a:ea typeface="Courier New" pitchFamily="34" charset="-122"/>
-                <a:cs typeface="Courier New" pitchFamily="34" charset="-120"/>
-              </a:rPr>
-              <a:t>print(nom)</a:t>
-            </a:r>
-            <a:endParaRPr lang="en-US" sz="2200" dirty="0"/>
-          </a:p>
-        </p:txBody>
-      </p:sp>
-      <p:sp>
-        <p:nvSpPr>
-          <p:cNvPr id="21" name="Text 19"/>
-          <p:cNvSpPr txBox="1"/>
-          <p:nvPr/>
-        </p:nvSpPr>
-        <p:spPr>
-          <a:xfrm>
-            <a:off x="640080" y="5440680"/>
-            <a:ext cx="10881360" cy="640080"/>
-          </a:xfrm>
-          <a:prstGeom prst="rect">
-            <a:avLst/>
-          </a:prstGeom>
-          <a:noFill/>
-          <a:ln/>
-        </p:spPr>
-        <p:txBody>
-          <a:bodyPr wrap="square" lIns="0" tIns="0" rIns="0" bIns="0" rtlCol="0" anchor="t"/>
-          <a:lstStyle/>
-          <a:p>
-            <a:pPr indent="0" marL="0">
-              <a:buNone/>
-            </a:pPr>
-            <a:r>
-              <a:rPr lang="en-US" sz="2100" b="1" dirty="0">
-                <a:solidFill>
-                  <a:srgbClr val="6B2D8F"/>
-                </a:solidFill>
-                <a:latin typeface="Calibri" pitchFamily="34" charset="0"/>
-                <a:ea typeface="Calibri" pitchFamily="34" charset="-122"/>
-                <a:cs typeface="Calibri" pitchFamily="34" charset="-120"/>
-              </a:rPr>
-              <a:t>Qu'est-ce qui va s'afficher :  nom,  ou  Damien  ?</a:t>
-            </a:r>
-            <a:endParaRPr lang="en-US" sz="2100" dirty="0"/>
           </a:p>
         </p:txBody>
       </p:sp>
@@ -11216,7 +12041,7 @@
                 <a:ea typeface="Courier New" pitchFamily="34" charset="-122"/>
                 <a:cs typeface="Courier New" pitchFamily="34" charset="-120"/>
               </a:rPr>
-              <a:t>13 h 28</a:t>
+              <a:t>13 h 27</a:t>
             </a:r>
             <a:endParaRPr lang="en-US" sz="1100" dirty="0"/>
           </a:p>
@@ -11471,7 +12296,7 @@
                 <a:ea typeface="Calibri" pitchFamily="34" charset="-122"/>
                 <a:cs typeface="Calibri" pitchFamily="34" charset="-120"/>
               </a:rPr>
-              <a:t>TOUTE LA DIFFÉRENCE EST LÀ</a:t>
+              <a:t>LA VARIABLE</a:t>
             </a:r>
             <a:endParaRPr lang="en-US" sz="1300" dirty="0"/>
           </a:p>
@@ -11513,7 +12338,7 @@
                 <a:ea typeface="Calibri" pitchFamily="34" charset="-122"/>
                 <a:cs typeface="Calibri" pitchFamily="34" charset="-120"/>
               </a:rPr>
-              <a:t>Avec guillemets, ou sans.</a:t>
+              <a:t>Une boîte avec une étiquette.</a:t>
             </a:r>
             <a:endParaRPr lang="en-US" sz="4000" dirty="0"/>
           </a:p>
@@ -11528,17 +12353,29 @@
         <p:spPr>
           <a:xfrm>
             <a:off x="640080" y="2194560"/>
-            <a:ext cx="5394960" cy="960120"/>
-          </a:xfrm>
-          <a:prstGeom prst="roundRect">
-            <a:avLst>
-              <a:gd name="adj" fmla="val 7619"/>
-            </a:avLst>
-          </a:prstGeom>
-          <a:solidFill>
-            <a:srgbClr val="12122A"/>
-          </a:solidFill>
-          <a:ln/>
+            <a:ext cx="5120640" cy="2103120"/>
+          </a:xfrm>
+          <a:prstGeom prst="roundRect">
+            <a:avLst>
+              <a:gd name="adj" fmla="val 3478"/>
+            </a:avLst>
+          </a:prstGeom>
+          <a:solidFill>
+            <a:srgbClr val="FFF6D8"/>
+          </a:solidFill>
+          <a:ln w="19050">
+            <a:solidFill>
+              <a:srgbClr val="D79A00"/>
+            </a:solidFill>
+            <a:prstDash val="solid"/>
+          </a:ln>
+          <a:effectLst>
+            <a:outerShdw sx="100000" sy="100000" kx="0" ky="0" algn="bl" rotWithShape="0" blurRad="127000" dist="25400" dir="5400000">
+              <a:srgbClr val="20204A">
+                <a:alpha val="12000"/>
+              </a:srgbClr>
+            </a:outerShdw>
+          </a:effectLst>
         </p:spPr>
       </p:sp>
       <p:sp>
@@ -11549,8 +12386,8 @@
         </p:nvSpPr>
         <p:spPr>
           <a:xfrm>
-            <a:off x="960120" y="2423160"/>
-            <a:ext cx="4754880" cy="502920"/>
+            <a:off x="1005840" y="2468880"/>
+            <a:ext cx="1097280" cy="914400"/>
           </a:xfrm>
           <a:prstGeom prst="rect">
             <a:avLst/>
@@ -11563,36 +12400,72 @@
           <a:lstStyle/>
           <a:p>
             <a:pPr indent="0" marL="0">
-              <a:lnSpc>
-                <a:spcPts val="3400"/>
-              </a:lnSpc>
-              <a:buNone/>
-            </a:pPr>
-            <a:r>
-              <a:rPr lang="en-US" sz="2400" dirty="0">
-                <a:solidFill>
-                  <a:srgbClr val="4FC3F7"/>
+              <a:buNone/>
+            </a:pPr>
+            <a:r>
+              <a:rPr lang="en-US" sz="4400" dirty="0">
+                <a:solidFill>
+                  <a:srgbClr val="000000"/>
+                </a:solidFill>
+                <a:latin typeface="Calibri" pitchFamily="34" charset="0"/>
+                <a:ea typeface="Calibri" pitchFamily="34" charset="-122"/>
+                <a:cs typeface="Calibri" pitchFamily="34" charset="-120"/>
+              </a:rPr>
+              <a:t>📦</a:t>
+            </a:r>
+            <a:endParaRPr lang="en-US" sz="4400" dirty="0"/>
+          </a:p>
+        </p:txBody>
+      </p:sp>
+      <p:sp>
+        <p:nvSpPr>
+          <p:cNvPr id="16" name="Text 14"/>
+          <p:cNvSpPr txBox="1"/>
+          <p:nvPr/>
+        </p:nvSpPr>
+        <p:spPr>
+          <a:xfrm>
+            <a:off x="2286000" y="2606040"/>
+            <a:ext cx="3108960" cy="548640"/>
+          </a:xfrm>
+          <a:prstGeom prst="rect">
+            <a:avLst/>
+          </a:prstGeom>
+          <a:noFill/>
+          <a:ln/>
+        </p:spPr>
+        <p:txBody>
+          <a:bodyPr wrap="square" lIns="0" tIns="0" rIns="0" bIns="0" rtlCol="0" anchor="t"/>
+          <a:lstStyle/>
+          <a:p>
+            <a:pPr indent="0" marL="0">
+              <a:buNone/>
+            </a:pPr>
+            <a:r>
+              <a:rPr lang="en-US" sz="3000" b="1" dirty="0">
+                <a:solidFill>
+                  <a:srgbClr val="A65D00"/>
                 </a:solidFill>
                 <a:latin typeface="Courier New" pitchFamily="34" charset="0"/>
                 <a:ea typeface="Courier New" pitchFamily="34" charset="-122"/>
                 <a:cs typeface="Courier New" pitchFamily="34" charset="-120"/>
               </a:rPr>
-              <a:t>print("nom")</a:t>
-            </a:r>
-            <a:endParaRPr lang="en-US" sz="2400" dirty="0"/>
-          </a:p>
-        </p:txBody>
-      </p:sp>
-      <p:sp>
-        <p:nvSpPr>
-          <p:cNvPr id="16" name="Text 14"/>
-          <p:cNvSpPr txBox="1"/>
-          <p:nvPr/>
-        </p:nvSpPr>
-        <p:spPr>
-          <a:xfrm>
-            <a:off x="640080" y="3291840"/>
-            <a:ext cx="5394960" cy="457200"/>
+              <a:t>nom</a:t>
+            </a:r>
+            <a:endParaRPr lang="en-US" sz="3000" dirty="0"/>
+          </a:p>
+        </p:txBody>
+      </p:sp>
+      <p:sp>
+        <p:nvSpPr>
+          <p:cNvPr id="17" name="Text 15"/>
+          <p:cNvSpPr txBox="1"/>
+          <p:nvPr/>
+        </p:nvSpPr>
+        <p:spPr>
+          <a:xfrm>
+            <a:off x="2286000" y="3154680"/>
+            <a:ext cx="3108960" cy="457200"/>
           </a:xfrm>
           <a:prstGeom prst="rect">
             <a:avLst/>
@@ -11608,7 +12481,7 @@
               <a:buNone/>
             </a:pPr>
             <a:r>
-              <a:rPr lang="en-US" sz="1900" b="1" dirty="0">
+              <a:rPr lang="en-US" sz="1400" dirty="0">
                 <a:solidFill>
                   <a:srgbClr val="5A5A72"/>
                 </a:solidFill>
@@ -11616,22 +12489,22 @@
                 <a:ea typeface="Calibri" pitchFamily="34" charset="-122"/>
                 <a:cs typeface="Calibri" pitchFamily="34" charset="-120"/>
               </a:rPr>
-              <a:t>→  affiche le MOT</a:t>
-            </a:r>
-            <a:endParaRPr lang="en-US" sz="1900" dirty="0"/>
-          </a:p>
-        </p:txBody>
-      </p:sp>
-      <p:sp>
-        <p:nvSpPr>
-          <p:cNvPr id="17" name="Text 15"/>
-          <p:cNvSpPr txBox="1"/>
-          <p:nvPr/>
-        </p:nvSpPr>
-        <p:spPr>
-          <a:xfrm>
-            <a:off x="640080" y="3749040"/>
-            <a:ext cx="5394960" cy="548640"/>
+              <a:t>l'étiquette collée sur la boîte</a:t>
+            </a:r>
+            <a:endParaRPr lang="en-US" sz="1400" dirty="0"/>
+          </a:p>
+        </p:txBody>
+      </p:sp>
+      <p:sp>
+        <p:nvSpPr>
+          <p:cNvPr id="18" name="Text 16"/>
+          <p:cNvSpPr txBox="1"/>
+          <p:nvPr/>
+        </p:nvSpPr>
+        <p:spPr>
+          <a:xfrm>
+            <a:off x="2286000" y="3611880"/>
+            <a:ext cx="3108960" cy="457200"/>
           </a:xfrm>
           <a:prstGeom prst="rect">
             <a:avLst/>
@@ -11647,7 +12520,7 @@
               <a:buNone/>
             </a:pPr>
             <a:r>
-              <a:rPr lang="en-US" sz="2600" b="1" dirty="0">
+              <a:rPr lang="en-US" sz="2000" b="1" dirty="0">
                 <a:solidFill>
                   <a:srgbClr val="14142B"/>
                 </a:solidFill>
@@ -11655,26 +12528,26 @@
                 <a:ea typeface="Courier New" pitchFamily="34" charset="-122"/>
                 <a:cs typeface="Courier New" pitchFamily="34" charset="-120"/>
               </a:rPr>
-              <a:t>nom</a:t>
-            </a:r>
-            <a:endParaRPr lang="en-US" sz="2600" dirty="0"/>
-          </a:p>
-        </p:txBody>
-      </p:sp>
-      <p:sp>
-        <p:nvSpPr>
-          <p:cNvPr id="18" name="Shape 16"/>
+              <a:t>"Damien"</a:t>
+            </a:r>
+            <a:endParaRPr lang="en-US" sz="2000" dirty="0"/>
+          </a:p>
+        </p:txBody>
+      </p:sp>
+      <p:sp>
+        <p:nvSpPr>
+          <p:cNvPr id="19" name="Shape 17"/>
           <p:cNvSpPr/>
           <p:nvPr/>
         </p:nvSpPr>
         <p:spPr>
           <a:xfrm>
             <a:off x="6492240" y="2194560"/>
-            <a:ext cx="5029200" cy="960120"/>
-          </a:xfrm>
-          <a:prstGeom prst="roundRect">
-            <a:avLst>
-              <a:gd name="adj" fmla="val 7619"/>
+            <a:ext cx="5029200" cy="2103120"/>
+          </a:xfrm>
+          <a:prstGeom prst="roundRect">
+            <a:avLst>
+              <a:gd name="adj" fmla="val 3478"/>
             </a:avLst>
           </a:prstGeom>
           <a:solidFill>
@@ -11685,14 +12558,14 @@
       </p:sp>
       <p:sp>
         <p:nvSpPr>
-          <p:cNvPr id="19" name="Text 17"/>
+          <p:cNvPr id="20" name="Text 18"/>
           <p:cNvSpPr txBox="1"/>
           <p:nvPr/>
         </p:nvSpPr>
         <p:spPr>
           <a:xfrm>
             <a:off x="6812280" y="2423160"/>
-            <a:ext cx="4389120" cy="502920"/>
+            <a:ext cx="4389120" cy="1645920"/>
           </a:xfrm>
           <a:prstGeom prst="rect">
             <a:avLst/>
@@ -11706,35 +12579,55 @@
           <a:p>
             <a:pPr indent="0" marL="0">
               <a:lnSpc>
-                <a:spcPts val="3400"/>
+                <a:spcPts val="4000"/>
               </a:lnSpc>
               <a:buNone/>
             </a:pPr>
             <a:r>
-              <a:rPr lang="en-US" sz="2400" dirty="0">
-                <a:solidFill>
-                  <a:srgbClr val="FFB74D"/>
+              <a:rPr lang="en-US" sz="2200" dirty="0">
+                <a:solidFill>
+                  <a:srgbClr val="4FC3F7"/>
                 </a:solidFill>
                 <a:latin typeface="Courier New" pitchFamily="34" charset="0"/>
                 <a:ea typeface="Courier New" pitchFamily="34" charset="-122"/>
                 <a:cs typeface="Courier New" pitchFamily="34" charset="-120"/>
               </a:rPr>
+              <a:t>nom = "Damien"</a:t>
+            </a:r>
+            <a:endParaRPr lang="en-US" sz="2200" dirty="0"/>
+          </a:p>
+          <a:p>
+            <a:pPr indent="0" marL="0">
+              <a:lnSpc>
+                <a:spcPts val="4000"/>
+              </a:lnSpc>
+              <a:buNone/>
+            </a:pPr>
+            <a:r>
+              <a:rPr lang="en-US" sz="2200" dirty="0">
+                <a:solidFill>
+                  <a:srgbClr val="4FC3F7"/>
+                </a:solidFill>
+                <a:latin typeface="Courier New" pitchFamily="34" charset="0"/>
+                <a:ea typeface="Courier New" pitchFamily="34" charset="-122"/>
+                <a:cs typeface="Courier New" pitchFamily="34" charset="-120"/>
+              </a:rPr>
               <a:t>print(nom)</a:t>
             </a:r>
-            <a:endParaRPr lang="en-US" sz="2400" dirty="0"/>
-          </a:p>
-        </p:txBody>
-      </p:sp>
-      <p:sp>
-        <p:nvSpPr>
-          <p:cNvPr id="20" name="Text 18"/>
-          <p:cNvSpPr txBox="1"/>
-          <p:nvPr/>
-        </p:nvSpPr>
-        <p:spPr>
-          <a:xfrm>
-            <a:off x="6492240" y="3291840"/>
-            <a:ext cx="5029200" cy="457200"/>
+            <a:endParaRPr lang="en-US" sz="2200" dirty="0"/>
+          </a:p>
+        </p:txBody>
+      </p:sp>
+      <p:sp>
+        <p:nvSpPr>
+          <p:cNvPr id="21" name="Text 19"/>
+          <p:cNvSpPr txBox="1"/>
+          <p:nvPr/>
+        </p:nvSpPr>
+        <p:spPr>
+          <a:xfrm>
+            <a:off x="640080" y="5440680"/>
+            <a:ext cx="10881360" cy="640080"/>
           </a:xfrm>
           <a:prstGeom prst="rect">
             <a:avLst/>
@@ -11750,93 +12643,15 @@
               <a:buNone/>
             </a:pPr>
             <a:r>
-              <a:rPr lang="en-US" sz="1900" b="1" dirty="0">
-                <a:solidFill>
-                  <a:srgbClr val="A65D00"/>
+              <a:rPr lang="en-US" sz="2100" b="1" dirty="0">
+                <a:solidFill>
+                  <a:srgbClr val="6B2D8F"/>
                 </a:solidFill>
                 <a:latin typeface="Calibri" pitchFamily="34" charset="0"/>
                 <a:ea typeface="Calibri" pitchFamily="34" charset="-122"/>
                 <a:cs typeface="Calibri" pitchFamily="34" charset="-120"/>
               </a:rPr>
-              <a:t>→  affiche CE QU'IL Y A DANS LA BOÎTE</a:t>
-            </a:r>
-            <a:endParaRPr lang="en-US" sz="1900" dirty="0"/>
-          </a:p>
-        </p:txBody>
-      </p:sp>
-      <p:sp>
-        <p:nvSpPr>
-          <p:cNvPr id="21" name="Text 19"/>
-          <p:cNvSpPr txBox="1"/>
-          <p:nvPr/>
-        </p:nvSpPr>
-        <p:spPr>
-          <a:xfrm>
-            <a:off x="6492240" y="3749040"/>
-            <a:ext cx="5029200" cy="548640"/>
-          </a:xfrm>
-          <a:prstGeom prst="rect">
-            <a:avLst/>
-          </a:prstGeom>
-          <a:noFill/>
-          <a:ln/>
-        </p:spPr>
-        <p:txBody>
-          <a:bodyPr wrap="square" lIns="0" tIns="0" rIns="0" bIns="0" rtlCol="0" anchor="t"/>
-          <a:lstStyle/>
-          <a:p>
-            <a:pPr indent="0" marL="0">
-              <a:buNone/>
-            </a:pPr>
-            <a:r>
-              <a:rPr lang="en-US" sz="2600" b="1" dirty="0">
-                <a:solidFill>
-                  <a:srgbClr val="14142B"/>
-                </a:solidFill>
-                <a:latin typeface="Courier New" pitchFamily="34" charset="0"/>
-                <a:ea typeface="Courier New" pitchFamily="34" charset="-122"/>
-                <a:cs typeface="Courier New" pitchFamily="34" charset="-120"/>
-              </a:rPr>
-              <a:t>Damien</a:t>
-            </a:r>
-            <a:endParaRPr lang="en-US" sz="2600" dirty="0"/>
-          </a:p>
-        </p:txBody>
-      </p:sp>
-      <p:sp>
-        <p:nvSpPr>
-          <p:cNvPr id="22" name="Text 20"/>
-          <p:cNvSpPr txBox="1"/>
-          <p:nvPr/>
-        </p:nvSpPr>
-        <p:spPr>
-          <a:xfrm>
-            <a:off x="640080" y="5440680"/>
-            <a:ext cx="10881360" cy="640080"/>
-          </a:xfrm>
-          <a:prstGeom prst="rect">
-            <a:avLst/>
-          </a:prstGeom>
-          <a:noFill/>
-          <a:ln/>
-        </p:spPr>
-        <p:txBody>
-          <a:bodyPr wrap="square" lIns="0" tIns="0" rIns="0" bIns="0" rtlCol="0" anchor="t"/>
-          <a:lstStyle/>
-          <a:p>
-            <a:pPr indent="0" marL="0">
-              <a:buNone/>
-            </a:pPr>
-            <a:r>
-              <a:rPr lang="en-US" sz="2100" b="1" dirty="0">
-                <a:solidFill>
-                  <a:srgbClr val="6B2D8F"/>
-                </a:solidFill>
-                <a:latin typeface="Calibri" pitchFamily="34" charset="0"/>
-                <a:ea typeface="Calibri" pitchFamily="34" charset="-122"/>
-                <a:cs typeface="Calibri" pitchFamily="34" charset="-120"/>
-              </a:rPr>
-              <a:t>Les guillemets veulent dire : « affiche exactement ça ».</a:t>
+              <a:t>Qu'est-ce qui va s'afficher :  nom,  ou  Damien  ?</a:t>
             </a:r>
             <a:endParaRPr lang="en-US" sz="2100" dirty="0"/>
           </a:p>
@@ -12162,7 +12977,7 @@
                 <a:ea typeface="Calibri" pitchFamily="34" charset="-122"/>
                 <a:cs typeface="Calibri" pitchFamily="34" charset="-120"/>
               </a:rPr>
-              <a:t>ET MAINTENANT, LE JOUEUR</a:t>
+              <a:t>TOUTE LA DIFFÉRENCE EST LÀ</a:t>
             </a:r>
             <a:endParaRPr lang="en-US" sz="1300" dirty="0"/>
           </a:p>
@@ -12204,7 +13019,7 @@
                 <a:ea typeface="Calibri" pitchFamily="34" charset="-122"/>
                 <a:cs typeface="Calibri" pitchFamily="34" charset="-120"/>
               </a:rPr>
-              <a:t>C'est LUI qui remplit la boîte.</a:t>
+              <a:t>Avec guillemets, ou sans.</a:t>
             </a:r>
             <a:endParaRPr lang="en-US" sz="4000" dirty="0"/>
           </a:p>
@@ -12219,11 +13034,11 @@
         <p:spPr>
           <a:xfrm>
             <a:off x="640080" y="2194560"/>
-            <a:ext cx="10881360" cy="1051560"/>
-          </a:xfrm>
-          <a:prstGeom prst="roundRect">
-            <a:avLst>
-              <a:gd name="adj" fmla="val 6957"/>
+            <a:ext cx="5394960" cy="960120"/>
+          </a:xfrm>
+          <a:prstGeom prst="roundRect">
+            <a:avLst>
+              <a:gd name="adj" fmla="val 7619"/>
             </a:avLst>
           </a:prstGeom>
           <a:solidFill>
@@ -12241,7 +13056,7 @@
         <p:spPr>
           <a:xfrm>
             <a:off x="960120" y="2423160"/>
-            <a:ext cx="10241280" cy="594360"/>
+            <a:ext cx="4754880" cy="502920"/>
           </a:xfrm>
           <a:prstGeom prst="rect">
             <a:avLst/>
@@ -12260,7 +13075,7 @@
               <a:buNone/>
             </a:pPr>
             <a:r>
-              <a:rPr lang="en-US" sz="2600" dirty="0">
+              <a:rPr lang="en-US" sz="2400" dirty="0">
                 <a:solidFill>
                   <a:srgbClr val="4FC3F7"/>
                 </a:solidFill>
@@ -12268,51 +13083,22 @@
                 <a:ea typeface="Courier New" pitchFamily="34" charset="-122"/>
                 <a:cs typeface="Courier New" pitchFamily="34" charset="-120"/>
               </a:rPr>
-              <a:t>nom = input("Comment t'appelles-tu ? ")</a:t>
-            </a:r>
-            <a:endParaRPr lang="en-US" sz="2600" dirty="0"/>
-          </a:p>
-        </p:txBody>
-      </p:sp>
-      <p:sp>
-        <p:nvSpPr>
-          <p:cNvPr id="16" name="Shape 14"/>
-          <p:cNvSpPr/>
-          <p:nvPr/>
-        </p:nvSpPr>
-        <p:spPr>
-          <a:xfrm>
-            <a:off x="640080" y="3474720"/>
-            <a:ext cx="3444240" cy="1737360"/>
-          </a:xfrm>
-          <a:prstGeom prst="roundRect">
-            <a:avLst>
-              <a:gd name="adj" fmla="val 4211"/>
-            </a:avLst>
-          </a:prstGeom>
-          <a:solidFill>
-            <a:srgbClr val="FFFFFF"/>
-          </a:solidFill>
-          <a:ln/>
-          <a:effectLst>
-            <a:outerShdw sx="100000" sy="100000" kx="0" ky="0" algn="bl" rotWithShape="0" blurRad="127000" dist="25400" dir="5400000">
-              <a:srgbClr val="20204A">
-                <a:alpha val="12000"/>
-              </a:srgbClr>
-            </a:outerShdw>
-          </a:effectLst>
-        </p:spPr>
-      </p:sp>
-      <p:sp>
-        <p:nvSpPr>
-          <p:cNvPr id="17" name="Text 15"/>
-          <p:cNvSpPr txBox="1"/>
-          <p:nvPr/>
-        </p:nvSpPr>
-        <p:spPr>
-          <a:xfrm>
-            <a:off x="868680" y="3730752"/>
-            <a:ext cx="2987040" cy="457200"/>
+              <a:t>print("nom")</a:t>
+            </a:r>
+            <a:endParaRPr lang="en-US" sz="2400" dirty="0"/>
+          </a:p>
+        </p:txBody>
+      </p:sp>
+      <p:sp>
+        <p:nvSpPr>
+          <p:cNvPr id="16" name="Text 14"/>
+          <p:cNvSpPr txBox="1"/>
+          <p:nvPr/>
+        </p:nvSpPr>
+        <p:spPr>
+          <a:xfrm>
+            <a:off x="640080" y="3291840"/>
+            <a:ext cx="5394960" cy="457200"/>
           </a:xfrm>
           <a:prstGeom prst="rect">
             <a:avLst/>
@@ -12328,30 +13114,91 @@
               <a:buNone/>
             </a:pPr>
             <a:r>
-              <a:rPr lang="en-US" sz="1800" b="1" dirty="0">
-                <a:solidFill>
-                  <a:srgbClr val="6B2D8F"/>
+              <a:rPr lang="en-US" sz="1900" b="1" dirty="0">
+                <a:solidFill>
+                  <a:srgbClr val="5A5A72"/>
                 </a:solidFill>
                 <a:latin typeface="Calibri" pitchFamily="34" charset="0"/>
                 <a:ea typeface="Calibri" pitchFamily="34" charset="-122"/>
                 <a:cs typeface="Calibri" pitchFamily="34" charset="-120"/>
               </a:rPr>
-              <a:t>input</a:t>
-            </a:r>
-            <a:endParaRPr lang="en-US" sz="1800" dirty="0"/>
-          </a:p>
-        </p:txBody>
-      </p:sp>
-      <p:sp>
-        <p:nvSpPr>
-          <p:cNvPr id="18" name="Text 16"/>
-          <p:cNvSpPr txBox="1"/>
-          <p:nvPr/>
-        </p:nvSpPr>
-        <p:spPr>
-          <a:xfrm>
-            <a:off x="868680" y="4261104"/>
-            <a:ext cx="2987040" cy="777240"/>
+              <a:t>→  affiche le MOT</a:t>
+            </a:r>
+            <a:endParaRPr lang="en-US" sz="1900" dirty="0"/>
+          </a:p>
+        </p:txBody>
+      </p:sp>
+      <p:sp>
+        <p:nvSpPr>
+          <p:cNvPr id="17" name="Text 15"/>
+          <p:cNvSpPr txBox="1"/>
+          <p:nvPr/>
+        </p:nvSpPr>
+        <p:spPr>
+          <a:xfrm>
+            <a:off x="640080" y="3749040"/>
+            <a:ext cx="5394960" cy="548640"/>
+          </a:xfrm>
+          <a:prstGeom prst="rect">
+            <a:avLst/>
+          </a:prstGeom>
+          <a:noFill/>
+          <a:ln/>
+        </p:spPr>
+        <p:txBody>
+          <a:bodyPr wrap="square" lIns="0" tIns="0" rIns="0" bIns="0" rtlCol="0" anchor="t"/>
+          <a:lstStyle/>
+          <a:p>
+            <a:pPr indent="0" marL="0">
+              <a:buNone/>
+            </a:pPr>
+            <a:r>
+              <a:rPr lang="en-US" sz="2600" b="1" dirty="0">
+                <a:solidFill>
+                  <a:srgbClr val="14142B"/>
+                </a:solidFill>
+                <a:latin typeface="Courier New" pitchFamily="34" charset="0"/>
+                <a:ea typeface="Courier New" pitchFamily="34" charset="-122"/>
+                <a:cs typeface="Courier New" pitchFamily="34" charset="-120"/>
+              </a:rPr>
+              <a:t>nom</a:t>
+            </a:r>
+            <a:endParaRPr lang="en-US" sz="2600" dirty="0"/>
+          </a:p>
+        </p:txBody>
+      </p:sp>
+      <p:sp>
+        <p:nvSpPr>
+          <p:cNvPr id="18" name="Shape 16"/>
+          <p:cNvSpPr/>
+          <p:nvPr/>
+        </p:nvSpPr>
+        <p:spPr>
+          <a:xfrm>
+            <a:off x="6492240" y="2194560"/>
+            <a:ext cx="5029200" cy="960120"/>
+          </a:xfrm>
+          <a:prstGeom prst="roundRect">
+            <a:avLst>
+              <a:gd name="adj" fmla="val 7619"/>
+            </a:avLst>
+          </a:prstGeom>
+          <a:solidFill>
+            <a:srgbClr val="12122A"/>
+          </a:solidFill>
+          <a:ln/>
+        </p:spPr>
+      </p:sp>
+      <p:sp>
+        <p:nvSpPr>
+          <p:cNvPr id="19" name="Text 17"/>
+          <p:cNvSpPr txBox="1"/>
+          <p:nvPr/>
+        </p:nvSpPr>
+        <p:spPr>
+          <a:xfrm>
+            <a:off x="6812280" y="2423160"/>
+            <a:ext cx="4389120" cy="502920"/>
           </a:xfrm>
           <a:prstGeom prst="rect">
             <a:avLst/>
@@ -12365,64 +13212,74 @@
           <a:p>
             <a:pPr indent="0" marL="0">
               <a:lnSpc>
-                <a:spcPts val="2000"/>
+                <a:spcPts val="3400"/>
               </a:lnSpc>
               <a:buNone/>
             </a:pPr>
             <a:r>
-              <a:rPr lang="en-US" sz="1400" dirty="0">
-                <a:solidFill>
-                  <a:srgbClr val="5A5A72"/>
+              <a:rPr lang="en-US" sz="2400" dirty="0">
+                <a:solidFill>
+                  <a:srgbClr val="FFB74D"/>
+                </a:solidFill>
+                <a:latin typeface="Courier New" pitchFamily="34" charset="0"/>
+                <a:ea typeface="Courier New" pitchFamily="34" charset="-122"/>
+                <a:cs typeface="Courier New" pitchFamily="34" charset="-120"/>
+              </a:rPr>
+              <a:t>print(nom)</a:t>
+            </a:r>
+            <a:endParaRPr lang="en-US" sz="2400" dirty="0"/>
+          </a:p>
+        </p:txBody>
+      </p:sp>
+      <p:sp>
+        <p:nvSpPr>
+          <p:cNvPr id="20" name="Text 18"/>
+          <p:cNvSpPr txBox="1"/>
+          <p:nvPr/>
+        </p:nvSpPr>
+        <p:spPr>
+          <a:xfrm>
+            <a:off x="6492240" y="3291840"/>
+            <a:ext cx="5029200" cy="457200"/>
+          </a:xfrm>
+          <a:prstGeom prst="rect">
+            <a:avLst/>
+          </a:prstGeom>
+          <a:noFill/>
+          <a:ln/>
+        </p:spPr>
+        <p:txBody>
+          <a:bodyPr wrap="square" lIns="0" tIns="0" rIns="0" bIns="0" rtlCol="0" anchor="t"/>
+          <a:lstStyle/>
+          <a:p>
+            <a:pPr indent="0" marL="0">
+              <a:buNone/>
+            </a:pPr>
+            <a:r>
+              <a:rPr lang="en-US" sz="1900" b="1" dirty="0">
+                <a:solidFill>
+                  <a:srgbClr val="A65D00"/>
                 </a:solidFill>
                 <a:latin typeface="Calibri" pitchFamily="34" charset="0"/>
                 <a:ea typeface="Calibri" pitchFamily="34" charset="-122"/>
                 <a:cs typeface="Calibri" pitchFamily="34" charset="-120"/>
               </a:rPr>
-              <a:t>Ça veut dire DEMANDE. Le programme s'arrête et il attend.</a:t>
-            </a:r>
-            <a:endParaRPr lang="en-US" sz="1400" dirty="0"/>
-          </a:p>
-        </p:txBody>
-      </p:sp>
-      <p:sp>
-        <p:nvSpPr>
-          <p:cNvPr id="19" name="Shape 17"/>
-          <p:cNvSpPr/>
-          <p:nvPr/>
-        </p:nvSpPr>
-        <p:spPr>
-          <a:xfrm>
-            <a:off x="4358640" y="3474720"/>
-            <a:ext cx="3444240" cy="1737360"/>
-          </a:xfrm>
-          <a:prstGeom prst="roundRect">
-            <a:avLst>
-              <a:gd name="adj" fmla="val 4211"/>
-            </a:avLst>
-          </a:prstGeom>
-          <a:solidFill>
-            <a:srgbClr val="FFFFFF"/>
-          </a:solidFill>
-          <a:ln/>
-          <a:effectLst>
-            <a:outerShdw sx="100000" sy="100000" kx="0" ky="0" algn="bl" rotWithShape="0" blurRad="127000" dist="25400" dir="5400000">
-              <a:srgbClr val="20204A">
-                <a:alpha val="12000"/>
-              </a:srgbClr>
-            </a:outerShdw>
-          </a:effectLst>
-        </p:spPr>
-      </p:sp>
-      <p:sp>
-        <p:nvSpPr>
-          <p:cNvPr id="20" name="Text 18"/>
-          <p:cNvSpPr txBox="1"/>
-          <p:nvPr/>
-        </p:nvSpPr>
-        <p:spPr>
-          <a:xfrm>
-            <a:off x="4587240" y="3730752"/>
-            <a:ext cx="2987040" cy="457200"/>
+              <a:t>→  affiche CE QU'IL Y A DANS LA BOÎTE</a:t>
+            </a:r>
+            <a:endParaRPr lang="en-US" sz="1900" dirty="0"/>
+          </a:p>
+        </p:txBody>
+      </p:sp>
+      <p:sp>
+        <p:nvSpPr>
+          <p:cNvPr id="21" name="Text 19"/>
+          <p:cNvSpPr txBox="1"/>
+          <p:nvPr/>
+        </p:nvSpPr>
+        <p:spPr>
+          <a:xfrm>
+            <a:off x="6492240" y="3749040"/>
+            <a:ext cx="5029200" cy="548640"/>
           </a:xfrm>
           <a:prstGeom prst="rect">
             <a:avLst/>
@@ -12438,169 +13295,56 @@
               <a:buNone/>
             </a:pPr>
             <a:r>
-              <a:rPr lang="en-US" sz="1800" b="1" dirty="0">
-                <a:solidFill>
-                  <a:srgbClr val="5A5A72"/>
+              <a:rPr lang="en-US" sz="2600" b="1" dirty="0">
+                <a:solidFill>
+                  <a:srgbClr val="14142B"/>
+                </a:solidFill>
+                <a:latin typeface="Courier New" pitchFamily="34" charset="0"/>
+                <a:ea typeface="Courier New" pitchFamily="34" charset="-122"/>
+                <a:cs typeface="Courier New" pitchFamily="34" charset="-120"/>
+              </a:rPr>
+              <a:t>Damien</a:t>
+            </a:r>
+            <a:endParaRPr lang="en-US" sz="2600" dirty="0"/>
+          </a:p>
+        </p:txBody>
+      </p:sp>
+      <p:sp>
+        <p:nvSpPr>
+          <p:cNvPr id="22" name="Text 20"/>
+          <p:cNvSpPr txBox="1"/>
+          <p:nvPr/>
+        </p:nvSpPr>
+        <p:spPr>
+          <a:xfrm>
+            <a:off x="640080" y="5440680"/>
+            <a:ext cx="10881360" cy="640080"/>
+          </a:xfrm>
+          <a:prstGeom prst="rect">
+            <a:avLst/>
+          </a:prstGeom>
+          <a:noFill/>
+          <a:ln/>
+        </p:spPr>
+        <p:txBody>
+          <a:bodyPr wrap="square" lIns="0" tIns="0" rIns="0" bIns="0" rtlCol="0" anchor="t"/>
+          <a:lstStyle/>
+          <a:p>
+            <a:pPr indent="0" marL="0">
+              <a:buNone/>
+            </a:pPr>
+            <a:r>
+              <a:rPr lang="en-US" sz="2100" b="1" dirty="0">
+                <a:solidFill>
+                  <a:srgbClr val="6B2D8F"/>
                 </a:solidFill>
                 <a:latin typeface="Calibri" pitchFamily="34" charset="0"/>
                 <a:ea typeface="Calibri" pitchFamily="34" charset="-122"/>
                 <a:cs typeface="Calibri" pitchFamily="34" charset="-120"/>
               </a:rPr>
-              <a:t>Le joueur tape</a:t>
-            </a:r>
-            <a:endParaRPr lang="en-US" sz="1800" dirty="0"/>
-          </a:p>
-        </p:txBody>
-      </p:sp>
-      <p:sp>
-        <p:nvSpPr>
-          <p:cNvPr id="21" name="Text 19"/>
-          <p:cNvSpPr txBox="1"/>
-          <p:nvPr/>
-        </p:nvSpPr>
-        <p:spPr>
-          <a:xfrm>
-            <a:off x="4587240" y="4261104"/>
-            <a:ext cx="2987040" cy="777240"/>
-          </a:xfrm>
-          <a:prstGeom prst="rect">
-            <a:avLst/>
-          </a:prstGeom>
-          <a:noFill/>
-          <a:ln/>
-        </p:spPr>
-        <p:txBody>
-          <a:bodyPr wrap="square" lIns="0" tIns="0" rIns="0" bIns="0" rtlCol="0" anchor="t"/>
-          <a:lstStyle/>
-          <a:p>
-            <a:pPr indent="0" marL="0">
-              <a:lnSpc>
-                <a:spcPts val="2000"/>
-              </a:lnSpc>
-              <a:buNone/>
-            </a:pPr>
-            <a:r>
-              <a:rPr lang="en-US" sz="1400" dirty="0">
-                <a:solidFill>
-                  <a:srgbClr val="5A5A72"/>
-                </a:solidFill>
-                <a:latin typeface="Calibri" pitchFamily="34" charset="0"/>
-                <a:ea typeface="Calibri" pitchFamily="34" charset="-122"/>
-                <a:cs typeface="Calibri" pitchFamily="34" charset="-120"/>
-              </a:rPr>
-              <a:t>Sa réponse s'écrit dans la zone grise du bas.</a:t>
-            </a:r>
-            <a:endParaRPr lang="en-US" sz="1400" dirty="0"/>
-          </a:p>
-        </p:txBody>
-      </p:sp>
-      <p:sp>
-        <p:nvSpPr>
-          <p:cNvPr id="22" name="Shape 20"/>
-          <p:cNvSpPr/>
-          <p:nvPr/>
-        </p:nvSpPr>
-        <p:spPr>
-          <a:xfrm>
-            <a:off x="8077200" y="3474720"/>
-            <a:ext cx="3444240" cy="1737360"/>
-          </a:xfrm>
-          <a:prstGeom prst="roundRect">
-            <a:avLst>
-              <a:gd name="adj" fmla="val 4211"/>
-            </a:avLst>
-          </a:prstGeom>
-          <a:solidFill>
-            <a:srgbClr val="FFFFFF"/>
-          </a:solidFill>
-          <a:ln/>
-          <a:effectLst>
-            <a:outerShdw sx="100000" sy="100000" kx="0" ky="0" algn="bl" rotWithShape="0" blurRad="127000" dist="25400" dir="5400000">
-              <a:srgbClr val="20204A">
-                <a:alpha val="12000"/>
-              </a:srgbClr>
-            </a:outerShdw>
-          </a:effectLst>
-        </p:spPr>
-      </p:sp>
-      <p:sp>
-        <p:nvSpPr>
-          <p:cNvPr id="23" name="Text 21"/>
-          <p:cNvSpPr txBox="1"/>
-          <p:nvPr/>
-        </p:nvSpPr>
-        <p:spPr>
-          <a:xfrm>
-            <a:off x="8305800" y="3730752"/>
-            <a:ext cx="2987040" cy="457200"/>
-          </a:xfrm>
-          <a:prstGeom prst="rect">
-            <a:avLst/>
-          </a:prstGeom>
-          <a:noFill/>
-          <a:ln/>
-        </p:spPr>
-        <p:txBody>
-          <a:bodyPr wrap="square" lIns="0" tIns="0" rIns="0" bIns="0" rtlCol="0" anchor="t"/>
-          <a:lstStyle/>
-          <a:p>
-            <a:pPr indent="0" marL="0">
-              <a:buNone/>
-            </a:pPr>
-            <a:r>
-              <a:rPr lang="en-US" sz="1800" b="1" dirty="0">
-                <a:solidFill>
-                  <a:srgbClr val="0C5C29"/>
-                </a:solidFill>
-                <a:latin typeface="Calibri" pitchFamily="34" charset="0"/>
-                <a:ea typeface="Calibri" pitchFamily="34" charset="-122"/>
-                <a:cs typeface="Calibri" pitchFamily="34" charset="-120"/>
-              </a:rPr>
-              <a:t>Et hop, dans la boîte</a:t>
-            </a:r>
-            <a:endParaRPr lang="en-US" sz="1800" dirty="0"/>
-          </a:p>
-        </p:txBody>
-      </p:sp>
-      <p:sp>
-        <p:nvSpPr>
-          <p:cNvPr id="24" name="Text 22"/>
-          <p:cNvSpPr txBox="1"/>
-          <p:nvPr/>
-        </p:nvSpPr>
-        <p:spPr>
-          <a:xfrm>
-            <a:off x="8305800" y="4261104"/>
-            <a:ext cx="2987040" cy="777240"/>
-          </a:xfrm>
-          <a:prstGeom prst="rect">
-            <a:avLst/>
-          </a:prstGeom>
-          <a:noFill/>
-          <a:ln/>
-        </p:spPr>
-        <p:txBody>
-          <a:bodyPr wrap="square" lIns="0" tIns="0" rIns="0" bIns="0" rtlCol="0" anchor="t"/>
-          <a:lstStyle/>
-          <a:p>
-            <a:pPr indent="0" marL="0">
-              <a:lnSpc>
-                <a:spcPts val="2000"/>
-              </a:lnSpc>
-              <a:buNone/>
-            </a:pPr>
-            <a:r>
-              <a:rPr lang="en-US" sz="1400" dirty="0">
-                <a:solidFill>
-                  <a:srgbClr val="5A5A72"/>
-                </a:solidFill>
-                <a:latin typeface="Calibri" pitchFamily="34" charset="0"/>
-                <a:ea typeface="Calibri" pitchFamily="34" charset="-122"/>
-                <a:cs typeface="Calibri" pitchFamily="34" charset="-120"/>
-              </a:rPr>
-              <a:t>Ce qu'il a tapé est rangé dans nom. Le programme repart.</a:t>
-            </a:r>
-            <a:endParaRPr lang="en-US" sz="1400" dirty="0"/>
+              <a:t>Les guillemets veulent dire : « affiche exactement ça ».</a:t>
+            </a:r>
+            <a:endParaRPr lang="en-US" sz="2100" dirty="0"/>
           </a:p>
         </p:txBody>
       </p:sp>
@@ -12924,7 +13668,7 @@
                 <a:ea typeface="Calibri" pitchFamily="34" charset="-122"/>
                 <a:cs typeface="Calibri" pitchFamily="34" charset="-120"/>
               </a:rPr>
-              <a:t>COLLER DU TEXTE ET UNE BOÎTE</a:t>
+              <a:t>ET MAINTENANT, LE JOUEUR</a:t>
             </a:r>
             <a:endParaRPr lang="en-US" sz="1300" dirty="0"/>
           </a:p>
@@ -12966,7 +13710,7 @@
                 <a:ea typeface="Calibri" pitchFamily="34" charset="-122"/>
                 <a:cs typeface="Calibri" pitchFamily="34" charset="-120"/>
               </a:rPr>
-              <a:t>Le +  met les morceaux bout à bout.</a:t>
+              <a:t>C'est LUI qui remplit la boîte.</a:t>
             </a:r>
             <a:endParaRPr lang="en-US" sz="4000" dirty="0"/>
           </a:p>
@@ -13030,7 +13774,7 @@
                 <a:ea typeface="Courier New" pitchFamily="34" charset="-122"/>
                 <a:cs typeface="Courier New" pitchFamily="34" charset="-120"/>
               </a:rPr>
-              <a:t>print("Bonjour " + nom + " !")</a:t>
+              <a:t>nom = input("Comment t'appelles-tu ? ")</a:t>
             </a:r>
             <a:endParaRPr lang="en-US" sz="2600" dirty="0"/>
           </a:p>
@@ -13044,23 +13788,18 @@
         </p:nvSpPr>
         <p:spPr>
           <a:xfrm>
-            <a:off x="640080" y="3566160"/>
-            <a:ext cx="5303520" cy="1371600"/>
-          </a:xfrm>
-          <a:prstGeom prst="roundRect">
-            <a:avLst>
-              <a:gd name="adj" fmla="val 5333"/>
-            </a:avLst>
-          </a:prstGeom>
-          <a:solidFill>
-            <a:srgbClr val="EAF7EF"/>
-          </a:solidFill>
-          <a:ln w="19050">
-            <a:solidFill>
-              <a:srgbClr val="2FB765"/>
-            </a:solidFill>
-            <a:prstDash val="solid"/>
-          </a:ln>
+            <a:off x="640080" y="3474720"/>
+            <a:ext cx="3444240" cy="1737360"/>
+          </a:xfrm>
+          <a:prstGeom prst="roundRect">
+            <a:avLst>
+              <a:gd name="adj" fmla="val 4211"/>
+            </a:avLst>
+          </a:prstGeom>
+          <a:solidFill>
+            <a:srgbClr val="FFFFFF"/>
+          </a:solidFill>
+          <a:ln/>
           <a:effectLst>
             <a:outerShdw sx="100000" sy="100000" kx="0" ky="0" algn="bl" rotWithShape="0" blurRad="127000" dist="25400" dir="5400000">
               <a:srgbClr val="20204A">
@@ -13078,8 +13817,8 @@
         </p:nvSpPr>
         <p:spPr>
           <a:xfrm>
-            <a:off x="914400" y="3977640"/>
-            <a:ext cx="4754880" cy="548640"/>
+            <a:off x="868680" y="3730752"/>
+            <a:ext cx="2987040" cy="457200"/>
           </a:xfrm>
           <a:prstGeom prst="rect">
             <a:avLst/>
@@ -13095,45 +13834,82 @@
               <a:buNone/>
             </a:pPr>
             <a:r>
-              <a:rPr lang="en-US" sz="2400" b="1" dirty="0">
-                <a:solidFill>
-                  <a:srgbClr val="0C5C29"/>
-                </a:solidFill>
-                <a:latin typeface="Courier New" pitchFamily="34" charset="0"/>
-                <a:ea typeface="Courier New" pitchFamily="34" charset="-122"/>
-                <a:cs typeface="Courier New" pitchFamily="34" charset="-120"/>
-              </a:rPr>
-              <a:t>Bonjour Damien !</a:t>
-            </a:r>
-            <a:endParaRPr lang="en-US" sz="2400" dirty="0"/>
-          </a:p>
-        </p:txBody>
-      </p:sp>
-      <p:sp>
-        <p:nvSpPr>
-          <p:cNvPr id="18" name="Shape 16"/>
-          <p:cNvSpPr/>
-          <p:nvPr/>
-        </p:nvSpPr>
-        <p:spPr>
-          <a:xfrm>
-            <a:off x="6400800" y="3566160"/>
-            <a:ext cx="5120640" cy="1371600"/>
-          </a:xfrm>
-          <a:prstGeom prst="roundRect">
-            <a:avLst>
-              <a:gd name="adj" fmla="val 5333"/>
-            </a:avLst>
-          </a:prstGeom>
-          <a:solidFill>
-            <a:srgbClr val="FDEDED"/>
-          </a:solidFill>
-          <a:ln w="19050">
-            <a:solidFill>
-              <a:srgbClr val="FF6B6B"/>
-            </a:solidFill>
-            <a:prstDash val="solid"/>
-          </a:ln>
+              <a:rPr lang="en-US" sz="1800" b="1" dirty="0">
+                <a:solidFill>
+                  <a:srgbClr val="6B2D8F"/>
+                </a:solidFill>
+                <a:latin typeface="Calibri" pitchFamily="34" charset="0"/>
+                <a:ea typeface="Calibri" pitchFamily="34" charset="-122"/>
+                <a:cs typeface="Calibri" pitchFamily="34" charset="-120"/>
+              </a:rPr>
+              <a:t>input</a:t>
+            </a:r>
+            <a:endParaRPr lang="en-US" sz="1800" dirty="0"/>
+          </a:p>
+        </p:txBody>
+      </p:sp>
+      <p:sp>
+        <p:nvSpPr>
+          <p:cNvPr id="18" name="Text 16"/>
+          <p:cNvSpPr txBox="1"/>
+          <p:nvPr/>
+        </p:nvSpPr>
+        <p:spPr>
+          <a:xfrm>
+            <a:off x="868680" y="4261104"/>
+            <a:ext cx="2987040" cy="777240"/>
+          </a:xfrm>
+          <a:prstGeom prst="rect">
+            <a:avLst/>
+          </a:prstGeom>
+          <a:noFill/>
+          <a:ln/>
+        </p:spPr>
+        <p:txBody>
+          <a:bodyPr wrap="square" lIns="0" tIns="0" rIns="0" bIns="0" rtlCol="0" anchor="t"/>
+          <a:lstStyle/>
+          <a:p>
+            <a:pPr indent="0" marL="0">
+              <a:lnSpc>
+                <a:spcPts val="2000"/>
+              </a:lnSpc>
+              <a:buNone/>
+            </a:pPr>
+            <a:r>
+              <a:rPr lang="en-US" sz="1400" dirty="0">
+                <a:solidFill>
+                  <a:srgbClr val="5A5A72"/>
+                </a:solidFill>
+                <a:latin typeface="Calibri" pitchFamily="34" charset="0"/>
+                <a:ea typeface="Calibri" pitchFamily="34" charset="-122"/>
+                <a:cs typeface="Calibri" pitchFamily="34" charset="-120"/>
+              </a:rPr>
+              <a:t>Ça veut dire DEMANDE. Le programme s'arrête et il attend.</a:t>
+            </a:r>
+            <a:endParaRPr lang="en-US" sz="1400" dirty="0"/>
+          </a:p>
+        </p:txBody>
+      </p:sp>
+      <p:sp>
+        <p:nvSpPr>
+          <p:cNvPr id="19" name="Shape 17"/>
+          <p:cNvSpPr/>
+          <p:nvPr/>
+        </p:nvSpPr>
+        <p:spPr>
+          <a:xfrm>
+            <a:off x="4358640" y="3474720"/>
+            <a:ext cx="3444240" cy="1737360"/>
+          </a:xfrm>
+          <a:prstGeom prst="roundRect">
+            <a:avLst>
+              <a:gd name="adj" fmla="val 4211"/>
+            </a:avLst>
+          </a:prstGeom>
+          <a:solidFill>
+            <a:srgbClr val="FFFFFF"/>
+          </a:solidFill>
+          <a:ln/>
           <a:effectLst>
             <a:outerShdw sx="100000" sy="100000" kx="0" ky="0" algn="bl" rotWithShape="0" blurRad="127000" dist="25400" dir="5400000">
               <a:srgbClr val="20204A">
@@ -13145,14 +13921,14 @@
       </p:sp>
       <p:sp>
         <p:nvSpPr>
-          <p:cNvPr id="19" name="Text 17"/>
-          <p:cNvSpPr txBox="1"/>
-          <p:nvPr/>
-        </p:nvSpPr>
-        <p:spPr>
-          <a:xfrm>
-            <a:off x="6675120" y="3977640"/>
-            <a:ext cx="4572000" cy="548640"/>
+          <p:cNvPr id="20" name="Text 18"/>
+          <p:cNvSpPr txBox="1"/>
+          <p:nvPr/>
+        </p:nvSpPr>
+        <p:spPr>
+          <a:xfrm>
+            <a:off x="4587240" y="3730752"/>
+            <a:ext cx="2987040" cy="457200"/>
           </a:xfrm>
           <a:prstGeom prst="rect">
             <a:avLst/>
@@ -13168,46 +13944,7 @@
               <a:buNone/>
             </a:pPr>
             <a:r>
-              <a:rPr lang="en-US" sz="2400" b="1" dirty="0">
-                <a:solidFill>
-                  <a:srgbClr val="B01B20"/>
-                </a:solidFill>
-                <a:latin typeface="Courier New" pitchFamily="34" charset="0"/>
-                <a:ea typeface="Courier New" pitchFamily="34" charset="-122"/>
-                <a:cs typeface="Courier New" pitchFamily="34" charset="-120"/>
-              </a:rPr>
-              <a:t>BonjourDamien !</a:t>
-            </a:r>
-            <a:endParaRPr lang="en-US" sz="2400" dirty="0"/>
-          </a:p>
-        </p:txBody>
-      </p:sp>
-      <p:sp>
-        <p:nvSpPr>
-          <p:cNvPr id="20" name="Text 18"/>
-          <p:cNvSpPr txBox="1"/>
-          <p:nvPr/>
-        </p:nvSpPr>
-        <p:spPr>
-          <a:xfrm>
-            <a:off x="914400" y="5029200"/>
-            <a:ext cx="5029200" cy="365760"/>
-          </a:xfrm>
-          <a:prstGeom prst="rect">
-            <a:avLst/>
-          </a:prstGeom>
-          <a:noFill/>
-          <a:ln/>
-        </p:spPr>
-        <p:txBody>
-          <a:bodyPr wrap="square" lIns="0" tIns="0" rIns="0" bIns="0" rtlCol="0" anchor="t"/>
-          <a:lstStyle/>
-          <a:p>
-            <a:pPr indent="0" marL="0">
-              <a:buNone/>
-            </a:pPr>
-            <a:r>
-              <a:rPr lang="en-US" sz="1400" dirty="0">
+              <a:rPr lang="en-US" sz="1800" b="1" dirty="0">
                 <a:solidFill>
                   <a:srgbClr val="5A5A72"/>
                 </a:solidFill>
@@ -13215,9 +13952,9 @@
                 <a:ea typeface="Calibri" pitchFamily="34" charset="-122"/>
                 <a:cs typeface="Calibri" pitchFamily="34" charset="-120"/>
               </a:rPr>
-              <a:t>← avec l'espace après Bonjour</a:t>
-            </a:r>
-            <a:endParaRPr lang="en-US" sz="1400" dirty="0"/>
+              <a:t>Le joueur tape</a:t>
+            </a:r>
+            <a:endParaRPr lang="en-US" sz="1800" dirty="0"/>
           </a:p>
         </p:txBody>
       </p:sp>
@@ -13229,8 +13966,8 @@
         </p:nvSpPr>
         <p:spPr>
           <a:xfrm>
-            <a:off x="6675120" y="5029200"/>
-            <a:ext cx="4754880" cy="365760"/>
+            <a:off x="4587240" y="4261104"/>
+            <a:ext cx="2987040" cy="777240"/>
           </a:xfrm>
           <a:prstGeom prst="rect">
             <a:avLst/>
@@ -13243,6 +13980,9 @@
           <a:lstStyle/>
           <a:p>
             <a:pPr indent="0" marL="0">
+              <a:lnSpc>
+                <a:spcPts val="2000"/>
+              </a:lnSpc>
               <a:buNone/>
             </a:pPr>
             <a:r>
@@ -13254,7 +13994,117 @@
                 <a:ea typeface="Calibri" pitchFamily="34" charset="-122"/>
                 <a:cs typeface="Calibri" pitchFamily="34" charset="-120"/>
               </a:rPr>
-              <a:t>← sans l'espace : il colle tout</a:t>
+              <a:t>Sa réponse s'écrit dans la zone grise du bas.</a:t>
+            </a:r>
+            <a:endParaRPr lang="en-US" sz="1400" dirty="0"/>
+          </a:p>
+        </p:txBody>
+      </p:sp>
+      <p:sp>
+        <p:nvSpPr>
+          <p:cNvPr id="22" name="Shape 20"/>
+          <p:cNvSpPr/>
+          <p:nvPr/>
+        </p:nvSpPr>
+        <p:spPr>
+          <a:xfrm>
+            <a:off x="8077200" y="3474720"/>
+            <a:ext cx="3444240" cy="1737360"/>
+          </a:xfrm>
+          <a:prstGeom prst="roundRect">
+            <a:avLst>
+              <a:gd name="adj" fmla="val 4211"/>
+            </a:avLst>
+          </a:prstGeom>
+          <a:solidFill>
+            <a:srgbClr val="FFFFFF"/>
+          </a:solidFill>
+          <a:ln/>
+          <a:effectLst>
+            <a:outerShdw sx="100000" sy="100000" kx="0" ky="0" algn="bl" rotWithShape="0" blurRad="127000" dist="25400" dir="5400000">
+              <a:srgbClr val="20204A">
+                <a:alpha val="12000"/>
+              </a:srgbClr>
+            </a:outerShdw>
+          </a:effectLst>
+        </p:spPr>
+      </p:sp>
+      <p:sp>
+        <p:nvSpPr>
+          <p:cNvPr id="23" name="Text 21"/>
+          <p:cNvSpPr txBox="1"/>
+          <p:nvPr/>
+        </p:nvSpPr>
+        <p:spPr>
+          <a:xfrm>
+            <a:off x="8305800" y="3730752"/>
+            <a:ext cx="2987040" cy="457200"/>
+          </a:xfrm>
+          <a:prstGeom prst="rect">
+            <a:avLst/>
+          </a:prstGeom>
+          <a:noFill/>
+          <a:ln/>
+        </p:spPr>
+        <p:txBody>
+          <a:bodyPr wrap="square" lIns="0" tIns="0" rIns="0" bIns="0" rtlCol="0" anchor="t"/>
+          <a:lstStyle/>
+          <a:p>
+            <a:pPr indent="0" marL="0">
+              <a:buNone/>
+            </a:pPr>
+            <a:r>
+              <a:rPr lang="en-US" sz="1800" b="1" dirty="0">
+                <a:solidFill>
+                  <a:srgbClr val="0C5C29"/>
+                </a:solidFill>
+                <a:latin typeface="Calibri" pitchFamily="34" charset="0"/>
+                <a:ea typeface="Calibri" pitchFamily="34" charset="-122"/>
+                <a:cs typeface="Calibri" pitchFamily="34" charset="-120"/>
+              </a:rPr>
+              <a:t>Et hop, dans la boîte</a:t>
+            </a:r>
+            <a:endParaRPr lang="en-US" sz="1800" dirty="0"/>
+          </a:p>
+        </p:txBody>
+      </p:sp>
+      <p:sp>
+        <p:nvSpPr>
+          <p:cNvPr id="24" name="Text 22"/>
+          <p:cNvSpPr txBox="1"/>
+          <p:nvPr/>
+        </p:nvSpPr>
+        <p:spPr>
+          <a:xfrm>
+            <a:off x="8305800" y="4261104"/>
+            <a:ext cx="2987040" cy="777240"/>
+          </a:xfrm>
+          <a:prstGeom prst="rect">
+            <a:avLst/>
+          </a:prstGeom>
+          <a:noFill/>
+          <a:ln/>
+        </p:spPr>
+        <p:txBody>
+          <a:bodyPr wrap="square" lIns="0" tIns="0" rIns="0" bIns="0" rtlCol="0" anchor="t"/>
+          <a:lstStyle/>
+          <a:p>
+            <a:pPr indent="0" marL="0">
+              <a:lnSpc>
+                <a:spcPts val="2000"/>
+              </a:lnSpc>
+              <a:buNone/>
+            </a:pPr>
+            <a:r>
+              <a:rPr lang="en-US" sz="1400" dirty="0">
+                <a:solidFill>
+                  <a:srgbClr val="5A5A72"/>
+                </a:solidFill>
+                <a:latin typeface="Calibri" pitchFamily="34" charset="0"/>
+                <a:ea typeface="Calibri" pitchFamily="34" charset="-122"/>
+                <a:cs typeface="Calibri" pitchFamily="34" charset="-120"/>
+              </a:rPr>
+              <a:t>Ce qu'il a tapé est rangé dans nom. Le programme repart.</a:t>
             </a:r>
             <a:endParaRPr lang="en-US" sz="1400" dirty="0"/>
           </a:p>
@@ -13574,13 +14424,13 @@
             <a:r>
               <a:rPr lang="en-US" sz="1300" b="1" spc="300" kern="0" dirty="0">
                 <a:solidFill>
-                  <a:srgbClr val="0C5C29"/>
+                  <a:srgbClr val="6B2D8F"/>
                 </a:solidFill>
                 <a:latin typeface="Calibri" pitchFamily="34" charset="0"/>
                 <a:ea typeface="Calibri" pitchFamily="34" charset="-122"/>
                 <a:cs typeface="Calibri" pitchFamily="34" charset="-120"/>
               </a:rPr>
-              <a:t>À VOUS</a:t>
+              <a:t>COLLER DU TEXTE ET UNE BOÎTE</a:t>
             </a:r>
             <a:endParaRPr lang="en-US" sz="1300" dirty="0"/>
           </a:p>
@@ -13622,7 +14472,7 @@
                 <a:ea typeface="Calibri" pitchFamily="34" charset="-122"/>
                 <a:cs typeface="Calibri" pitchFamily="34" charset="-120"/>
               </a:rPr>
-              <a:t>Votre jeu demande son nom au joueur.</a:t>
+              <a:t>Le +  met les morceaux bout à bout.</a:t>
             </a:r>
             <a:endParaRPr lang="en-US" sz="4000" dirty="0"/>
           </a:p>
@@ -13636,14 +14486,16 @@
         </p:nvSpPr>
         <p:spPr>
           <a:xfrm>
-            <a:off x="640080" y="2240280"/>
-            <a:ext cx="438912" cy="438912"/>
-          </a:xfrm>
-          <a:prstGeom prst="ellipse">
-            <a:avLst/>
-          </a:prstGeom>
-          <a:solidFill>
-            <a:srgbClr val="0C5C29"/>
+            <a:off x="640080" y="2194560"/>
+            <a:ext cx="10881360" cy="1051560"/>
+          </a:xfrm>
+          <a:prstGeom prst="roundRect">
+            <a:avLst>
+              <a:gd name="adj" fmla="val 6957"/>
+            </a:avLst>
+          </a:prstGeom>
+          <a:solidFill>
+            <a:srgbClr val="12122A"/>
           </a:solidFill>
           <a:ln/>
         </p:spPr>
@@ -13656,47 +14508,235 @@
         </p:nvSpPr>
         <p:spPr>
           <a:xfrm>
-            <a:off x="640080" y="2240280"/>
-            <a:ext cx="438912" cy="438912"/>
-          </a:xfrm>
-          <a:prstGeom prst="rect">
-            <a:avLst/>
-          </a:prstGeom>
-          <a:noFill/>
-          <a:ln/>
-        </p:spPr>
-        <p:txBody>
-          <a:bodyPr wrap="square" lIns="0" tIns="0" rIns="0" bIns="0" rtlCol="0" anchor="ctr"/>
-          <a:lstStyle/>
-          <a:p>
-            <a:pPr algn="ctr" indent="0" marL="0">
-              <a:buNone/>
-            </a:pPr>
-            <a:r>
-              <a:rPr lang="en-US" sz="1500" b="1" dirty="0">
-                <a:solidFill>
-                  <a:srgbClr val="FFFFFF"/>
+            <a:off x="960120" y="2423160"/>
+            <a:ext cx="10241280" cy="594360"/>
+          </a:xfrm>
+          <a:prstGeom prst="rect">
+            <a:avLst/>
+          </a:prstGeom>
+          <a:noFill/>
+          <a:ln/>
+        </p:spPr>
+        <p:txBody>
+          <a:bodyPr wrap="square" lIns="0" tIns="0" rIns="0" bIns="0" rtlCol="0" anchor="t"/>
+          <a:lstStyle/>
+          <a:p>
+            <a:pPr indent="0" marL="0">
+              <a:lnSpc>
+                <a:spcPts val="3400"/>
+              </a:lnSpc>
+              <a:buNone/>
+            </a:pPr>
+            <a:r>
+              <a:rPr lang="en-US" sz="2600" dirty="0">
+                <a:solidFill>
+                  <a:srgbClr val="4FC3F7"/>
+                </a:solidFill>
+                <a:latin typeface="Courier New" pitchFamily="34" charset="0"/>
+                <a:ea typeface="Courier New" pitchFamily="34" charset="-122"/>
+                <a:cs typeface="Courier New" pitchFamily="34" charset="-120"/>
+              </a:rPr>
+              <a:t>print("Bonjour " + nom + " !")</a:t>
+            </a:r>
+            <a:endParaRPr lang="en-US" sz="2600" dirty="0"/>
+          </a:p>
+        </p:txBody>
+      </p:sp>
+      <p:sp>
+        <p:nvSpPr>
+          <p:cNvPr id="16" name="Shape 14"/>
+          <p:cNvSpPr/>
+          <p:nvPr/>
+        </p:nvSpPr>
+        <p:spPr>
+          <a:xfrm>
+            <a:off x="640080" y="3566160"/>
+            <a:ext cx="5303520" cy="1371600"/>
+          </a:xfrm>
+          <a:prstGeom prst="roundRect">
+            <a:avLst>
+              <a:gd name="adj" fmla="val 5333"/>
+            </a:avLst>
+          </a:prstGeom>
+          <a:solidFill>
+            <a:srgbClr val="EAF7EF"/>
+          </a:solidFill>
+          <a:ln w="19050">
+            <a:solidFill>
+              <a:srgbClr val="2FB765"/>
+            </a:solidFill>
+            <a:prstDash val="solid"/>
+          </a:ln>
+          <a:effectLst>
+            <a:outerShdw sx="100000" sy="100000" kx="0" ky="0" algn="bl" rotWithShape="0" blurRad="127000" dist="25400" dir="5400000">
+              <a:srgbClr val="20204A">
+                <a:alpha val="12000"/>
+              </a:srgbClr>
+            </a:outerShdw>
+          </a:effectLst>
+        </p:spPr>
+      </p:sp>
+      <p:sp>
+        <p:nvSpPr>
+          <p:cNvPr id="17" name="Text 15"/>
+          <p:cNvSpPr txBox="1"/>
+          <p:nvPr/>
+        </p:nvSpPr>
+        <p:spPr>
+          <a:xfrm>
+            <a:off x="914400" y="3977640"/>
+            <a:ext cx="4754880" cy="548640"/>
+          </a:xfrm>
+          <a:prstGeom prst="rect">
+            <a:avLst/>
+          </a:prstGeom>
+          <a:noFill/>
+          <a:ln/>
+        </p:spPr>
+        <p:txBody>
+          <a:bodyPr wrap="square" lIns="0" tIns="0" rIns="0" bIns="0" rtlCol="0" anchor="t"/>
+          <a:lstStyle/>
+          <a:p>
+            <a:pPr indent="0" marL="0">
+              <a:buNone/>
+            </a:pPr>
+            <a:r>
+              <a:rPr lang="en-US" sz="2400" b="1" dirty="0">
+                <a:solidFill>
+                  <a:srgbClr val="0C5C29"/>
+                </a:solidFill>
+                <a:latin typeface="Courier New" pitchFamily="34" charset="0"/>
+                <a:ea typeface="Courier New" pitchFamily="34" charset="-122"/>
+                <a:cs typeface="Courier New" pitchFamily="34" charset="-120"/>
+              </a:rPr>
+              <a:t>Bonjour Damien !</a:t>
+            </a:r>
+            <a:endParaRPr lang="en-US" sz="2400" dirty="0"/>
+          </a:p>
+        </p:txBody>
+      </p:sp>
+      <p:sp>
+        <p:nvSpPr>
+          <p:cNvPr id="18" name="Shape 16"/>
+          <p:cNvSpPr/>
+          <p:nvPr/>
+        </p:nvSpPr>
+        <p:spPr>
+          <a:xfrm>
+            <a:off x="6400800" y="3566160"/>
+            <a:ext cx="5120640" cy="1371600"/>
+          </a:xfrm>
+          <a:prstGeom prst="roundRect">
+            <a:avLst>
+              <a:gd name="adj" fmla="val 5333"/>
+            </a:avLst>
+          </a:prstGeom>
+          <a:solidFill>
+            <a:srgbClr val="FDEDED"/>
+          </a:solidFill>
+          <a:ln w="19050">
+            <a:solidFill>
+              <a:srgbClr val="FF6B6B"/>
+            </a:solidFill>
+            <a:prstDash val="solid"/>
+          </a:ln>
+          <a:effectLst>
+            <a:outerShdw sx="100000" sy="100000" kx="0" ky="0" algn="bl" rotWithShape="0" blurRad="127000" dist="25400" dir="5400000">
+              <a:srgbClr val="20204A">
+                <a:alpha val="12000"/>
+              </a:srgbClr>
+            </a:outerShdw>
+          </a:effectLst>
+        </p:spPr>
+      </p:sp>
+      <p:sp>
+        <p:nvSpPr>
+          <p:cNvPr id="19" name="Text 17"/>
+          <p:cNvSpPr txBox="1"/>
+          <p:nvPr/>
+        </p:nvSpPr>
+        <p:spPr>
+          <a:xfrm>
+            <a:off x="6675120" y="3977640"/>
+            <a:ext cx="4572000" cy="548640"/>
+          </a:xfrm>
+          <a:prstGeom prst="rect">
+            <a:avLst/>
+          </a:prstGeom>
+          <a:noFill/>
+          <a:ln/>
+        </p:spPr>
+        <p:txBody>
+          <a:bodyPr wrap="square" lIns="0" tIns="0" rIns="0" bIns="0" rtlCol="0" anchor="t"/>
+          <a:lstStyle/>
+          <a:p>
+            <a:pPr indent="0" marL="0">
+              <a:buNone/>
+            </a:pPr>
+            <a:r>
+              <a:rPr lang="en-US" sz="2400" b="1" dirty="0">
+                <a:solidFill>
+                  <a:srgbClr val="B01B20"/>
+                </a:solidFill>
+                <a:latin typeface="Courier New" pitchFamily="34" charset="0"/>
+                <a:ea typeface="Courier New" pitchFamily="34" charset="-122"/>
+                <a:cs typeface="Courier New" pitchFamily="34" charset="-120"/>
+              </a:rPr>
+              <a:t>BonjourDamien !</a:t>
+            </a:r>
+            <a:endParaRPr lang="en-US" sz="2400" dirty="0"/>
+          </a:p>
+        </p:txBody>
+      </p:sp>
+      <p:sp>
+        <p:nvSpPr>
+          <p:cNvPr id="20" name="Text 18"/>
+          <p:cNvSpPr txBox="1"/>
+          <p:nvPr/>
+        </p:nvSpPr>
+        <p:spPr>
+          <a:xfrm>
+            <a:off x="914400" y="5029200"/>
+            <a:ext cx="5029200" cy="365760"/>
+          </a:xfrm>
+          <a:prstGeom prst="rect">
+            <a:avLst/>
+          </a:prstGeom>
+          <a:noFill/>
+          <a:ln/>
+        </p:spPr>
+        <p:txBody>
+          <a:bodyPr wrap="square" lIns="0" tIns="0" rIns="0" bIns="0" rtlCol="0" anchor="t"/>
+          <a:lstStyle/>
+          <a:p>
+            <a:pPr indent="0" marL="0">
+              <a:buNone/>
+            </a:pPr>
+            <a:r>
+              <a:rPr lang="en-US" sz="1400" dirty="0">
+                <a:solidFill>
+                  <a:srgbClr val="5A5A72"/>
                 </a:solidFill>
                 <a:latin typeface="Calibri" pitchFamily="34" charset="0"/>
                 <a:ea typeface="Calibri" pitchFamily="34" charset="-122"/>
                 <a:cs typeface="Calibri" pitchFamily="34" charset="-120"/>
               </a:rPr>
-              <a:t>1</a:t>
-            </a:r>
-            <a:endParaRPr lang="en-US" sz="1500" dirty="0"/>
-          </a:p>
-        </p:txBody>
-      </p:sp>
-      <p:sp>
-        <p:nvSpPr>
-          <p:cNvPr id="16" name="Text 14"/>
-          <p:cNvSpPr txBox="1"/>
-          <p:nvPr/>
-        </p:nvSpPr>
-        <p:spPr>
-          <a:xfrm>
-            <a:off x="1298448" y="2286000"/>
-            <a:ext cx="5852160" cy="457200"/>
+              <a:t>← avec l'espace après Bonjour</a:t>
+            </a:r>
+            <a:endParaRPr lang="en-US" sz="1400" dirty="0"/>
+          </a:p>
+        </p:txBody>
+      </p:sp>
+      <p:sp>
+        <p:nvSpPr>
+          <p:cNvPr id="21" name="Text 19"/>
+          <p:cNvSpPr txBox="1"/>
+          <p:nvPr/>
+        </p:nvSpPr>
+        <p:spPr>
+          <a:xfrm>
+            <a:off x="6675120" y="5029200"/>
+            <a:ext cx="4754880" cy="365760"/>
           </a:xfrm>
           <a:prstGeom prst="rect">
             <a:avLst/>
@@ -13712,454 +14752,17 @@
               <a:buNone/>
             </a:pPr>
             <a:r>
-              <a:rPr lang="en-US" sz="1700" dirty="0">
-                <a:solidFill>
-                  <a:srgbClr val="14142B"/>
+              <a:rPr lang="en-US" sz="1400" dirty="0">
+                <a:solidFill>
+                  <a:srgbClr val="5A5A72"/>
                 </a:solidFill>
                 <a:latin typeface="Calibri" pitchFamily="34" charset="0"/>
                 <a:ea typeface="Calibri" pitchFamily="34" charset="-122"/>
                 <a:cs typeface="Calibri" pitchFamily="34" charset="-120"/>
               </a:rPr>
-              <a:t>Étape 2 : écris la question que ton jeu doit poser</a:t>
-            </a:r>
-            <a:endParaRPr lang="en-US" sz="1700" dirty="0"/>
-          </a:p>
-        </p:txBody>
-      </p:sp>
-      <p:sp>
-        <p:nvSpPr>
-          <p:cNvPr id="17" name="Shape 15"/>
-          <p:cNvSpPr/>
-          <p:nvPr/>
-        </p:nvSpPr>
-        <p:spPr>
-          <a:xfrm>
-            <a:off x="640080" y="2880360"/>
-            <a:ext cx="438912" cy="438912"/>
-          </a:xfrm>
-          <a:prstGeom prst="ellipse">
-            <a:avLst/>
-          </a:prstGeom>
-          <a:solidFill>
-            <a:srgbClr val="0C5C29"/>
-          </a:solidFill>
-          <a:ln/>
-        </p:spPr>
-      </p:sp>
-      <p:sp>
-        <p:nvSpPr>
-          <p:cNvPr id="18" name="Text 16"/>
-          <p:cNvSpPr txBox="1"/>
-          <p:nvPr/>
-        </p:nvSpPr>
-        <p:spPr>
-          <a:xfrm>
-            <a:off x="640080" y="2880360"/>
-            <a:ext cx="438912" cy="438912"/>
-          </a:xfrm>
-          <a:prstGeom prst="rect">
-            <a:avLst/>
-          </a:prstGeom>
-          <a:noFill/>
-          <a:ln/>
-        </p:spPr>
-        <p:txBody>
-          <a:bodyPr wrap="square" lIns="0" tIns="0" rIns="0" bIns="0" rtlCol="0" anchor="ctr"/>
-          <a:lstStyle/>
-          <a:p>
-            <a:pPr algn="ctr" indent="0" marL="0">
-              <a:buNone/>
-            </a:pPr>
-            <a:r>
-              <a:rPr lang="en-US" sz="1500" b="1" dirty="0">
-                <a:solidFill>
-                  <a:srgbClr val="FFFFFF"/>
-                </a:solidFill>
-                <a:latin typeface="Calibri" pitchFamily="34" charset="0"/>
-                <a:ea typeface="Calibri" pitchFamily="34" charset="-122"/>
-                <a:cs typeface="Calibri" pitchFamily="34" charset="-120"/>
-              </a:rPr>
-              <a:t>2</a:t>
-            </a:r>
-            <a:endParaRPr lang="en-US" sz="1500" dirty="0"/>
-          </a:p>
-        </p:txBody>
-      </p:sp>
-      <p:sp>
-        <p:nvSpPr>
-          <p:cNvPr id="19" name="Text 17"/>
-          <p:cNvSpPr txBox="1"/>
-          <p:nvPr/>
-        </p:nvSpPr>
-        <p:spPr>
-          <a:xfrm>
-            <a:off x="1298448" y="2926080"/>
-            <a:ext cx="5852160" cy="457200"/>
-          </a:xfrm>
-          <a:prstGeom prst="rect">
-            <a:avLst/>
-          </a:prstGeom>
-          <a:noFill/>
-          <a:ln/>
-        </p:spPr>
-        <p:txBody>
-          <a:bodyPr wrap="square" lIns="0" tIns="0" rIns="0" bIns="0" rtlCol="0" anchor="t"/>
-          <a:lstStyle/>
-          <a:p>
-            <a:pPr indent="0" marL="0">
-              <a:buNone/>
-            </a:pPr>
-            <a:r>
-              <a:rPr lang="en-US" sz="1700" dirty="0">
-                <a:solidFill>
-                  <a:srgbClr val="14142B"/>
-                </a:solidFill>
-                <a:latin typeface="Calibri" pitchFamily="34" charset="0"/>
-                <a:ea typeface="Calibri" pitchFamily="34" charset="-122"/>
-                <a:cs typeface="Calibri" pitchFamily="34" charset="-120"/>
-              </a:rPr>
-              <a:t>Étape 3 : ne touche à rien, elle marche déjà</a:t>
-            </a:r>
-            <a:endParaRPr lang="en-US" sz="1700" dirty="0"/>
-          </a:p>
-        </p:txBody>
-      </p:sp>
-      <p:sp>
-        <p:nvSpPr>
-          <p:cNvPr id="20" name="Shape 18"/>
-          <p:cNvSpPr/>
-          <p:nvPr/>
-        </p:nvSpPr>
-        <p:spPr>
-          <a:xfrm>
-            <a:off x="640080" y="3520440"/>
-            <a:ext cx="438912" cy="438912"/>
-          </a:xfrm>
-          <a:prstGeom prst="ellipse">
-            <a:avLst/>
-          </a:prstGeom>
-          <a:solidFill>
-            <a:srgbClr val="0C5C29"/>
-          </a:solidFill>
-          <a:ln/>
-        </p:spPr>
-      </p:sp>
-      <p:sp>
-        <p:nvSpPr>
-          <p:cNvPr id="21" name="Text 19"/>
-          <p:cNvSpPr txBox="1"/>
-          <p:nvPr/>
-        </p:nvSpPr>
-        <p:spPr>
-          <a:xfrm>
-            <a:off x="640080" y="3520440"/>
-            <a:ext cx="438912" cy="438912"/>
-          </a:xfrm>
-          <a:prstGeom prst="rect">
-            <a:avLst/>
-          </a:prstGeom>
-          <a:noFill/>
-          <a:ln/>
-        </p:spPr>
-        <p:txBody>
-          <a:bodyPr wrap="square" lIns="0" tIns="0" rIns="0" bIns="0" rtlCol="0" anchor="ctr"/>
-          <a:lstStyle/>
-          <a:p>
-            <a:pPr algn="ctr" indent="0" marL="0">
-              <a:buNone/>
-            </a:pPr>
-            <a:r>
-              <a:rPr lang="en-US" sz="1500" b="1" dirty="0">
-                <a:solidFill>
-                  <a:srgbClr val="FFFFFF"/>
-                </a:solidFill>
-                <a:latin typeface="Calibri" pitchFamily="34" charset="0"/>
-                <a:ea typeface="Calibri" pitchFamily="34" charset="-122"/>
-                <a:cs typeface="Calibri" pitchFamily="34" charset="-120"/>
-              </a:rPr>
-              <a:t>3</a:t>
-            </a:r>
-            <a:endParaRPr lang="en-US" sz="1500" dirty="0"/>
-          </a:p>
-        </p:txBody>
-      </p:sp>
-      <p:sp>
-        <p:nvSpPr>
-          <p:cNvPr id="22" name="Text 20"/>
-          <p:cNvSpPr txBox="1"/>
-          <p:nvPr/>
-        </p:nvSpPr>
-        <p:spPr>
-          <a:xfrm>
-            <a:off x="1298448" y="3566160"/>
-            <a:ext cx="5852160" cy="457200"/>
-          </a:xfrm>
-          <a:prstGeom prst="rect">
-            <a:avLst/>
-          </a:prstGeom>
-          <a:noFill/>
-          <a:ln/>
-        </p:spPr>
-        <p:txBody>
-          <a:bodyPr wrap="square" lIns="0" tIns="0" rIns="0" bIns="0" rtlCol="0" anchor="t"/>
-          <a:lstStyle/>
-          <a:p>
-            <a:pPr indent="0" marL="0">
-              <a:buNone/>
-            </a:pPr>
-            <a:r>
-              <a:rPr lang="en-US" sz="1700" dirty="0">
-                <a:solidFill>
-                  <a:srgbClr val="14142B"/>
-                </a:solidFill>
-                <a:latin typeface="Calibri" pitchFamily="34" charset="0"/>
-                <a:ea typeface="Calibri" pitchFamily="34" charset="-122"/>
-                <a:cs typeface="Calibri" pitchFamily="34" charset="-120"/>
-              </a:rPr>
-              <a:t>Étape 4 : écris ce que tu veux dire au joueur</a:t>
-            </a:r>
-            <a:endParaRPr lang="en-US" sz="1700" dirty="0"/>
-          </a:p>
-        </p:txBody>
-      </p:sp>
-      <p:sp>
-        <p:nvSpPr>
-          <p:cNvPr id="23" name="Shape 21"/>
-          <p:cNvSpPr/>
-          <p:nvPr/>
-        </p:nvSpPr>
-        <p:spPr>
-          <a:xfrm>
-            <a:off x="640080" y="4160520"/>
-            <a:ext cx="438912" cy="438912"/>
-          </a:xfrm>
-          <a:prstGeom prst="ellipse">
-            <a:avLst/>
-          </a:prstGeom>
-          <a:solidFill>
-            <a:srgbClr val="0C5C29"/>
-          </a:solidFill>
-          <a:ln/>
-        </p:spPr>
-      </p:sp>
-      <p:sp>
-        <p:nvSpPr>
-          <p:cNvPr id="24" name="Text 22"/>
-          <p:cNvSpPr txBox="1"/>
-          <p:nvPr/>
-        </p:nvSpPr>
-        <p:spPr>
-          <a:xfrm>
-            <a:off x="640080" y="4160520"/>
-            <a:ext cx="438912" cy="438912"/>
-          </a:xfrm>
-          <a:prstGeom prst="rect">
-            <a:avLst/>
-          </a:prstGeom>
-          <a:noFill/>
-          <a:ln/>
-        </p:spPr>
-        <p:txBody>
-          <a:bodyPr wrap="square" lIns="0" tIns="0" rIns="0" bIns="0" rtlCol="0" anchor="ctr"/>
-          <a:lstStyle/>
-          <a:p>
-            <a:pPr algn="ctr" indent="0" marL="0">
-              <a:buNone/>
-            </a:pPr>
-            <a:r>
-              <a:rPr lang="en-US" sz="1500" b="1" dirty="0">
-                <a:solidFill>
-                  <a:srgbClr val="FFFFFF"/>
-                </a:solidFill>
-                <a:latin typeface="Calibri" pitchFamily="34" charset="0"/>
-                <a:ea typeface="Calibri" pitchFamily="34" charset="-122"/>
-                <a:cs typeface="Calibri" pitchFamily="34" charset="-120"/>
-              </a:rPr>
-              <a:t>4</a:t>
-            </a:r>
-            <a:endParaRPr lang="en-US" sz="1500" dirty="0"/>
-          </a:p>
-        </p:txBody>
-      </p:sp>
-      <p:sp>
-        <p:nvSpPr>
-          <p:cNvPr id="25" name="Text 23"/>
-          <p:cNvSpPr txBox="1"/>
-          <p:nvPr/>
-        </p:nvSpPr>
-        <p:spPr>
-          <a:xfrm>
-            <a:off x="1298448" y="4206240"/>
-            <a:ext cx="5852160" cy="457200"/>
-          </a:xfrm>
-          <a:prstGeom prst="rect">
-            <a:avLst/>
-          </a:prstGeom>
-          <a:noFill/>
-          <a:ln/>
-        </p:spPr>
-        <p:txBody>
-          <a:bodyPr wrap="square" lIns="0" tIns="0" rIns="0" bIns="0" rtlCol="0" anchor="t"/>
-          <a:lstStyle/>
-          <a:p>
-            <a:pPr indent="0" marL="0">
-              <a:buNone/>
-            </a:pPr>
-            <a:r>
-              <a:rPr lang="en-US" sz="1700" dirty="0">
-                <a:solidFill>
-                  <a:srgbClr val="14142B"/>
-                </a:solidFill>
-                <a:latin typeface="Calibri" pitchFamily="34" charset="0"/>
-                <a:ea typeface="Calibri" pitchFamily="34" charset="-122"/>
-                <a:cs typeface="Calibri" pitchFamily="34" charset="-120"/>
-              </a:rPr>
-              <a:t>Relance (F5) après CHAQUE changement</a:t>
-            </a:r>
-            <a:endParaRPr lang="en-US" sz="1700" dirty="0"/>
-          </a:p>
-        </p:txBody>
-      </p:sp>
-      <p:sp>
-        <p:nvSpPr>
-          <p:cNvPr id="26" name="Shape 24"/>
-          <p:cNvSpPr/>
-          <p:nvPr/>
-        </p:nvSpPr>
-        <p:spPr>
-          <a:xfrm>
-            <a:off x="6949440" y="2194560"/>
-            <a:ext cx="4572000" cy="2103120"/>
-          </a:xfrm>
-          <a:prstGeom prst="roundRect">
-            <a:avLst>
-              <a:gd name="adj" fmla="val 3478"/>
-            </a:avLst>
-          </a:prstGeom>
-          <a:solidFill>
-            <a:srgbClr val="12122A"/>
-          </a:solidFill>
-          <a:ln/>
-        </p:spPr>
-      </p:sp>
-      <p:sp>
-        <p:nvSpPr>
-          <p:cNvPr id="27" name="Text 25"/>
-          <p:cNvSpPr txBox="1"/>
-          <p:nvPr/>
-        </p:nvSpPr>
-        <p:spPr>
-          <a:xfrm>
-            <a:off x="7269480" y="2423160"/>
-            <a:ext cx="3931920" cy="1645920"/>
-          </a:xfrm>
-          <a:prstGeom prst="rect">
-            <a:avLst/>
-          </a:prstGeom>
-          <a:noFill/>
-          <a:ln/>
-        </p:spPr>
-        <p:txBody>
-          <a:bodyPr wrap="square" lIns="0" tIns="0" rIns="0" bIns="0" rtlCol="0" anchor="t"/>
-          <a:lstStyle/>
-          <a:p>
-            <a:pPr indent="0" marL="0">
-              <a:lnSpc>
-                <a:spcPts val="2400"/>
-              </a:lnSpc>
-              <a:buNone/>
-            </a:pPr>
-            <a:r>
-              <a:rPr lang="en-US" sz="1400" dirty="0">
-                <a:solidFill>
-                  <a:srgbClr val="4FC3F7"/>
-                </a:solidFill>
-                <a:latin typeface="Courier New" pitchFamily="34" charset="0"/>
-                <a:ea typeface="Courier New" pitchFamily="34" charset="-122"/>
-                <a:cs typeface="Courier New" pitchFamily="34" charset="-120"/>
-              </a:rPr>
-              <a:t>Comment t'appelles-tu ? Damien</a:t>
+              <a:t>← sans l'espace : il colle tout</a:t>
             </a:r>
             <a:endParaRPr lang="en-US" sz="1400" dirty="0"/>
-          </a:p>
-          <a:p>
-            <a:pPr indent="0" marL="0">
-              <a:lnSpc>
-                <a:spcPts val="2400"/>
-              </a:lnSpc>
-              <a:buNone/>
-            </a:pPr>
-            <a:r>
-              <a:rPr lang="en-US" sz="1400" dirty="0">
-                <a:solidFill>
-                  <a:srgbClr val="4FC3F7"/>
-                </a:solidFill>
-                <a:latin typeface="Courier New" pitchFamily="34" charset="0"/>
-                <a:ea typeface="Courier New" pitchFamily="34" charset="-122"/>
-                <a:cs typeface="Courier New" pitchFamily="34" charset="-120"/>
-              </a:rPr>
-              <a:t>Bonjour Damien !</a:t>
-            </a:r>
-            <a:endParaRPr lang="en-US" sz="1400" dirty="0"/>
-          </a:p>
-          <a:p>
-            <a:pPr indent="0" marL="0">
-              <a:lnSpc>
-                <a:spcPts val="2400"/>
-              </a:lnSpc>
-              <a:buNone/>
-            </a:pPr>
-            <a:r>
-              <a:rPr lang="en-US" sz="1400" dirty="0">
-                <a:solidFill>
-                  <a:srgbClr val="4FC3F7"/>
-                </a:solidFill>
-                <a:latin typeface="Courier New" pitchFamily="34" charset="0"/>
-                <a:ea typeface="Courier New" pitchFamily="34" charset="-122"/>
-                <a:cs typeface="Courier New" pitchFamily="34" charset="-120"/>
-              </a:rPr>
-              <a:t>Prepare-toi a perdre, Damien !</a:t>
-            </a:r>
-            <a:endParaRPr lang="en-US" sz="1400" dirty="0"/>
-          </a:p>
-        </p:txBody>
-      </p:sp>
-      <p:sp>
-        <p:nvSpPr>
-          <p:cNvPr id="28" name="Text 26"/>
-          <p:cNvSpPr txBox="1"/>
-          <p:nvPr/>
-        </p:nvSpPr>
-        <p:spPr>
-          <a:xfrm>
-            <a:off x="640080" y="5440680"/>
-            <a:ext cx="10881360" cy="640080"/>
-          </a:xfrm>
-          <a:prstGeom prst="rect">
-            <a:avLst/>
-          </a:prstGeom>
-          <a:noFill/>
-          <a:ln/>
-        </p:spPr>
-        <p:txBody>
-          <a:bodyPr wrap="square" lIns="0" tIns="0" rIns="0" bIns="0" rtlCol="0" anchor="t"/>
-          <a:lstStyle/>
-          <a:p>
-            <a:pPr indent="0" marL="0">
-              <a:buNone/>
-            </a:pPr>
-            <a:r>
-              <a:rPr lang="en-US" sz="2100" b="1" dirty="0">
-                <a:solidFill>
-                  <a:srgbClr val="0C5C29"/>
-                </a:solidFill>
-                <a:latin typeface="Calibri" pitchFamily="34" charset="0"/>
-                <a:ea typeface="Calibri" pitchFamily="34" charset="-122"/>
-                <a:cs typeface="Calibri" pitchFamily="34" charset="-120"/>
-              </a:rPr>
-              <a:t>14 minutes. Carte bleue quand tu as fini : le défi t'attend en bas de ton fichier.</a:t>
-            </a:r>
-            <a:endParaRPr lang="en-US" sz="2100" dirty="0"/>
           </a:p>
         </p:txBody>
       </p:sp>
@@ -14477,6 +15080,909 @@
             <a:r>
               <a:rPr lang="en-US" sz="1300" b="1" spc="300" kern="0" dirty="0">
                 <a:solidFill>
+                  <a:srgbClr val="0C5C29"/>
+                </a:solidFill>
+                <a:latin typeface="Calibri" pitchFamily="34" charset="0"/>
+                <a:ea typeface="Calibri" pitchFamily="34" charset="-122"/>
+                <a:cs typeface="Calibri" pitchFamily="34" charset="-120"/>
+              </a:rPr>
+              <a:t>À VOUS</a:t>
+            </a:r>
+            <a:endParaRPr lang="en-US" sz="1300" dirty="0"/>
+          </a:p>
+        </p:txBody>
+      </p:sp>
+      <p:sp>
+        <p:nvSpPr>
+          <p:cNvPr id="13" name="Text 11"/>
+          <p:cNvSpPr txBox="1"/>
+          <p:nvPr/>
+        </p:nvSpPr>
+        <p:spPr>
+          <a:xfrm>
+            <a:off x="640080" y="868680"/>
+            <a:ext cx="10881360" cy="914400"/>
+          </a:xfrm>
+          <a:prstGeom prst="rect">
+            <a:avLst/>
+          </a:prstGeom>
+          <a:noFill/>
+          <a:ln/>
+        </p:spPr>
+        <p:txBody>
+          <a:bodyPr wrap="square" lIns="0" tIns="0" rIns="0" bIns="0" rtlCol="0" anchor="t"/>
+          <a:lstStyle/>
+          <a:p>
+            <a:pPr indent="0" marL="0">
+              <a:lnSpc>
+                <a:spcPts val="4400"/>
+              </a:lnSpc>
+              <a:buNone/>
+            </a:pPr>
+            <a:r>
+              <a:rPr lang="en-US" sz="4000" b="1" dirty="0">
+                <a:solidFill>
+                  <a:srgbClr val="14142B"/>
+                </a:solidFill>
+                <a:latin typeface="Calibri" pitchFamily="34" charset="0"/>
+                <a:ea typeface="Calibri" pitchFamily="34" charset="-122"/>
+                <a:cs typeface="Calibri" pitchFamily="34" charset="-120"/>
+              </a:rPr>
+              <a:t>Partie 2 : votre jeu demande son nom.</a:t>
+            </a:r>
+            <a:endParaRPr lang="en-US" sz="4000" dirty="0"/>
+          </a:p>
+        </p:txBody>
+      </p:sp>
+      <p:sp>
+        <p:nvSpPr>
+          <p:cNvPr id="14" name="Shape 12"/>
+          <p:cNvSpPr/>
+          <p:nvPr/>
+        </p:nvSpPr>
+        <p:spPr>
+          <a:xfrm>
+            <a:off x="640080" y="2240280"/>
+            <a:ext cx="438912" cy="438912"/>
+          </a:xfrm>
+          <a:prstGeom prst="ellipse">
+            <a:avLst/>
+          </a:prstGeom>
+          <a:solidFill>
+            <a:srgbClr val="0C5C29"/>
+          </a:solidFill>
+          <a:ln/>
+        </p:spPr>
+      </p:sp>
+      <p:sp>
+        <p:nvSpPr>
+          <p:cNvPr id="15" name="Text 13"/>
+          <p:cNvSpPr txBox="1"/>
+          <p:nvPr/>
+        </p:nvSpPr>
+        <p:spPr>
+          <a:xfrm>
+            <a:off x="640080" y="2240280"/>
+            <a:ext cx="438912" cy="438912"/>
+          </a:xfrm>
+          <a:prstGeom prst="rect">
+            <a:avLst/>
+          </a:prstGeom>
+          <a:noFill/>
+          <a:ln/>
+        </p:spPr>
+        <p:txBody>
+          <a:bodyPr wrap="square" lIns="0" tIns="0" rIns="0" bIns="0" rtlCol="0" anchor="ctr"/>
+          <a:lstStyle/>
+          <a:p>
+            <a:pPr algn="ctr" indent="0" marL="0">
+              <a:buNone/>
+            </a:pPr>
+            <a:r>
+              <a:rPr lang="en-US" sz="1500" b="1" dirty="0">
+                <a:solidFill>
+                  <a:srgbClr val="FFFFFF"/>
+                </a:solidFill>
+                <a:latin typeface="Calibri" pitchFamily="34" charset="0"/>
+                <a:ea typeface="Calibri" pitchFamily="34" charset="-122"/>
+                <a:cs typeface="Calibri" pitchFamily="34" charset="-120"/>
+              </a:rPr>
+              <a:t>1</a:t>
+            </a:r>
+            <a:endParaRPr lang="en-US" sz="1500" dirty="0"/>
+          </a:p>
+        </p:txBody>
+      </p:sp>
+      <p:sp>
+        <p:nvSpPr>
+          <p:cNvPr id="16" name="Text 14"/>
+          <p:cNvSpPr txBox="1"/>
+          <p:nvPr/>
+        </p:nvSpPr>
+        <p:spPr>
+          <a:xfrm>
+            <a:off x="1298448" y="2286000"/>
+            <a:ext cx="5852160" cy="457200"/>
+          </a:xfrm>
+          <a:prstGeom prst="rect">
+            <a:avLst/>
+          </a:prstGeom>
+          <a:noFill/>
+          <a:ln/>
+        </p:spPr>
+        <p:txBody>
+          <a:bodyPr wrap="square" lIns="0" tIns="0" rIns="0" bIns="0" rtlCol="0" anchor="t"/>
+          <a:lstStyle/>
+          <a:p>
+            <a:pPr indent="0" marL="0">
+              <a:buNone/>
+            </a:pPr>
+            <a:r>
+              <a:rPr lang="en-US" sz="1700" dirty="0">
+                <a:solidFill>
+                  <a:srgbClr val="14142B"/>
+                </a:solidFill>
+                <a:latin typeface="Calibri" pitchFamily="34" charset="0"/>
+                <a:ea typeface="Calibri" pitchFamily="34" charset="-122"/>
+                <a:cs typeface="Calibri" pitchFamily="34" charset="-120"/>
+              </a:rPr>
+              <a:t>Étape 6 : écris la question que ton jeu doit poser</a:t>
+            </a:r>
+            <a:endParaRPr lang="en-US" sz="1700" dirty="0"/>
+          </a:p>
+        </p:txBody>
+      </p:sp>
+      <p:sp>
+        <p:nvSpPr>
+          <p:cNvPr id="17" name="Shape 15"/>
+          <p:cNvSpPr/>
+          <p:nvPr/>
+        </p:nvSpPr>
+        <p:spPr>
+          <a:xfrm>
+            <a:off x="640080" y="2880360"/>
+            <a:ext cx="438912" cy="438912"/>
+          </a:xfrm>
+          <a:prstGeom prst="ellipse">
+            <a:avLst/>
+          </a:prstGeom>
+          <a:solidFill>
+            <a:srgbClr val="0C5C29"/>
+          </a:solidFill>
+          <a:ln/>
+        </p:spPr>
+      </p:sp>
+      <p:sp>
+        <p:nvSpPr>
+          <p:cNvPr id="18" name="Text 16"/>
+          <p:cNvSpPr txBox="1"/>
+          <p:nvPr/>
+        </p:nvSpPr>
+        <p:spPr>
+          <a:xfrm>
+            <a:off x="640080" y="2880360"/>
+            <a:ext cx="438912" cy="438912"/>
+          </a:xfrm>
+          <a:prstGeom prst="rect">
+            <a:avLst/>
+          </a:prstGeom>
+          <a:noFill/>
+          <a:ln/>
+        </p:spPr>
+        <p:txBody>
+          <a:bodyPr wrap="square" lIns="0" tIns="0" rIns="0" bIns="0" rtlCol="0" anchor="ctr"/>
+          <a:lstStyle/>
+          <a:p>
+            <a:pPr algn="ctr" indent="0" marL="0">
+              <a:buNone/>
+            </a:pPr>
+            <a:r>
+              <a:rPr lang="en-US" sz="1500" b="1" dirty="0">
+                <a:solidFill>
+                  <a:srgbClr val="FFFFFF"/>
+                </a:solidFill>
+                <a:latin typeface="Calibri" pitchFamily="34" charset="0"/>
+                <a:ea typeface="Calibri" pitchFamily="34" charset="-122"/>
+                <a:cs typeface="Calibri" pitchFamily="34" charset="-120"/>
+              </a:rPr>
+              <a:t>2</a:t>
+            </a:r>
+            <a:endParaRPr lang="en-US" sz="1500" dirty="0"/>
+          </a:p>
+        </p:txBody>
+      </p:sp>
+      <p:sp>
+        <p:nvSpPr>
+          <p:cNvPr id="19" name="Text 17"/>
+          <p:cNvSpPr txBox="1"/>
+          <p:nvPr/>
+        </p:nvSpPr>
+        <p:spPr>
+          <a:xfrm>
+            <a:off x="1298448" y="2926080"/>
+            <a:ext cx="5852160" cy="457200"/>
+          </a:xfrm>
+          <a:prstGeom prst="rect">
+            <a:avLst/>
+          </a:prstGeom>
+          <a:noFill/>
+          <a:ln/>
+        </p:spPr>
+        <p:txBody>
+          <a:bodyPr wrap="square" lIns="0" tIns="0" rIns="0" bIns="0" rtlCol="0" anchor="t"/>
+          <a:lstStyle/>
+          <a:p>
+            <a:pPr indent="0" marL="0">
+              <a:buNone/>
+            </a:pPr>
+            <a:r>
+              <a:rPr lang="en-US" sz="1700" dirty="0">
+                <a:solidFill>
+                  <a:srgbClr val="14142B"/>
+                </a:solidFill>
+                <a:latin typeface="Calibri" pitchFamily="34" charset="0"/>
+                <a:ea typeface="Calibri" pitchFamily="34" charset="-122"/>
+                <a:cs typeface="Calibri" pitchFamily="34" charset="-120"/>
+              </a:rPr>
+              <a:t>Étape 7 : ne touche à rien, elle marche déjà</a:t>
+            </a:r>
+            <a:endParaRPr lang="en-US" sz="1700" dirty="0"/>
+          </a:p>
+        </p:txBody>
+      </p:sp>
+      <p:sp>
+        <p:nvSpPr>
+          <p:cNvPr id="20" name="Shape 18"/>
+          <p:cNvSpPr/>
+          <p:nvPr/>
+        </p:nvSpPr>
+        <p:spPr>
+          <a:xfrm>
+            <a:off x="640080" y="3520440"/>
+            <a:ext cx="438912" cy="438912"/>
+          </a:xfrm>
+          <a:prstGeom prst="ellipse">
+            <a:avLst/>
+          </a:prstGeom>
+          <a:solidFill>
+            <a:srgbClr val="0C5C29"/>
+          </a:solidFill>
+          <a:ln/>
+        </p:spPr>
+      </p:sp>
+      <p:sp>
+        <p:nvSpPr>
+          <p:cNvPr id="21" name="Text 19"/>
+          <p:cNvSpPr txBox="1"/>
+          <p:nvPr/>
+        </p:nvSpPr>
+        <p:spPr>
+          <a:xfrm>
+            <a:off x="640080" y="3520440"/>
+            <a:ext cx="438912" cy="438912"/>
+          </a:xfrm>
+          <a:prstGeom prst="rect">
+            <a:avLst/>
+          </a:prstGeom>
+          <a:noFill/>
+          <a:ln/>
+        </p:spPr>
+        <p:txBody>
+          <a:bodyPr wrap="square" lIns="0" tIns="0" rIns="0" bIns="0" rtlCol="0" anchor="ctr"/>
+          <a:lstStyle/>
+          <a:p>
+            <a:pPr algn="ctr" indent="0" marL="0">
+              <a:buNone/>
+            </a:pPr>
+            <a:r>
+              <a:rPr lang="en-US" sz="1500" b="1" dirty="0">
+                <a:solidFill>
+                  <a:srgbClr val="FFFFFF"/>
+                </a:solidFill>
+                <a:latin typeface="Calibri" pitchFamily="34" charset="0"/>
+                <a:ea typeface="Calibri" pitchFamily="34" charset="-122"/>
+                <a:cs typeface="Calibri" pitchFamily="34" charset="-120"/>
+              </a:rPr>
+              <a:t>3</a:t>
+            </a:r>
+            <a:endParaRPr lang="en-US" sz="1500" dirty="0"/>
+          </a:p>
+        </p:txBody>
+      </p:sp>
+      <p:sp>
+        <p:nvSpPr>
+          <p:cNvPr id="22" name="Text 20"/>
+          <p:cNvSpPr txBox="1"/>
+          <p:nvPr/>
+        </p:nvSpPr>
+        <p:spPr>
+          <a:xfrm>
+            <a:off x="1298448" y="3566160"/>
+            <a:ext cx="5852160" cy="457200"/>
+          </a:xfrm>
+          <a:prstGeom prst="rect">
+            <a:avLst/>
+          </a:prstGeom>
+          <a:noFill/>
+          <a:ln/>
+        </p:spPr>
+        <p:txBody>
+          <a:bodyPr wrap="square" lIns="0" tIns="0" rIns="0" bIns="0" rtlCol="0" anchor="t"/>
+          <a:lstStyle/>
+          <a:p>
+            <a:pPr indent="0" marL="0">
+              <a:buNone/>
+            </a:pPr>
+            <a:r>
+              <a:rPr lang="en-US" sz="1700" dirty="0">
+                <a:solidFill>
+                  <a:srgbClr val="14142B"/>
+                </a:solidFill>
+                <a:latin typeface="Calibri" pitchFamily="34" charset="0"/>
+                <a:ea typeface="Calibri" pitchFamily="34" charset="-122"/>
+                <a:cs typeface="Calibri" pitchFamily="34" charset="-120"/>
+              </a:rPr>
+              <a:t>Étape 8 : écris ce que tu veux dire au joueur</a:t>
+            </a:r>
+            <a:endParaRPr lang="en-US" sz="1700" dirty="0"/>
+          </a:p>
+        </p:txBody>
+      </p:sp>
+      <p:sp>
+        <p:nvSpPr>
+          <p:cNvPr id="23" name="Shape 21"/>
+          <p:cNvSpPr/>
+          <p:nvPr/>
+        </p:nvSpPr>
+        <p:spPr>
+          <a:xfrm>
+            <a:off x="640080" y="4160520"/>
+            <a:ext cx="438912" cy="438912"/>
+          </a:xfrm>
+          <a:prstGeom prst="ellipse">
+            <a:avLst/>
+          </a:prstGeom>
+          <a:solidFill>
+            <a:srgbClr val="0C5C29"/>
+          </a:solidFill>
+          <a:ln/>
+        </p:spPr>
+      </p:sp>
+      <p:sp>
+        <p:nvSpPr>
+          <p:cNvPr id="24" name="Text 22"/>
+          <p:cNvSpPr txBox="1"/>
+          <p:nvPr/>
+        </p:nvSpPr>
+        <p:spPr>
+          <a:xfrm>
+            <a:off x="640080" y="4160520"/>
+            <a:ext cx="438912" cy="438912"/>
+          </a:xfrm>
+          <a:prstGeom prst="rect">
+            <a:avLst/>
+          </a:prstGeom>
+          <a:noFill/>
+          <a:ln/>
+        </p:spPr>
+        <p:txBody>
+          <a:bodyPr wrap="square" lIns="0" tIns="0" rIns="0" bIns="0" rtlCol="0" anchor="ctr"/>
+          <a:lstStyle/>
+          <a:p>
+            <a:pPr algn="ctr" indent="0" marL="0">
+              <a:buNone/>
+            </a:pPr>
+            <a:r>
+              <a:rPr lang="en-US" sz="1500" b="1" dirty="0">
+                <a:solidFill>
+                  <a:srgbClr val="FFFFFF"/>
+                </a:solidFill>
+                <a:latin typeface="Calibri" pitchFamily="34" charset="0"/>
+                <a:ea typeface="Calibri" pitchFamily="34" charset="-122"/>
+                <a:cs typeface="Calibri" pitchFamily="34" charset="-120"/>
+              </a:rPr>
+              <a:t>4</a:t>
+            </a:r>
+            <a:endParaRPr lang="en-US" sz="1500" dirty="0"/>
+          </a:p>
+        </p:txBody>
+      </p:sp>
+      <p:sp>
+        <p:nvSpPr>
+          <p:cNvPr id="25" name="Text 23"/>
+          <p:cNvSpPr txBox="1"/>
+          <p:nvPr/>
+        </p:nvSpPr>
+        <p:spPr>
+          <a:xfrm>
+            <a:off x="1298448" y="4206240"/>
+            <a:ext cx="5852160" cy="457200"/>
+          </a:xfrm>
+          <a:prstGeom prst="rect">
+            <a:avLst/>
+          </a:prstGeom>
+          <a:noFill/>
+          <a:ln/>
+        </p:spPr>
+        <p:txBody>
+          <a:bodyPr wrap="square" lIns="0" tIns="0" rIns="0" bIns="0" rtlCol="0" anchor="t"/>
+          <a:lstStyle/>
+          <a:p>
+            <a:pPr indent="0" marL="0">
+              <a:buNone/>
+            </a:pPr>
+            <a:r>
+              <a:rPr lang="en-US" sz="1700" dirty="0">
+                <a:solidFill>
+                  <a:srgbClr val="14142B"/>
+                </a:solidFill>
+                <a:latin typeface="Calibri" pitchFamily="34" charset="0"/>
+                <a:ea typeface="Calibri" pitchFamily="34" charset="-122"/>
+                <a:cs typeface="Calibri" pitchFamily="34" charset="-120"/>
+              </a:rPr>
+              <a:t>Relance (F5) après CHAQUE changement</a:t>
+            </a:r>
+            <a:endParaRPr lang="en-US" sz="1700" dirty="0"/>
+          </a:p>
+        </p:txBody>
+      </p:sp>
+      <p:sp>
+        <p:nvSpPr>
+          <p:cNvPr id="26" name="Shape 24"/>
+          <p:cNvSpPr/>
+          <p:nvPr/>
+        </p:nvSpPr>
+        <p:spPr>
+          <a:xfrm>
+            <a:off x="6949440" y="2194560"/>
+            <a:ext cx="4572000" cy="2103120"/>
+          </a:xfrm>
+          <a:prstGeom prst="roundRect">
+            <a:avLst>
+              <a:gd name="adj" fmla="val 3478"/>
+            </a:avLst>
+          </a:prstGeom>
+          <a:solidFill>
+            <a:srgbClr val="12122A"/>
+          </a:solidFill>
+          <a:ln/>
+        </p:spPr>
+      </p:sp>
+      <p:sp>
+        <p:nvSpPr>
+          <p:cNvPr id="27" name="Text 25"/>
+          <p:cNvSpPr txBox="1"/>
+          <p:nvPr/>
+        </p:nvSpPr>
+        <p:spPr>
+          <a:xfrm>
+            <a:off x="7269480" y="2423160"/>
+            <a:ext cx="3931920" cy="1645920"/>
+          </a:xfrm>
+          <a:prstGeom prst="rect">
+            <a:avLst/>
+          </a:prstGeom>
+          <a:noFill/>
+          <a:ln/>
+        </p:spPr>
+        <p:txBody>
+          <a:bodyPr wrap="square" lIns="0" tIns="0" rIns="0" bIns="0" rtlCol="0" anchor="t"/>
+          <a:lstStyle/>
+          <a:p>
+            <a:pPr indent="0" marL="0">
+              <a:lnSpc>
+                <a:spcPts val="2400"/>
+              </a:lnSpc>
+              <a:buNone/>
+            </a:pPr>
+            <a:r>
+              <a:rPr lang="en-US" sz="1400" dirty="0">
+                <a:solidFill>
+                  <a:srgbClr val="4FC3F7"/>
+                </a:solidFill>
+                <a:latin typeface="Courier New" pitchFamily="34" charset="0"/>
+                <a:ea typeface="Courier New" pitchFamily="34" charset="-122"/>
+                <a:cs typeface="Courier New" pitchFamily="34" charset="-120"/>
+              </a:rPr>
+              <a:t>Comment t'appelles-tu ? Damien</a:t>
+            </a:r>
+            <a:endParaRPr lang="en-US" sz="1400" dirty="0"/>
+          </a:p>
+          <a:p>
+            <a:pPr indent="0" marL="0">
+              <a:lnSpc>
+                <a:spcPts val="2400"/>
+              </a:lnSpc>
+              <a:buNone/>
+            </a:pPr>
+            <a:r>
+              <a:rPr lang="en-US" sz="1400" dirty="0">
+                <a:solidFill>
+                  <a:srgbClr val="4FC3F7"/>
+                </a:solidFill>
+                <a:latin typeface="Courier New" pitchFamily="34" charset="0"/>
+                <a:ea typeface="Courier New" pitchFamily="34" charset="-122"/>
+                <a:cs typeface="Courier New" pitchFamily="34" charset="-120"/>
+              </a:rPr>
+              <a:t>Bonjour Damien !</a:t>
+            </a:r>
+            <a:endParaRPr lang="en-US" sz="1400" dirty="0"/>
+          </a:p>
+          <a:p>
+            <a:pPr indent="0" marL="0">
+              <a:lnSpc>
+                <a:spcPts val="2400"/>
+              </a:lnSpc>
+              <a:buNone/>
+            </a:pPr>
+            <a:r>
+              <a:rPr lang="en-US" sz="1400" dirty="0">
+                <a:solidFill>
+                  <a:srgbClr val="4FC3F7"/>
+                </a:solidFill>
+                <a:latin typeface="Courier New" pitchFamily="34" charset="0"/>
+                <a:ea typeface="Courier New" pitchFamily="34" charset="-122"/>
+                <a:cs typeface="Courier New" pitchFamily="34" charset="-120"/>
+              </a:rPr>
+              <a:t>Prepare-toi a perdre, Damien !</a:t>
+            </a:r>
+            <a:endParaRPr lang="en-US" sz="1400" dirty="0"/>
+          </a:p>
+        </p:txBody>
+      </p:sp>
+      <p:sp>
+        <p:nvSpPr>
+          <p:cNvPr id="28" name="Text 26"/>
+          <p:cNvSpPr txBox="1"/>
+          <p:nvPr/>
+        </p:nvSpPr>
+        <p:spPr>
+          <a:xfrm>
+            <a:off x="640080" y="5440680"/>
+            <a:ext cx="10881360" cy="640080"/>
+          </a:xfrm>
+          <a:prstGeom prst="rect">
+            <a:avLst/>
+          </a:prstGeom>
+          <a:noFill/>
+          <a:ln/>
+        </p:spPr>
+        <p:txBody>
+          <a:bodyPr wrap="square" lIns="0" tIns="0" rIns="0" bIns="0" rtlCol="0" anchor="t"/>
+          <a:lstStyle/>
+          <a:p>
+            <a:pPr indent="0" marL="0">
+              <a:buNone/>
+            </a:pPr>
+            <a:r>
+              <a:rPr lang="en-US" sz="2100" b="1" dirty="0">
+                <a:solidFill>
+                  <a:srgbClr val="0C5C29"/>
+                </a:solidFill>
+                <a:latin typeface="Calibri" pitchFamily="34" charset="0"/>
+                <a:ea typeface="Calibri" pitchFamily="34" charset="-122"/>
+                <a:cs typeface="Calibri" pitchFamily="34" charset="-120"/>
+              </a:rPr>
+              <a:t>12 minutes. Carte bleue quand tu as fini : le défi t'attend en bas de ton fichier.</a:t>
+            </a:r>
+            <a:endParaRPr lang="en-US" sz="2100" dirty="0"/>
+          </a:p>
+        </p:txBody>
+      </p:sp>
+    </p:spTree>
+  </p:cSld>
+  <p:clrMapOvr>
+    <a:masterClrMapping/>
+  </p:clrMapOvr>
+</p:sld>
+</file>
+
+<file path=ppt/slides/slide25.xml><?xml version="1.0" encoding="utf-8"?>
+<p:sld xmlns:a="http://schemas.openxmlformats.org/drawingml/2006/main" xmlns:r="http://schemas.openxmlformats.org/officeDocument/2006/relationships" xmlns:p="http://schemas.openxmlformats.org/presentationml/2006/main">
+  <p:cSld name="Slide 25">
+    <p:bg>
+      <p:bgPr>
+        <a:solidFill>
+          <a:srgbClr val="F7F7FB"/>
+        </a:solidFill>
+      </p:bgPr>
+    </p:bg>
+    <p:spTree>
+      <p:nvGrpSpPr>
+        <p:cNvPr id="1" name=""/>
+        <p:cNvGrpSpPr/>
+        <p:nvPr/>
+      </p:nvGrpSpPr>
+      <p:grpSpPr>
+        <a:xfrm>
+          <a:off x="0" y="0"/>
+          <a:ext cx="0" cy="0"/>
+          <a:chOff x="0" y="0"/>
+          <a:chExt cx="0" cy="0"/>
+        </a:xfrm>
+      </p:grpSpPr>
+      <p:sp>
+        <p:nvSpPr>
+          <p:cNvPr id="2" name="Text 0"/>
+          <p:cNvSpPr txBox="1"/>
+          <p:nvPr/>
+        </p:nvSpPr>
+        <p:spPr>
+          <a:xfrm>
+            <a:off x="9509760" y="6181344"/>
+            <a:ext cx="2011680" cy="310896"/>
+          </a:xfrm>
+          <a:prstGeom prst="rect">
+            <a:avLst/>
+          </a:prstGeom>
+          <a:noFill/>
+          <a:ln/>
+        </p:spPr>
+        <p:txBody>
+          <a:bodyPr wrap="square" lIns="0" tIns="0" rIns="0" bIns="0" rtlCol="0" anchor="ctr"/>
+          <a:lstStyle/>
+          <a:p>
+            <a:pPr algn="r" indent="0" marL="0">
+              <a:buNone/>
+            </a:pPr>
+            <a:r>
+              <a:rPr lang="en-US" sz="1100" dirty="0">
+                <a:solidFill>
+                  <a:srgbClr val="5A5A72"/>
+                </a:solidFill>
+                <a:latin typeface="Courier New" pitchFamily="34" charset="0"/>
+                <a:ea typeface="Courier New" pitchFamily="34" charset="-122"/>
+                <a:cs typeface="Courier New" pitchFamily="34" charset="-120"/>
+              </a:rPr>
+              <a:t>13 h 37</a:t>
+            </a:r>
+            <a:endParaRPr lang="en-US" sz="1100" dirty="0"/>
+          </a:p>
+        </p:txBody>
+      </p:sp>
+      <p:sp>
+        <p:nvSpPr>
+          <p:cNvPr id="3" name="Shape 1"/>
+          <p:cNvSpPr/>
+          <p:nvPr/>
+        </p:nvSpPr>
+        <p:spPr>
+          <a:xfrm>
+            <a:off x="11558016" y="6217920"/>
+            <a:ext cx="68580" cy="68580"/>
+          </a:xfrm>
+          <a:prstGeom prst="roundRect">
+            <a:avLst>
+              <a:gd name="adj" fmla="val 26667"/>
+            </a:avLst>
+          </a:prstGeom>
+          <a:solidFill>
+            <a:srgbClr val="6B2D8F">
+              <a:alpha val="30000"/>
+            </a:srgbClr>
+          </a:solidFill>
+          <a:ln/>
+        </p:spPr>
+      </p:sp>
+      <p:sp>
+        <p:nvSpPr>
+          <p:cNvPr id="4" name="Shape 2"/>
+          <p:cNvSpPr/>
+          <p:nvPr/>
+        </p:nvSpPr>
+        <p:spPr>
+          <a:xfrm>
+            <a:off x="11650599" y="6217920"/>
+            <a:ext cx="68580" cy="68580"/>
+          </a:xfrm>
+          <a:prstGeom prst="roundRect">
+            <a:avLst>
+              <a:gd name="adj" fmla="val 26667"/>
+            </a:avLst>
+          </a:prstGeom>
+          <a:solidFill>
+            <a:srgbClr val="6B2D8F">
+              <a:alpha val="30000"/>
+            </a:srgbClr>
+          </a:solidFill>
+          <a:ln/>
+        </p:spPr>
+      </p:sp>
+      <p:sp>
+        <p:nvSpPr>
+          <p:cNvPr id="5" name="Shape 3"/>
+          <p:cNvSpPr/>
+          <p:nvPr/>
+        </p:nvSpPr>
+        <p:spPr>
+          <a:xfrm>
+            <a:off x="11743182" y="6217920"/>
+            <a:ext cx="68580" cy="68580"/>
+          </a:xfrm>
+          <a:prstGeom prst="roundRect">
+            <a:avLst>
+              <a:gd name="adj" fmla="val 26667"/>
+            </a:avLst>
+          </a:prstGeom>
+          <a:solidFill>
+            <a:srgbClr val="6B2D8F">
+              <a:alpha val="30000"/>
+            </a:srgbClr>
+          </a:solidFill>
+          <a:ln/>
+        </p:spPr>
+      </p:sp>
+      <p:sp>
+        <p:nvSpPr>
+          <p:cNvPr id="6" name="Shape 4"/>
+          <p:cNvSpPr/>
+          <p:nvPr/>
+        </p:nvSpPr>
+        <p:spPr>
+          <a:xfrm>
+            <a:off x="11558016" y="6310503"/>
+            <a:ext cx="68580" cy="68580"/>
+          </a:xfrm>
+          <a:prstGeom prst="roundRect">
+            <a:avLst>
+              <a:gd name="adj" fmla="val 26667"/>
+            </a:avLst>
+          </a:prstGeom>
+          <a:solidFill>
+            <a:srgbClr val="6B2D8F">
+              <a:alpha val="30000"/>
+            </a:srgbClr>
+          </a:solidFill>
+          <a:ln/>
+        </p:spPr>
+      </p:sp>
+      <p:sp>
+        <p:nvSpPr>
+          <p:cNvPr id="7" name="Shape 5"/>
+          <p:cNvSpPr/>
+          <p:nvPr/>
+        </p:nvSpPr>
+        <p:spPr>
+          <a:xfrm>
+            <a:off x="11650599" y="6310503"/>
+            <a:ext cx="68580" cy="68580"/>
+          </a:xfrm>
+          <a:prstGeom prst="roundRect">
+            <a:avLst>
+              <a:gd name="adj" fmla="val 26667"/>
+            </a:avLst>
+          </a:prstGeom>
+          <a:solidFill>
+            <a:srgbClr val="6B2D8F">
+              <a:alpha val="30000"/>
+            </a:srgbClr>
+          </a:solidFill>
+          <a:ln/>
+        </p:spPr>
+      </p:sp>
+      <p:sp>
+        <p:nvSpPr>
+          <p:cNvPr id="8" name="Shape 6"/>
+          <p:cNvSpPr/>
+          <p:nvPr/>
+        </p:nvSpPr>
+        <p:spPr>
+          <a:xfrm>
+            <a:off x="11743182" y="6310503"/>
+            <a:ext cx="68580" cy="68580"/>
+          </a:xfrm>
+          <a:prstGeom prst="roundRect">
+            <a:avLst>
+              <a:gd name="adj" fmla="val 26667"/>
+            </a:avLst>
+          </a:prstGeom>
+          <a:solidFill>
+            <a:srgbClr val="6B2D8F">
+              <a:alpha val="30000"/>
+            </a:srgbClr>
+          </a:solidFill>
+          <a:ln/>
+        </p:spPr>
+      </p:sp>
+      <p:sp>
+        <p:nvSpPr>
+          <p:cNvPr id="9" name="Shape 7"/>
+          <p:cNvSpPr/>
+          <p:nvPr/>
+        </p:nvSpPr>
+        <p:spPr>
+          <a:xfrm>
+            <a:off x="11558016" y="6403086"/>
+            <a:ext cx="68580" cy="68580"/>
+          </a:xfrm>
+          <a:prstGeom prst="roundRect">
+            <a:avLst>
+              <a:gd name="adj" fmla="val 26667"/>
+            </a:avLst>
+          </a:prstGeom>
+          <a:solidFill>
+            <a:srgbClr val="6B2D8F">
+              <a:alpha val="30000"/>
+            </a:srgbClr>
+          </a:solidFill>
+          <a:ln/>
+        </p:spPr>
+      </p:sp>
+      <p:sp>
+        <p:nvSpPr>
+          <p:cNvPr id="10" name="Shape 8"/>
+          <p:cNvSpPr/>
+          <p:nvPr/>
+        </p:nvSpPr>
+        <p:spPr>
+          <a:xfrm>
+            <a:off x="11650599" y="6403086"/>
+            <a:ext cx="68580" cy="68580"/>
+          </a:xfrm>
+          <a:prstGeom prst="roundRect">
+            <a:avLst>
+              <a:gd name="adj" fmla="val 26667"/>
+            </a:avLst>
+          </a:prstGeom>
+          <a:solidFill>
+            <a:srgbClr val="6B2D8F">
+              <a:alpha val="30000"/>
+            </a:srgbClr>
+          </a:solidFill>
+          <a:ln/>
+        </p:spPr>
+      </p:sp>
+      <p:sp>
+        <p:nvSpPr>
+          <p:cNvPr id="11" name="Shape 9"/>
+          <p:cNvSpPr/>
+          <p:nvPr/>
+        </p:nvSpPr>
+        <p:spPr>
+          <a:xfrm>
+            <a:off x="11743182" y="6403086"/>
+            <a:ext cx="68580" cy="68580"/>
+          </a:xfrm>
+          <a:prstGeom prst="roundRect">
+            <a:avLst>
+              <a:gd name="adj" fmla="val 26667"/>
+            </a:avLst>
+          </a:prstGeom>
+          <a:solidFill>
+            <a:srgbClr val="6B2D8F">
+              <a:alpha val="30000"/>
+            </a:srgbClr>
+          </a:solidFill>
+          <a:ln/>
+        </p:spPr>
+      </p:sp>
+      <p:sp>
+        <p:nvSpPr>
+          <p:cNvPr id="12" name="Text 10"/>
+          <p:cNvSpPr txBox="1"/>
+          <p:nvPr/>
+        </p:nvSpPr>
+        <p:spPr>
+          <a:xfrm>
+            <a:off x="640080" y="457200"/>
+            <a:ext cx="10881360" cy="310896"/>
+          </a:xfrm>
+          <a:prstGeom prst="rect">
+            <a:avLst/>
+          </a:prstGeom>
+          <a:noFill/>
+          <a:ln/>
+        </p:spPr>
+        <p:txBody>
+          <a:bodyPr wrap="square" lIns="0" tIns="0" rIns="0" bIns="0" rtlCol="0" anchor="ctr"/>
+          <a:lstStyle/>
+          <a:p>
+            <a:pPr indent="0" marL="0">
+              <a:buNone/>
+            </a:pPr>
+            <a:r>
+              <a:rPr lang="en-US" sz="1300" b="1" spc="300" kern="0" dirty="0">
+                <a:solidFill>
                   <a:srgbClr val="A65D00"/>
                 </a:solidFill>
                 <a:latin typeface="Calibri" pitchFamily="34" charset="0"/>
@@ -15182,9 +16688,9 @@
 </p:sld>
 </file>
 
-<file path=ppt/slides/slide25.xml><?xml version="1.0" encoding="utf-8"?>
+<file path=ppt/slides/slide26.xml><?xml version="1.0" encoding="utf-8"?>
 <p:sld xmlns:a="http://schemas.openxmlformats.org/drawingml/2006/main" xmlns:r="http://schemas.openxmlformats.org/officeDocument/2006/relationships" xmlns:p="http://schemas.openxmlformats.org/presentationml/2006/main">
-  <p:cSld name="Slide 25">
+  <p:cSld name="Slide 26">
     <p:bg>
       <p:bgPr>
         <a:solidFill>
@@ -15675,9 +17181,9 @@
 </p:sld>
 </file>
 
-<file path=ppt/slides/slide26.xml><?xml version="1.0" encoding="utf-8"?>
+<file path=ppt/slides/slide27.xml><?xml version="1.0" encoding="utf-8"?>
 <p:sld xmlns:a="http://schemas.openxmlformats.org/drawingml/2006/main" xmlns:r="http://schemas.openxmlformats.org/officeDocument/2006/relationships" xmlns:p="http://schemas.openxmlformats.org/presentationml/2006/main">
-  <p:cSld name="Slide 26">
+  <p:cSld name="Slide 27">
     <p:bg>
       <p:bgPr>
         <a:solidFill>
@@ -16029,7 +17535,7 @@
                 <a:ea typeface="Calibri" pitchFamily="34" charset="-122"/>
                 <a:cs typeface="Calibri" pitchFamily="34" charset="-120"/>
               </a:rPr>
-              <a:t>Votre jeu a appris à écouter.</a:t>
+              <a:t>Votre jeu parle, et il écoute.</a:t>
             </a:r>
             <a:endParaRPr lang="en-US" sz="4000" dirty="0"/>
           </a:p>
@@ -16420,9 +17926,9 @@
 </p:sld>
 </file>
 
-<file path=ppt/slides/slide27.xml><?xml version="1.0" encoding="utf-8"?>
+<file path=ppt/slides/slide28.xml><?xml version="1.0" encoding="utf-8"?>
 <p:sld xmlns:a="http://schemas.openxmlformats.org/drawingml/2006/main" xmlns:r="http://schemas.openxmlformats.org/officeDocument/2006/relationships" xmlns:p="http://schemas.openxmlformats.org/presentationml/2006/main">
-  <p:cSld name="Slide 27">
+  <p:cSld name="Slide 28">
     <p:bg>
       <p:bgPr>
         <a:solidFill>
@@ -16990,7 +18496,7 @@
                 <a:ea typeface="Calibri" pitchFamily="34" charset="-122"/>
                 <a:cs typeface="Calibri" pitchFamily="34" charset="-120"/>
               </a:rPr>
-              <a:t>Votre jeu saura parler</a:t>
+              <a:t>Votre jeu parlera</a:t>
             </a:r>
             <a:endParaRPr lang="en-US" sz="4000" dirty="0"/>
           </a:p>
@@ -18132,7 +19638,7 @@
                 <a:ea typeface="Calibri" pitchFamily="34" charset="-122"/>
                 <a:cs typeface="Calibri" pitchFamily="34" charset="-120"/>
               </a:rPr>
-              <a:t>À 13 h 05. Votre jeu va vous demander votre nom.</a:t>
+              <a:t>À 13 h. Votre jeu va vous demander votre nom.</a:t>
             </a:r>
             <a:endParaRPr lang="en-US" sz="1500" dirty="0"/>
           </a:p>
@@ -18171,7 +19677,7 @@
                 <a:ea typeface="Calibri" pitchFamily="34" charset="-122"/>
                 <a:cs typeface="Calibri" pitchFamily="34" charset="-120"/>
               </a:rPr>
-              <a:t>À 13 h 05, tout le monde est devant un clavier. C'est la seule chose qui ne bougera pas.</a:t>
+              <a:t>À 13 h, tout le monde est devant un clavier. C'est la seule chose qui ne bougera pas.</a:t>
             </a:r>
             <a:endParaRPr lang="en-US" sz="2100" dirty="0"/>
           </a:p>
@@ -18940,7 +20446,7 @@
                 <a:ea typeface="Courier New" pitchFamily="34" charset="-122"/>
                 <a:cs typeface="Courier New" pitchFamily="34" charset="-120"/>
               </a:rPr>
-              <a:t>12 h 25 - 12 h 45</a:t>
+              <a:t>12 h 22 - 12 h 40</a:t>
             </a:r>
             <a:endParaRPr lang="en-US" sz="1100" dirty="0"/>
           </a:p>
@@ -19599,7 +21105,7 @@
                 <a:ea typeface="Courier New" pitchFamily="34" charset="-122"/>
                 <a:cs typeface="Courier New" pitchFamily="34" charset="-120"/>
               </a:rPr>
-              <a:t>12 h 25</a:t>
+              <a:t>12 h 22</a:t>
             </a:r>
             <a:endParaRPr lang="en-US" sz="1100" dirty="0"/>
           </a:p>
@@ -20434,7 +21940,7 @@
                 <a:ea typeface="Courier New" pitchFamily="34" charset="-122"/>
                 <a:cs typeface="Courier New" pitchFamily="34" charset="-120"/>
               </a:rPr>
-              <a:t>12 h 45</a:t>
+              <a:t>12 h 40</a:t>
             </a:r>
             <a:endParaRPr lang="en-US" sz="1100" dirty="0"/>
           </a:p>
@@ -21074,7 +22580,7 @@
                 <a:ea typeface="Courier New" pitchFamily="34" charset="-122"/>
                 <a:cs typeface="Courier New" pitchFamily="34" charset="-120"/>
               </a:rPr>
-              <a:t>12 h 45</a:t>
+              <a:t>12 h 40</a:t>
             </a:r>
             <a:endParaRPr lang="en-US" sz="1100" dirty="0"/>
           </a:p>
@@ -21811,7 +23317,7 @@
                 <a:ea typeface="Courier New" pitchFamily="34" charset="-122"/>
                 <a:cs typeface="Courier New" pitchFamily="34" charset="-120"/>
               </a:rPr>
-              <a:t>12 h 49</a:t>
+              <a:t>12 h 44</a:t>
             </a:r>
             <a:endParaRPr lang="en-US" sz="1100" dirty="0"/>
           </a:p>
